--- a/Curso Gas B/04 - ITC-ICG 07 - Instalaciones receptoras de combustibles gaseosos/04 - ITC-ICG 07 - Instalaciones receptoras de combustibles gaseosos - Vídeo 3.pptx
+++ b/Curso Gas B/04 - ITC-ICG 07 - Instalaciones receptoras de combustibles gaseosos/04 - ITC-ICG 07 - Instalaciones receptoras de combustibles gaseosos - Vídeo 3.pptx
@@ -21,6 +21,10 @@
     <p:sldId id="269" r:id="rId21"/>
     <p:sldId id="270" r:id="rId22"/>
     <p:sldId id="271" r:id="rId23"/>
+    <p:sldId id="272" r:id="rId24"/>
+    <p:sldId id="273" r:id="rId25"/>
+    <p:sldId id="274" r:id="rId26"/>
+    <p:sldId id="275" r:id="rId27"/>
   </p:sldIdLst>
   <p:sldSz cx="12191695" cy="6858000" type="screen4x3"/>
   <p:notesSz cx="6858000" cy="9144000"/>
@@ -517,12 +521,12 @@
           <a:lstStyle/>
           <a:p>
             <a:r>
-              <a:t>N1: La instalación no acaba el día que se enciende. ¿Qué queda por delante?</a:t>
-            </a:r>
-          </a:p>
-          <a:p>
-            <a:r>
-              <a:t>N2: Queda mantenerla viva y segura durante años. En este último vídeo del tema vemos el mantenimiento y los controles periódicos, con la gran pareja del oficio, inspección frente a revisión; el procedimiento paso a paso cuando aparecen anomalías; qué cuenta como modificación de una instalación; y, para cerrar, el anexo con los modelos de impresos y la información mínima de cada documento. Ojo a las cifras, porque se preguntan mucho: cinco años, tres meses, cinco días, quince días hábiles y diez años.</a:t>
+              <a:t>N1: ¿Qué nos queda por ver para cerrar el tema?</a:t>
+            </a:r>
+          </a:p>
+          <a:p>
+            <a:r>
+              <a:t>N2: Nos queda la vida de la instalación después de encenderla, que no es poco. Una instalación de gas no se acaba el día que arranca: hay que mantenerla viva y segura durante años. En este último vídeo vemos el mantenimiento y los controles periódicos, con la gran pareja inspección contra revisión; el procedimiento paso a paso cuando aparecen anomalías; qué cuenta como modificación de una instalación; y, para cerrar, el anexo con los modelos de impresos, del uno erre ge uno al cinco. Ojo a las cifras, que caen mucho: cinco años, tres meses, cinco días, quince días hábiles y diez años.</a:t>
             </a:r>
           </a:p>
         </p:txBody>
@@ -592,12 +596,12 @@
           <a:lstStyle/>
           <a:p>
             <a:r>
-              <a:t>N1: Aparece una anomalía. ¿Qué pasa según sea principal o secundaria?</a:t>
-            </a:r>
-          </a:p>
-          <a:p>
-            <a:r>
-              <a:t>N2: La anomalía principal es la grave: si no se puede corregir en el momento, se interrumpe el suministro y se precinta la parte afectada o el aparato. Y grábate esto: todas las fugas se consideran anomalía principal. La secundaria es menos grave; si es por falta de estanquidad, hay un plazo de quince días hábiles para corregirla. El responsable de corregir es el titular o usuario, con un instalador habilitado o un servicio técnico, que le entrega un justificante de corrección y manda copia al distribuidor. Cuando la instaladora resuelve las anomalías principales que causaron el precinto, hace el desprecintado y lo comunica con un certificado de subsanación. Y el distribuidor guarda los datos de la inspección durante diez años, consultables por la Comunidad Autónoma.</a:t>
+              <a:t>N1: Hay muchos plazos, ¿cómo no me hago un lío?</a:t>
+            </a:r>
+          </a:p>
+          <a:p>
+            <a:r>
+              <a:t>N2: Te los pongo todos juntos, en orden, y verás que se recuerdan como una frasecita. Tres meses: es la antelación con que el distribuidor avisa de la obligación de inspección. Cinco días: la antelación mínima con que el distribuidor comunica la fecha de la visita cuando la hace él. Quince días hábiles: el plazo para corregir una anomalía secundaria por falta de estanquidad. Diez años: lo que el distribuidor guarda en su base de datos la fecha y el resultado de las inspecciones, consultable por la comunidad autónoma. Y por encima de todo, cinco años, la periodicidad. Truco para memorizar: avisa con tres meses, se planta con cinco días, arreglas en quince días hábiles y guarda diez años.</a:t>
             </a:r>
           </a:p>
         </p:txBody>
@@ -667,12 +671,12 @@
           <a:lstStyle/>
           <a:p>
             <a:r>
-              <a:t>N1: ¿Y si la instalación no cuelga de una red, sino de un depósito propio?</a:t>
-            </a:r>
-          </a:p>
-          <a:p>
-            <a:r>
-              <a:t>N2: Entonces no es inspección, es revisión, y la encarga el titular o usuario a una empresa instaladora de gas de la ITC-ICG cero nueve. Es cada cinco años, con un alcance parecido al de la inspección, y se hace coincidir con la revisión del depósito o los envases que la alimentan. Comprueba casi lo mismo: estanquidad, conservación, combustión higiénica, ventilación y volumen del local, detección de gas y evacuación de humos; y añade una cosa propia: el estado de la protección catódica de las canalizaciones de acero enterradas. La protección catódica es el sistema que evita que la tubería de acero enterrada se oxide. Y en gases licuados del petróleo, todas las fugas son anomalía principal. Cuando es favorable, se emite el certificado de revisión periódica, modelo IRG cuatro para individuales o IRG cinco para comunes.</a:t>
+              <a:t>N1: Si encuentro una anomalía en la inspección, ¿la arreglo yo mismo?</a:t>
+            </a:r>
+          </a:p>
+          <a:p>
+            <a:r>
+              <a:t>N2: No, y esta es una regla de oro que se pregunta mucho: la misma empresa, o el mismo instalador, que hace la inspección no puede reparar las anomalías que ha detectado. Cuando aparecen anomalías, se remite a la distribuidora un informe de anomalías, con su plazo máximo de corrección, y se entrega copia al titular; pero la reparación la tiene que hacer otro. ¿Por qué? Para evitar el conflicto de interés. Es como que el profesor que te pone el examen no debería ser también quien te cobra las clases particulares para aprobarlo: se prestaría a inflar defectos para luego cobrarte el arreglo. Separando quien inspecciona de quien repara, el sistema es más honesto.</a:t>
             </a:r>
           </a:p>
         </p:txBody>
@@ -742,12 +746,12 @@
           <a:lstStyle/>
           <a:p>
             <a:r>
-              <a:t>N1: Si solo te llevas una idea del vídeo, que sea esta. ¿Cómo distingues inspección de revisión?</a:t>
-            </a:r>
-          </a:p>
-          <a:p>
-            <a:r>
-              <a:t>N2: Con una sola pregunta: ¿está conectada a la red de distribución de la compañía? Si la respuesta es sí, gas natural de ciudad o gases licuados de red, es inspección, apartado cuatro punto uno. Si la respuesta es no, un depósito propio en un chalé o unas bombonas, es revisión, apartado cuatro punto dos. Ambas son cada cinco años y comprueban prácticamente lo mismo. Las diferencias que caen: la revisión añade la protección catódica de la tubería de acero enterrada y se hace coincidir con la del depósito; y en la revisión se dice que todas las fugas de gases licuados son principales. Piensa: protección catódica igual a revisión igual a depósito propio.</a:t>
+              <a:t>N1: ¿Qué diferencia hay entre una anomalía principal y una secundaria?</a:t>
+            </a:r>
+          </a:p>
+          <a:p>
+            <a:r>
+              <a:t>N2: Es cuestión de gravedad. Una anomalía principal es grave: si no se puede corregir en el momento, se interrumpe el suministro y se precinta la parte de la instalación o el aparato afectado. Y grábate esto: todas las fugas se consideran anomalía principal, sin excepción. Una anomalía secundaria es menos grave: en lugar de cortar, se da un plazo para arreglarla, por ejemplo quince días hábiles si es una falta de estanquidad secundaria. Para volver a dar gas después de resolver una principal, la empresa instaladora emite un certificado de subsanación y hace el desprecintado. Asócialo: principal, precinto y corte; secundaria, plazo. Y la reina de las principales, siempre, la fuga.</a:t>
             </a:r>
           </a:p>
         </p:txBody>
@@ -817,12 +821,12 @@
           <a:lstStyle/>
           <a:p>
             <a:r>
-              <a:t>N1: ¿Cuándo un cambio pasa a ser modificación oficial?</a:t>
-            </a:r>
-          </a:p>
-          <a:p>
-            <a:r>
-              <a:t>N2: Cuando cambias material o trazado en una longitud superior a un metro, o amplías el consumo, o sustituyes un aparato por otro de características técnicas diferentes. Cambiar medio metro de tubo o poner una caldera idéntica no dispara la obligación; pasar de un metro de trazado nuevo, sí. Y la cadena de agentes: la empresa instaladora que hace la modificación la comunica al suministrador; este solicita el enganche al distribuidor, que realiza las pruebas previas; y los derechos de enganche los paga el usuario final. Encadénalo: instaladora comunica, suministrador pide enganche, distribuidor prueba, usuario paga.</a:t>
+              <a:t>N1: Y la revisión, ¿en qué se diferencia en la práctica?</a:t>
+            </a:r>
+          </a:p>
+          <a:p>
+            <a:r>
+              <a:t>N2: La revisión es para las instalaciones que no están conectadas a una red de distribución: las que van con un depósito propio de gases del petróleo o con bombonas. Aquí no hay distribuidor por detrás, así que es el titular, o en su defecto el usuario, quien tiene que encargar la revisión a una empresa instaladora de gas, según la ITC-ICG cero nueve. Se hace cada cinco años, igual que la inspección, y comprueba prácticamente lo mismo. Dos diferencias que caen en examen: la revisión se hace coincidir con la revisión del depósito o los envases que alimentan la instalación, para hacerlo todo de una vez, y añade una comprobación extra que vemos ahora, la protección catódica.</a:t>
             </a:r>
           </a:p>
         </p:txBody>
@@ -892,12 +896,12 @@
           <a:lstStyle/>
           <a:p>
             <a:r>
-              <a:t>N1: Cinco impresos. No los memorices a lo bruto: míralos por parejas. ¿Qué lógica tienen?</a:t>
-            </a:r>
-          </a:p>
-          <a:p>
-            <a:r>
-              <a:t>N2: Los IRG uno, dos y tres son los certificados de instalación, del montaje: acometida interior, común e individual. Los IRG cuatro y cinco son certificados de revisión periódica de instalaciones no alimentadas desde red, es decir de depósito propio: el cuatro para individuales y el cinco para comunes. Fíjate en que los cuatro y cinco son de revisión, no de inspección. Los documentos de inspección, los de instalaciones alimentadas desde red, no llevan número IRG: la norma solo fija su información mínima, el certificado de inspección y el informe de anomalías. Truco: si el impreso tiene número IRG cuatro o cinco, piensa revisión y depósito propio.</a:t>
+              <a:t>N1: ¿Qué es la protección catódica y por qué solo sale en la revisión?</a:t>
+            </a:r>
+          </a:p>
+          <a:p>
+            <a:r>
+              <a:t>N2: La protección catódica es un sistema que evita que una tubería de acero enterrada se oxide y se corroa. Dicho en fácil, se le aplica una pequeña corriente eléctrica que engaña al metal para que no se lo coma la corrosión del terreno. Se comprueba solo en la revisión porque las instalaciones sin red, las de depósito propio, suelen llevar tramos de acero enterrado hasta el depósito, y esos son los que corren riesgo de corroerse bajo tierra. Regla práctica: si en una pregunta ves protección catódica, piensa automáticamente en revisión y en tubería de acero enterrada. En la inspección de las de red no aparece este punto.</a:t>
             </a:r>
           </a:p>
         </p:txBody>
@@ -967,12 +971,12 @@
           <a:lstStyle/>
           <a:p>
             <a:r>
-              <a:t>N1: Hay un par que se repite en todos los impresos. ¿Cuál?</a:t>
-            </a:r>
-          </a:p>
-          <a:p>
-            <a:r>
-              <a:t>N2: Cómo se identifica la instalación: para gas natural se usa el código del punto de suministro, el famoso CUPS; para gases licuados del petróleo se usa el número de póliza. Por eso los impresos de revisión, que son de instalaciones no alimentadas desde red y por tanto de gases licuados, solo piden número de póliza. El certificado de pruebas previas y puesta en servicio es el único que pide datos del contador, número de serie y lectura inicial, porque es el momento en que el contador arranca a cero. Y todos los papeles acaban igual: fecha, situación en que queda la instalación, en servicio o precintada, firma del técnico con sello de la empresa y firma del cliente. Esa casilla de la situación es la clave: dice si el gas sigue o se ha cortado.</a:t>
+              <a:t>N1: ¿Qué papel se firma cuando la revisión sale bien?</a:t>
+            </a:r>
+          </a:p>
+          <a:p>
+            <a:r>
+              <a:t>N2: Cuando la visita es favorable, se entrega al usuario un certificado de revisión periódica, y hay dos modelos según el tramo. El uno erre ge guion cuatro es el de la revisión periódica de instalaciones individuales y aparatos no alimentados desde red. El uno erre ge guion cinco es el de la revisión de la instalación común, también sin red. Los dos certifican que no hay anomalías principales ni secundarias, y su validez es de cinco años, que es justo lo que tarda en tocar la siguiente. Fíjate en el matiz importante: estos dos, el cuatro y el cinco, son de revisión, o sea de instalaciones de depósito propio; no los confundas con la inspección de las de red, que no lleva número erre ge.</a:t>
             </a:r>
           </a:p>
         </p:txBody>
@@ -1042,12 +1046,237 @@
           <a:lstStyle/>
           <a:p>
             <a:r>
-              <a:t>N1: Cerramos el tema con las tres ideas que no se te pueden escapar.</a:t>
-            </a:r>
-          </a:p>
-          <a:p>
-            <a:r>
-              <a:t>N2: Primera, inspección o revisión se decide con una pregunta, si está conectada a la red: sí es inspección, no es revisión; ambas cada cinco años, y la revisión añade la protección catódica y se sincroniza con el depósito. Segunda, las anomalías: la principal corta el gas y precinta en el acto, y todas las fugas son principales; la secundaria da plazo, quince días hábiles si es de estanquidad; y regla de oro, el que inspecciona no repara. Y tercera, la modificación salta con más de un metro de material o trazado, o al ampliar consumo o cambiar de aparato; la instaladora comunica, el suministrador pide enganche, el distribuidor prueba y el usuario paga. Y no olvides las cifras del procedimiento: tres meses de aviso, cinco días de visita, quince días hábiles, diez años de archivo y cinco años de periodicidad.</a:t>
+              <a:t>N1: ¿Cuándo se considera oficialmente que he modificado una instalación?</a:t>
+            </a:r>
+          </a:p>
+          <a:p>
+            <a:r>
+              <a:t>N2: Hay tres casos, y el primero lleva un número que conviene memorizar. Uno: cuando cambias el material o el trazado en una longitud superior a un metro. Cambiar medio metro de tubo no cuenta; pasar de un metro, sí. Dos: cualquier ampliación de consumo. Y tres: sustituir un aparato por otro de características técnicas diferentes; cambiar una caldera por otra idéntica no dispara nada, pero por una distinta sí. Cuando ocurre cualquiera de estos, hay modificación oficial, y eso obliga a comunicarlo al suministrador. Retén la frase: más de un metro de material o trazado, es modificación.</a:t>
+            </a:r>
+          </a:p>
+        </p:txBody>
+      </p:sp>
+      <p:sp>
+        <p:nvSpPr>
+          <p:cNvPr id="4" name="Slide Number Placeholder 3"/>
+          <p:cNvSpPr>
+            <a:spLocks noGrp="1"/>
+          </p:cNvSpPr>
+          <p:nvPr>
+            <p:ph type="sldNum" idx="5" sz="quarter"/>
+          </p:nvPr>
+        </p:nvSpPr>
+        <p:spPr/>
+      </p:sp>
+    </p:spTree>
+  </p:cSld>
+  <p:clrMapOvr>
+    <a:masterClrMapping/>
+  </p:clrMapOvr>
+</p:notes>
+</file>
+
+<file path=ppt/notesSlides/notesSlide17.xml><?xml version="1.0" encoding="utf-8"?>
+<p:notes xmlns:a="http://schemas.openxmlformats.org/drawingml/2006/main" xmlns:p="http://schemas.openxmlformats.org/presentationml/2006/main" xmlns:r="http://schemas.openxmlformats.org/officeDocument/2006/relationships">
+  <p:cSld>
+    <p:spTree>
+      <p:nvGrpSpPr>
+        <p:cNvPr id="1" name=""/>
+        <p:cNvGrpSpPr/>
+        <p:nvPr/>
+      </p:nvGrpSpPr>
+      <p:grpSpPr>
+        <a:xfrm>
+          <a:off x="0" y="0"/>
+          <a:ext cx="0" cy="0"/>
+          <a:chOff x="0" y="0"/>
+          <a:chExt cx="0" cy="0"/>
+        </a:xfrm>
+      </p:grpSpPr>
+      <p:sp>
+        <p:nvSpPr>
+          <p:cNvPr id="2" name="Slide Image Placeholder 1"/>
+          <p:cNvSpPr>
+            <a:spLocks noGrp="1"/>
+          </p:cNvSpPr>
+          <p:nvPr>
+            <p:ph type="sldImg" idx="2"/>
+          </p:nvPr>
+        </p:nvSpPr>
+        <p:spPr/>
+      </p:sp>
+      <p:sp>
+        <p:nvSpPr>
+          <p:cNvPr id="3" name="Notes Placeholder 2"/>
+          <p:cNvSpPr>
+            <a:spLocks noGrp="1"/>
+          </p:cNvSpPr>
+          <p:nvPr>
+            <p:ph type="body" idx="3" sz="quarter"/>
+          </p:nvPr>
+        </p:nvSpPr>
+        <p:spPr/>
+        <p:txBody>
+          <a:bodyPr/>
+          <a:lstStyle/>
+          <a:p>
+            <a:r>
+              <a:t>N1: Y cuando hay modificación, ¿quién avisa a quién?</a:t>
+            </a:r>
+          </a:p>
+          <a:p>
+            <a:r>
+              <a:t>N2: Es una cadena con cuatro eslabones, encádenala en orden. Primero, la empresa instaladora que ha hecho la modificación lo comunica al suministrador; el que modifica es quien avisa, no el usuario. Segundo, el suministrador solicita el enganche al distribuidor. Tercero, el distribuidor realiza las pruebas previas que marca el reglamento, para asegurarse de que la modificación quedó bien. Y cuarto, el coste de los derechos de enganche lo paga el usuario final. La frase para recordarlo: la instaladora comunica, el suministrador pide enganche, el distribuidor prueba y el usuario paga. Cada uno en su sitio.</a:t>
+            </a:r>
+          </a:p>
+        </p:txBody>
+      </p:sp>
+      <p:sp>
+        <p:nvSpPr>
+          <p:cNvPr id="4" name="Slide Number Placeholder 3"/>
+          <p:cNvSpPr>
+            <a:spLocks noGrp="1"/>
+          </p:cNvSpPr>
+          <p:nvPr>
+            <p:ph type="sldNum" idx="5" sz="quarter"/>
+          </p:nvPr>
+        </p:nvSpPr>
+        <p:spPr/>
+      </p:sp>
+    </p:spTree>
+  </p:cSld>
+  <p:clrMapOvr>
+    <a:masterClrMapping/>
+  </p:clrMapOvr>
+</p:notes>
+</file>
+
+<file path=ppt/notesSlides/notesSlide18.xml><?xml version="1.0" encoding="utf-8"?>
+<p:notes xmlns:a="http://schemas.openxmlformats.org/drawingml/2006/main" xmlns:p="http://schemas.openxmlformats.org/presentationml/2006/main" xmlns:r="http://schemas.openxmlformats.org/officeDocument/2006/relationships">
+  <p:cSld>
+    <p:spTree>
+      <p:nvGrpSpPr>
+        <p:cNvPr id="1" name=""/>
+        <p:cNvGrpSpPr/>
+        <p:nvPr/>
+      </p:nvGrpSpPr>
+      <p:grpSpPr>
+        <a:xfrm>
+          <a:off x="0" y="0"/>
+          <a:ext cx="0" cy="0"/>
+          <a:chOff x="0" y="0"/>
+          <a:chExt cx="0" cy="0"/>
+        </a:xfrm>
+      </p:grpSpPr>
+      <p:sp>
+        <p:nvSpPr>
+          <p:cNvPr id="2" name="Slide Image Placeholder 1"/>
+          <p:cNvSpPr>
+            <a:spLocks noGrp="1"/>
+          </p:cNvSpPr>
+          <p:nvPr>
+            <p:ph type="sldImg" idx="2"/>
+          </p:nvPr>
+        </p:nvSpPr>
+        <p:spPr/>
+      </p:sp>
+      <p:sp>
+        <p:nvSpPr>
+          <p:cNvPr id="3" name="Notes Placeholder 2"/>
+          <p:cNvSpPr>
+            <a:spLocks noGrp="1"/>
+          </p:cNvSpPr>
+          <p:nvPr>
+            <p:ph type="body" idx="3" sz="quarter"/>
+          </p:nvPr>
+        </p:nvSpPr>
+        <p:spPr/>
+        <p:txBody>
+          <a:bodyPr/>
+          <a:lstStyle/>
+          <a:p>
+            <a:r>
+              <a:t>N1: ¿Cómo me aprendo los cinco modelos sin volverme loco?</a:t>
+            </a:r>
+          </a:p>
+          <a:p>
+            <a:r>
+              <a:t>N2: No los memorices a lo bruto; míralos por parejas con una lógica. Los tres primeros, del uno erre ge uno al tres, son certificados de instalación, del montaje: el uno es la acometida interior, el dos la instalación común y el tres la individual. Los dos últimos, el cuatro y el cinco, son certificados de revisión periódica de instalaciones no alimentadas desde red, es decir, de depósito propio: el cuatro para individuales y el cinco para comunes. Fíjate en un detalle que se pregunta: los certificados de inspección de las instalaciones de red no tienen número erre ge; de esos, el anexo solo fija la información mínima. O sea, con número erre ge están el montaje y la revisión sin red; la inspección de red va sin número.</a:t>
+            </a:r>
+          </a:p>
+        </p:txBody>
+      </p:sp>
+      <p:sp>
+        <p:nvSpPr>
+          <p:cNvPr id="4" name="Slide Number Placeholder 3"/>
+          <p:cNvSpPr>
+            <a:spLocks noGrp="1"/>
+          </p:cNvSpPr>
+          <p:nvPr>
+            <p:ph type="sldNum" idx="5" sz="quarter"/>
+          </p:nvPr>
+        </p:nvSpPr>
+        <p:spPr/>
+      </p:sp>
+    </p:spTree>
+  </p:cSld>
+  <p:clrMapOvr>
+    <a:masterClrMapping/>
+  </p:clrMapOvr>
+</p:notes>
+</file>
+
+<file path=ppt/notesSlides/notesSlide19.xml><?xml version="1.0" encoding="utf-8"?>
+<p:notes xmlns:a="http://schemas.openxmlformats.org/drawingml/2006/main" xmlns:p="http://schemas.openxmlformats.org/presentationml/2006/main" xmlns:r="http://schemas.openxmlformats.org/officeDocument/2006/relationships">
+  <p:cSld>
+    <p:spTree>
+      <p:nvGrpSpPr>
+        <p:cNvPr id="1" name=""/>
+        <p:cNvGrpSpPr/>
+        <p:nvPr/>
+      </p:nvGrpSpPr>
+      <p:grpSpPr>
+        <a:xfrm>
+          <a:off x="0" y="0"/>
+          <a:ext cx="0" cy="0"/>
+          <a:chOff x="0" y="0"/>
+          <a:chExt cx="0" cy="0"/>
+        </a:xfrm>
+      </p:grpSpPr>
+      <p:sp>
+        <p:nvSpPr>
+          <p:cNvPr id="2" name="Slide Image Placeholder 1"/>
+          <p:cNvSpPr>
+            <a:spLocks noGrp="1"/>
+          </p:cNvSpPr>
+          <p:nvPr>
+            <p:ph type="sldImg" idx="2"/>
+          </p:nvPr>
+        </p:nvSpPr>
+        <p:spPr/>
+      </p:sp>
+      <p:sp>
+        <p:nvSpPr>
+          <p:cNvPr id="3" name="Notes Placeholder 2"/>
+          <p:cNvSpPr>
+            <a:spLocks noGrp="1"/>
+          </p:cNvSpPr>
+          <p:nvPr>
+            <p:ph type="body" idx="3" sz="quarter"/>
+          </p:nvPr>
+        </p:nvSpPr>
+        <p:spPr/>
+        <p:txBody>
+          <a:bodyPr/>
+          <a:lstStyle/>
+          <a:p>
+            <a:r>
+              <a:t>N1: ¿Por qué unos impresos piden un código y otros un número de póliza?</a:t>
+            </a:r>
+          </a:p>
+          <a:p>
+            <a:r>
+              <a:t>N2: Porque el gas se identifica de forma distinta según el tipo. Para el gas natural, la instalación se identifica con el código del punto de suministro, ese código largo que en las facturas verás como cups. Para los gases del petróleo, el ge ele pe, se identifica con el número de póliza. Este par se repite en todos los impresos, así que si te lo aprendes, resuelves varias preguntas de golpe: gas natural igual a punto de suministro; ge ele pe igual a número de póliza. Y de ahí sale un detalle coherente: los impresos de revisión, los del ge ele pe de depósito, solo piden número de póliza, porque esas instalaciones no tienen punto de suministro de red. Ah, y el certificado de puesta en servicio es el único que pide datos del contador, número de serie y lectura inicial, porque es el momento en que el contador arranca a cero.</a:t>
             </a:r>
           </a:p>
         </p:txBody>
@@ -1117,12 +1346,97 @@
           <a:lstStyle/>
           <a:p>
             <a:r>
-              <a:t>N1: Tres cifras que te van a preguntar seguro.</a:t>
-            </a:r>
-          </a:p>
-          <a:p>
-            <a:r>
-              <a:t>N2: La primera, cinco años: es la periodicidad tanto de la inspección como de la revisión. La segunda, tres meses: es la antelación con que el distribuidor te avisa de la obligación de inspección. Y la tercera, quince días hábiles: es el plazo para corregir una anomalía secundaria por falta de estanquidad. Guárdate también dos más que salen en el vídeo: cinco días de antelación para la visita del distribuidor, y diez años que se conservan los datos de las inspecciones. Con esa batería de plazos tienes medio vídeo resuelto.</a:t>
+              <a:t>N1: ¿Por qué justo estos tres números?</a:t>
+            </a:r>
+          </a:p>
+          <a:p>
+            <a:r>
+              <a:t>N2: Porque son plazos que caen fijo en el examen. Cinco años es cada cuánto toca el control periódico, tanto la inspección como la revisión. Quince días hábiles es el plazo que te dan para corregir una anomalía secundaria por falta de estanquidad, de las leves. Y diez años es el tiempo que el distribuidor guarda en su base de datos la fecha y el resultado de cada inspección. Hay más plazos en el vídeo, pero si empiezas por estos tres ya tienes el armazón montado.</a:t>
+            </a:r>
+          </a:p>
+        </p:txBody>
+      </p:sp>
+      <p:sp>
+        <p:nvSpPr>
+          <p:cNvPr id="4" name="Slide Number Placeholder 3"/>
+          <p:cNvSpPr>
+            <a:spLocks noGrp="1"/>
+          </p:cNvSpPr>
+          <p:nvPr>
+            <p:ph type="sldNum" idx="5" sz="quarter"/>
+          </p:nvPr>
+        </p:nvSpPr>
+        <p:spPr/>
+      </p:sp>
+    </p:spTree>
+  </p:cSld>
+  <p:clrMapOvr>
+    <a:masterClrMapping/>
+  </p:clrMapOvr>
+</p:notes>
+</file>
+
+<file path=ppt/notesSlides/notesSlide20.xml><?xml version="1.0" encoding="utf-8"?>
+<p:notes xmlns:a="http://schemas.openxmlformats.org/drawingml/2006/main" xmlns:p="http://schemas.openxmlformats.org/presentationml/2006/main" xmlns:r="http://schemas.openxmlformats.org/officeDocument/2006/relationships">
+  <p:cSld>
+    <p:spTree>
+      <p:nvGrpSpPr>
+        <p:cNvPr id="1" name=""/>
+        <p:cNvGrpSpPr/>
+        <p:nvPr/>
+      </p:nvGrpSpPr>
+      <p:grpSpPr>
+        <a:xfrm>
+          <a:off x="0" y="0"/>
+          <a:ext cx="0" cy="0"/>
+          <a:chOff x="0" y="0"/>
+          <a:chExt cx="0" cy="0"/>
+        </a:xfrm>
+      </p:grpSpPr>
+      <p:sp>
+        <p:nvSpPr>
+          <p:cNvPr id="2" name="Slide Image Placeholder 1"/>
+          <p:cNvSpPr>
+            <a:spLocks noGrp="1"/>
+          </p:cNvSpPr>
+          <p:nvPr>
+            <p:ph type="sldImg" idx="2"/>
+          </p:nvPr>
+        </p:nvSpPr>
+        <p:spPr/>
+      </p:sp>
+      <p:sp>
+        <p:nvSpPr>
+          <p:cNvPr id="3" name="Notes Placeholder 2"/>
+          <p:cNvSpPr>
+            <a:spLocks noGrp="1"/>
+          </p:cNvSpPr>
+          <p:nvPr>
+            <p:ph type="body" idx="3" sz="quarter"/>
+          </p:nvPr>
+        </p:nvSpPr>
+        <p:spPr/>
+        <p:txBody>
+          <a:bodyPr/>
+          <a:lstStyle/>
+          <a:p>
+            <a:r>
+              <a:t>N1: Último vídeo del tema. ¿Cómo lo cierro todo en la cabeza?</a:t>
+            </a:r>
+          </a:p>
+          <a:p>
+            <a:r>
+              <a:t>N2: Vamos a reconstruir el hilo entero. Una instalación no se acaba al encenderla: el mantenimiento es del titular, y tú entras cuando hay que modificar o cuando toca el control periódico. Y ese control se decide con una sola pregunta: ¿hay red? Si la hay, inspección; si no, revisión. Las dos, cada cinco años. El alcance depende de la potencia, y el aparato entra en la inspección hasta setenta kilovatios y se queda fuera por encima. Los criterios son los de cuando se montó, salvo dos peligros, tipo a o be en dormitorio o baño y falta de detección, que van con la norma de hoy. Y cuando aparece una anomalía, la principal corta y precinta, la secundaria da plazo; todas las fugas son principales, y el que inspecciona nunca repara.</a:t>
+            </a:r>
+          </a:p>
+          <a:p>
+            <a:r>
+              <a:t>N1: ¿Y cómo cae esto en el examen y en la obra?</a:t>
+            </a:r>
+          </a:p>
+          <a:p>
+            <a:r>
+              <a:t>N2: En el examen caen las cifras, cinco años, tres meses, cinco días, quince días hábiles, diez años, y los pares que hemos atado: inspección con red y revisión sin red, del uno erre ge uno al cinco, gas natural con punto de suministro y ge ele pe con póliza, y la regla del metro para saber qué es modificación. En la obra, esto es lo que hace que una instalación siga siendo segura durante años en lugar de degradarse a ciegas hasta la fuga o el monóxido. Y fíjate dónde has llegado: con este tema ya sabes diseñar la instalación receptora, sacarle los papeles y ponerla en servicio, y mantenerla viva con sus inspecciones y revisiones. Has cerrado el corazón del Gas B, la ITC-ICG cero siete de principio a fin. Hoy no eres un poco más gasista que ayer: hoy ya piensas como un gasista. Enhorabuena, y a por el siguiente tema.</a:t>
             </a:r>
           </a:p>
         </p:txBody>
@@ -1192,12 +1506,12 @@
           <a:lstStyle/>
           <a:p>
             <a:r>
-              <a:t>N1: ¿Quién responde de que la instalación siga segura año tras año?</a:t>
-            </a:r>
-          </a:p>
-          <a:p>
-            <a:r>
-              <a:t>N2: El titular, y en su defecto los usuarios. Son los responsables del mantenimiento, la conservación, la explotación y el buen uso, de forma que la instalación esté permanentemente en servicio con el nivel de seguridad adecuado, atendiendo las recomendaciones de seguridad del suministrador. El instalador y la compañía ayudan y recomiendan, pero el que responde es el propietario. Ahora bien, cualquier modificación la tiene que hacer un instalador, nunca el usuario por su cuenta, y ese instalador emite un certificado que se queda el usuario. En obra esto es la línea roja: el dueño mantiene y usa, pero tocar la instalación es cosa de profesional habilitado.</a:t>
+              <a:t>N1: Una vez montada, ¿de quién es la responsabilidad de que siga bien?</a:t>
+            </a:r>
+          </a:p>
+          <a:p>
+            <a:r>
+              <a:t>N2: Del dueño. Igual que en el articulado del reglamento, el responsable del mantenimiento, la conservación y el buen uso de la instalación es el titular; y si no hay titular claro, los usuarios. Ellos tienen que mantenerla permanentemente en servicio con el nivel de seguridad adecuado y atender las recomendaciones que les dé el suministrador. El instalador y la compañía ayudan y avisan, pero el que responde año tras año es el propietario. Ahora bien, ojo a una cosa: cualquier modificación de la instalación la tiene que hacer siempre un instalador, nunca el usuario por su cuenta, y ese instalador emite un certificado que se queda el usuario. Tocar el gas no es cosa de aficionados.</a:t>
             </a:r>
           </a:p>
         </p:txBody>
@@ -1267,12 +1581,12 @@
           <a:lstStyle/>
           <a:p>
             <a:r>
-              <a:t>N1: Si la instalación cuelga de la red de la compañía, ¿cada cuánto se inspecciona?</a:t>
-            </a:r>
-          </a:p>
-          <a:p>
-            <a:r>
-              <a:t>N2: Cada cinco años, y dentro del año natural en que vence ese periodo, contando desde la puesta en servicio o desde la última inspección. La hace una empresa instaladora de gas habilitada o el propio distribuidor, y el coste se le repercute al usuario; si la hace el distribuidor, no puede pasar de los costes regulados. La parte común del edificio también se inspecciona cada cinco años. Si te preguntan la periodicidad de la inspección periódica, cinco años, sin dudarlo. Y quien la haga tiene que ser instalador habilitado de gas en los términos de la ITC-ICG cero nueve.</a:t>
+              <a:t>N1: Oigo inspección y revisión y me lío. ¿Cómo las distingo?</a:t>
+            </a:r>
+          </a:p>
+          <a:p>
+            <a:r>
+              <a:t>N2: Con una sola pregunta, y este es el punto clave del tema: ¿la instalación está conectada a la red de distribución de una compañía? Si la respuesta es sí, gas natural de ciudad o gases del petróleo de red, entonces es una inspección, el apartado cuatro punto uno. Si la respuesta es no, por ejemplo un depósito propio en un chalé o unas bombonas, entonces es una revisión, el apartado cuatro punto dos. Las dos se hacen cada cinco años y comprueban casi lo mismo: estanquidad, conservación, combustión, ventilación, evacuación de humos. Las diferencias que caen las vemos luego, pero quédate con la pregunta madre: ¿hay red o no hay red? De ahí sale todo.</a:t>
             </a:r>
           </a:p>
         </p:txBody>
@@ -1342,12 +1656,12 @@
           <a:lstStyle/>
           <a:p>
             <a:r>
-              <a:t>N1: Aquí está el detalle que más se pregunta: ¿el aparato entra o no en la inspección?</a:t>
-            </a:r>
-          </a:p>
-          <a:p>
-            <a:r>
-              <a:t>N2: Depende de la potencia. Hasta setenta kilovatios, la inspección va desde la llave de usuario hasta los aparatos, incluidos: el aparato sí se inspecciona. Por encima de setenta kilovatios, o en centralizadas de calefacción, va desde la llave de edificio hasta la conexión de los aparatos, excluidos: el aparato ya no entra. Y a más de cinco bar, desde la llave de acometida, aparatos también excluidos. La regla es fácil: cuanto más grande es la instalación, más atrás empieza la inspección, de usuario a edificio a acometida, y el aparato se queda fuera. En las pequeñas domésticas, el aparato sí se mira. En las de más de cinco bar, además, el mantenimiento de los aparatos es responsabilidad del titular y va en los planes de mantenimiento de la planta.</a:t>
+              <a:t>N1: ¿Cada cuánto se inspecciona una instalación conectada a la red?</a:t>
+            </a:r>
+          </a:p>
+          <a:p>
+            <a:r>
+              <a:t>N2: Cada cinco años, es una inspección quinquenal. Se cuenta desde la fecha de puesta en servicio o desde la última inspección, y hay que hacerla dentro del año natural en que vence ese plazo, no vale retrasarla sin más. La hacen las empresas instaladoras de gas habilitadas o los distribuidores, y le repercuten el coste al usuario; si la hace el distribuidor, no puede cobrar más que los costes regulados. Y un dato: la parte común del edificio, el montante compartido, también se inspecciona cada cinco años. Si te preguntan la periodicidad de la inspección periódica, la respuesta es cinco años, sin dudarlo.</a:t>
             </a:r>
           </a:p>
         </p:txBody>
@@ -1417,12 +1731,12 @@
           <a:lstStyle/>
           <a:p>
             <a:r>
-              <a:t>N1: Piensa en la inspección como un recorrido de seguridad. ¿Qué mira?</a:t>
-            </a:r>
-          </a:p>
-          <a:p>
-            <a:r>
-              <a:t>N2: Comprueba la estanquidad, o sea si hay fugas; el buen estado de conservación; la combustión higiénica de los aparatos, que quemen limpio sin exceso de monóxido; los requisitos de ventilación y el volumen mínimo del local, que entre aire suficiente y el cuarto sea bastante grande; los sistemas de detección de gas cuando sustituyen a la ventilación rápida; y la correcta evacuación de los productos de la combustión. Los procedimientos válidos son los de la UNE sesenta mil seiscientos setenta, partes doce y trece, en baja presión, o la sesenta mil seiscientos veinte, parte seis, en alta. Es la misma lista que verás luego en la revisión, casi calcada.</a:t>
+              <a:t>N1: ¿La inspección incluye el aparato o solo las tuberías?</a:t>
+            </a:r>
+          </a:p>
+          <a:p>
+            <a:r>
+              <a:t>N2: Depende de la potencia, y este es el detalle que más se pregunta. En instalaciones de hasta setenta kilovatios, la inspección va desde la llave de usuario hasta los aparatos de gas, incluidos; es decir, el aparato sí entra. En instalaciones centralizadas de calefacción o de más de setenta kilovatios, va desde la llave de edificio hasta la conexión de los aparatos, pero excluidos; el aparato ya no entra. Y en instalaciones de más de cinco bar, desde la llave de acometida, aparatos también excluidos. La regla para no fallar: cuanto más grande es la instalación, más atrás empieza la inspección, de usuario a edificio a acometida, y el aparato se queda fuera. En las pequeñas domésticas, el aparato sí se mira.</a:t>
             </a:r>
           </a:p>
         </p:txBody>
@@ -1492,12 +1806,12 @@
           <a:lstStyle/>
           <a:p>
             <a:r>
-              <a:t>N1: ¿Con qué versión de la norma se juzga una instalación antigua?</a:t>
-            </a:r>
-          </a:p>
-          <a:p>
-            <a:r>
-              <a:t>N2: Por regla general, con la versión que estaba vigente cuando se montó, o cuando se modificó o amplió. Pero hay dos cosas tan peligrosas que se aplican siempre con la norma vigente hoy: tener un aparato de tipo A o tipo B en un dormitorio, un baño o una ducha, y no tener sistema de detección y corte de gas. Para adaptarse te dan de plazo hasta la siguiente inspección periódica. La razón es de seguridad pura: un aparato que respira del cuarto donde duermes o te duchas es riesgo directo de intoxicación por monóxido, así que eso no se perdona por ser antiguo.</a:t>
+              <a:t>N1: ¿Y qué comprueban exactamente durante la inspección?</a:t>
+            </a:r>
+          </a:p>
+          <a:p>
+            <a:r>
+              <a:t>N2: Piénsalo como un recorrido de seguridad, de arriba abajo. Primero la estanquidad: ¿hay alguna fuga? Luego la conservación: ¿está la instalación en buen estado, sin corrosión ni golpes? Después la combustión higiénica de los aparatos: ¿queman limpio, sin exceso de monóxido? Los requisitos de ventilación y el volumen mínimo del local: ¿entra aire suficiente y el cuarto es lo bastante grande? Los sistemas de detección de gas, cuando sustituyen a la ventilación rápida. Y por último la correcta evacuación de los productos de la combustión: ¿salen bien los humos? Los procedimientos son la UNE sesenta mil seiscientos setenta guion doce y guion trece en baja presión, o la sesenta mil seiscientos veinte guion seis en alta.</a:t>
             </a:r>
           </a:p>
         </p:txBody>
@@ -1567,12 +1881,12 @@
           <a:lstStyle/>
           <a:p>
             <a:r>
-              <a:t>N1: ¿Con cuánto tiempo te avisan, y quién puede hacer la inspección según tu categoría?</a:t>
-            </a:r>
-          </a:p>
-          <a:p>
-            <a:r>
-              <a:t>N2: El distribuidor comunica la obligación de inspección con tres meses de antelación, y la puede hacer una instaladora habilitada o él mismo. Cuando la hace el propio distribuidor y visita, avisa con un mínimo de cinco días. Y ojo a las categorías: en instalaciones individuales pueden inspeccionar instaladores de categoría A, B o C; en instalaciones comunes, solo A o B, la C no llega a comunes. Como tú sacas la B, podrás inspeccionar tanto individuales como comunes. Ata la frase: comunes son A o B; la C se queda fuera de las comunes.</a:t>
+              <a:t>N1: ¿Con qué versión de la norma se juzga una instalación antigua?</a:t>
+            </a:r>
+          </a:p>
+          <a:p>
+            <a:r>
+              <a:t>N2: En general, con los criterios de la versión de la norma que estaba vigente cuando se puso en servicio, o cuando se modificó o amplió. Es justo: no puedes exigirle a una instalación de hace años que cumpla algo que no existía cuando se montó. Pero hay dos cosas tan peligrosas que se aplican siempre con la norma vigente de hoy, sin perdón por antigüedad. Una: tener un aparato de tipo a o de tipo be instalado en un dormitorio, o en un baño o ducha. Dos: no tener sistema de detección y corte de gas. Para adaptarse te dan de plazo hasta la siguiente inspección. La razón es de vida o muerte: un aparato que respira del cuarto donde duermes o te duchas es riesgo directo de intoxicación por monóxido; por eso eso no se tolera aunque la instalación sea vieja.</a:t>
             </a:r>
           </a:p>
         </p:txBody>
@@ -1642,12 +1956,12 @@
           <a:lstStyle/>
           <a:p>
             <a:r>
-              <a:t>N1: Regla de oro que se pregunta mucho: ¿puede reparar la misma empresa que inspecciona?</a:t>
-            </a:r>
-          </a:p>
-          <a:p>
-            <a:r>
-              <a:t>N2: No. Si el resultado es favorable, la instaladora emite el certificado de inspección, firmado por el instalador habilitado y con el sello de la empresa: una copia al titular, otra a la distribuidora y otra en su poder. Si detecta anomalías, remite a la distribuidora el informe de anomalías con el plazo máximo de corrección y entrega copia al titular. Y aquí está la clave de imparcialidad: la misma empresa o instalador que hizo la inspección no puede reparar las anomalías que ha detectado. Es como que quien te pone el examen no te dé también las clases para aprobarlo: se evita el conflicto de interés.</a:t>
+              <a:t>N1: ¿Cómo arranca el proceso de la inspección y quién puede hacerla?</a:t>
+            </a:r>
+          </a:p>
+          <a:p>
+            <a:r>
+              <a:t>N2: El distribuidor tiene que avisar al usuario, con tres meses de antelación, de que le toca la inspección obligatoria; y la puede hacer una empresa instaladora habilitada o el propio distribuidor. Ahora, quién está autorizado a inspeccionar depende del tipo de instalación. Para las instalaciones individuales valen los instaladores de categoría a, be o ce. Para las comunes, solo a o be; la ce no llega a las comunes. Fíjate en lo que esto significa para ti: como sacas la be, vas a poder inspeccionar tanto individuales como comunes. La ce se queda solo en individuales. Átalo así: en comunes, a o be; la ce, fuera de comunes.</a:t>
             </a:r>
           </a:p>
         </p:txBody>
@@ -4760,7 +5074,7 @@
                 </a:solidFill>
                 <a:latin typeface="Montserrat"/>
               </a:rPr>
-              <a:t>Mantenimiento, inspecciones y revisiones</a:t>
+              <a:t>Mantenimiento e inspecciones</a:t>
             </a:r>
           </a:p>
           <a:p>
@@ -4771,7 +5085,7 @@
                 </a:solidFill>
                 <a:latin typeface="Montserrat"/>
               </a:rPr>
-              <a:t>Controles periódicos, anomalías, modificación y anexo</a:t>
+              <a:t>Inspección, revisión, modificación y modelos de impresos</a:t>
             </a:r>
           </a:p>
         </p:txBody>
@@ -4902,7 +5216,7 @@
                 </a:solidFill>
                 <a:latin typeface="Montserrat"/>
               </a:rPr>
-              <a:t>010 / 016</a:t>
+              <a:t>010 / 020</a:t>
             </a:r>
           </a:p>
         </p:txBody>
@@ -4936,7 +5250,7 @@
                 </a:solidFill>
                 <a:latin typeface="Montserrat"/>
               </a:rPr>
-              <a:t>Curso Gas B · Tema 04 · ITC-ICG 07 · Mantenimiento e inspecciones</a:t>
+              <a:t>Curso Gas B · Tema 04 · ITC-ICG 07 · Mantenimiento, inspecciones y revisiones</a:t>
             </a:r>
           </a:p>
         </p:txBody>
@@ -4970,7 +5284,7 @@
                 </a:solidFill>
                 <a:latin typeface="Montserrat"/>
               </a:rPr>
-              <a:t>APARTADO 4.1.1 · ANOMALÍAS</a:t>
+              <a:t>APARTADO 4.1.1 · PLAZOS</a:t>
             </a:r>
           </a:p>
         </p:txBody>
@@ -5004,7 +5318,7 @@
                 </a:solidFill>
                 <a:latin typeface="Montserrat"/>
               </a:rPr>
-              <a:t>Principal corta, secundaria da plazo</a:t>
+              <a:t>Las cifras del procedimiento</a:t>
             </a:r>
           </a:p>
         </p:txBody>
@@ -5052,7 +5366,7 @@
                 </a:solidFill>
                 <a:latin typeface="Montserrat"/>
               </a:rPr>
-              <a:t>Principal → corte y precinto en el acto</a:t>
+              <a:t>3 meses: aviso de la obligación</a:t>
             </a:r>
           </a:p>
           <a:p>
@@ -5077,7 +5391,7 @@
                 </a:solidFill>
                 <a:latin typeface="Montserrat"/>
               </a:rPr>
-              <a:t>Todas las fugas son principales</a:t>
+              <a:t>5 días: antelación de la visita</a:t>
             </a:r>
           </a:p>
           <a:p>
@@ -5102,7 +5416,7 @@
                 </a:solidFill>
                 <a:latin typeface="Montserrat"/>
               </a:rPr>
-              <a:t>Secundaria de estanquidad → 15 días hábiles</a:t>
+              <a:t>15 días hábiles: anomalía secundaria</a:t>
             </a:r>
           </a:p>
           <a:p>
@@ -5127,14 +5441,14 @@
                 </a:solidFill>
                 <a:latin typeface="Montserrat"/>
               </a:rPr>
-              <a:t>Datos guardados 10 años</a:t>
-            </a:r>
-          </a:p>
-        </p:txBody>
-      </p:sp>
-      <p:sp>
-        <p:nvSpPr>
-          <p:cNvPr id="8" name="imgph" descr="IMGQ:sealed gas valve warning tag"/>
+              <a:t>10 años: se guardan los datos</a:t>
+            </a:r>
+          </a:p>
+        </p:txBody>
+      </p:sp>
+      <p:sp>
+        <p:nvSpPr>
+          <p:cNvPr id="8" name="imgph" descr="IMGQ:calendar and clock on desk"/>
           <p:cNvSpPr/>
           <p:nvPr/>
         </p:nvSpPr>
@@ -5220,7 +5534,7 @@
                 </a:solidFill>
                 <a:latin typeface="Montserrat"/>
               </a:rPr>
-              <a:t>sealed gas valve warning tag</a:t>
+              <a:t>calendar and clock on desk</a:t>
             </a:r>
           </a:p>
         </p:txBody>
@@ -5317,7 +5631,7 @@
                 </a:solidFill>
                 <a:latin typeface="Montserrat"/>
               </a:rPr>
-              <a:t>011 / 016</a:t>
+              <a:t>011 / 020</a:t>
             </a:r>
           </a:p>
         </p:txBody>
@@ -5351,7 +5665,7 @@
                 </a:solidFill>
                 <a:latin typeface="Montserrat"/>
               </a:rPr>
-              <a:t>Curso Gas B · Tema 04 · ITC-ICG 07 · Mantenimiento e inspecciones</a:t>
+              <a:t>Curso Gas B · Tema 04 · ITC-ICG 07 · Mantenimiento, inspecciones y revisiones</a:t>
             </a:r>
           </a:p>
         </p:txBody>
@@ -5385,7 +5699,7 @@
                 </a:solidFill>
                 <a:latin typeface="Montserrat"/>
               </a:rPr>
-              <a:t>APARTADO 4.2 · REVISIÓN</a:t>
+              <a:t>APARTADO 4.1.1 · IMPARCIALIDAD</a:t>
             </a:r>
           </a:p>
         </p:txBody>
@@ -5419,7 +5733,7 @@
                 </a:solidFill>
                 <a:latin typeface="Montserrat"/>
               </a:rPr>
-              <a:t>Revisión: sin red de distribución</a:t>
+              <a:t>El que inspecciona no repara</a:t>
             </a:r>
           </a:p>
         </p:txBody>
@@ -5467,7 +5781,7 @@
                 </a:solidFill>
                 <a:latin typeface="Montserrat"/>
               </a:rPr>
-              <a:t>La encarga el titular a una instaladora</a:t>
+              <a:t>Detectas anomalías → informe</a:t>
             </a:r>
           </a:p>
           <a:p>
@@ -5492,7 +5806,7 @@
                 </a:solidFill>
                 <a:latin typeface="Montserrat"/>
               </a:rPr>
-              <a:t>Cada 5 años, coincide con el depósito</a:t>
+              <a:t>No las arregla quien inspecciona</a:t>
             </a:r>
           </a:p>
           <a:p>
@@ -5517,39 +5831,14 @@
                 </a:solidFill>
                 <a:latin typeface="Montserrat"/>
               </a:rPr>
-              <a:t>Añade la protección catódica</a:t>
-            </a:r>
-          </a:p>
-          <a:p>
-            <a:pPr>
-              <a:spcAft>
-                <a:spcPts val="1000"/>
-              </a:spcAft>
-            </a:pPr>
-            <a:r>
-              <a:rPr sz="1600" b="1" i="0">
-                <a:solidFill>
-                  <a:srgbClr val="2E3A80"/>
-                </a:solidFill>
-                <a:latin typeface="Montserrat"/>
-              </a:rPr>
-              <a:t>•  </a:t>
-            </a:r>
-            <a:r>
-              <a:rPr sz="1600" b="0" i="0">
-                <a:solidFill>
-                  <a:srgbClr val="1B2330"/>
-                </a:solidFill>
-                <a:latin typeface="Montserrat"/>
-              </a:rPr>
-              <a:t>GLP: toda fuga es principal</a:t>
-            </a:r>
-          </a:p>
-        </p:txBody>
-      </p:sp>
-      <p:sp>
-        <p:nvSpPr>
-          <p:cNvPr id="8" name="imgph" descr="IMGQ:propane tank outdoor house"/>
+              <a:t>Evita el conflicto de interés</a:t>
+            </a:r>
+          </a:p>
+        </p:txBody>
+      </p:sp>
+      <p:sp>
+        <p:nvSpPr>
+          <p:cNvPr id="8" name="imgph" descr="IMGQ:two gas technicians discussing paperwork"/>
           <p:cNvSpPr/>
           <p:nvPr/>
         </p:nvSpPr>
@@ -5635,7 +5924,7 @@
                 </a:solidFill>
                 <a:latin typeface="Montserrat"/>
               </a:rPr>
-              <a:t>propane tank outdoor house</a:t>
+              <a:t>two gas technicians discussing paperwork</a:t>
             </a:r>
           </a:p>
         </p:txBody>
@@ -5732,7 +6021,7 @@
                 </a:solidFill>
                 <a:latin typeface="Montserrat"/>
               </a:rPr>
-              <a:t>012 / 016</a:t>
+              <a:t>012 / 020</a:t>
             </a:r>
           </a:p>
         </p:txBody>
@@ -5766,7 +6055,7 @@
                 </a:solidFill>
                 <a:latin typeface="Montserrat"/>
               </a:rPr>
-              <a:t>Curso Gas B · Tema 04 · ITC-ICG 07 · Mantenimiento e inspecciones</a:t>
+              <a:t>Curso Gas B · Tema 04 · ITC-ICG 07 · Mantenimiento, inspecciones y revisiones</a:t>
             </a:r>
           </a:p>
         </p:txBody>
@@ -5800,7 +6089,7 @@
                 </a:solidFill>
                 <a:latin typeface="Montserrat"/>
               </a:rPr>
-              <a:t>APARTADO 4 · LA CLAVE DEL TEMA</a:t>
+              <a:t>APARTADO 4.1.1 · ANOMALÍAS</a:t>
             </a:r>
           </a:p>
         </p:txBody>
@@ -5834,7 +6123,7 @@
                 </a:solidFill>
                 <a:latin typeface="Montserrat"/>
               </a:rPr>
-              <a:t>Inspección o revisión: una pregunta</a:t>
+              <a:t>Principal corta, secundaria da plazo</a:t>
             </a:r>
           </a:p>
         </p:txBody>
@@ -5882,7 +6171,7 @@
                 </a:solidFill>
                 <a:latin typeface="Montserrat"/>
               </a:rPr>
-              <a:t>¿Conectada a la red de distribución?</a:t>
+              <a:t>Principal → corte y precinto</a:t>
             </a:r>
           </a:p>
           <a:p>
@@ -5907,7 +6196,7 @@
                 </a:solidFill>
                 <a:latin typeface="Montserrat"/>
               </a:rPr>
-              <a:t>Sí → inspección (4.1)</a:t>
+              <a:t>Todas las fugas son principales</a:t>
             </a:r>
           </a:p>
           <a:p>
@@ -5932,7 +6221,7 @@
                 </a:solidFill>
                 <a:latin typeface="Montserrat"/>
               </a:rPr>
-              <a:t>No → revisión (4.2)</a:t>
+              <a:t>Secundaria → plazo de corrección</a:t>
             </a:r>
           </a:p>
           <a:p>
@@ -5957,14 +6246,14 @@
                 </a:solidFill>
                 <a:latin typeface="Montserrat"/>
               </a:rPr>
-              <a:t>Ambas cada 5 años</a:t>
-            </a:r>
-          </a:p>
-        </p:txBody>
-      </p:sp>
-      <p:sp>
-        <p:nvSpPr>
-          <p:cNvPr id="8" name="imgph" descr="IMGQ:gas pipeline meter street"/>
+              <a:t>Volver a dar gas: certificado de subsanación</a:t>
+            </a:r>
+          </a:p>
+        </p:txBody>
+      </p:sp>
+      <p:sp>
+        <p:nvSpPr>
+          <p:cNvPr id="8" name="imgph" descr="IMGQ:sealed and tagged gas valve shut off"/>
           <p:cNvSpPr/>
           <p:nvPr/>
         </p:nvSpPr>
@@ -6050,7 +6339,7 @@
                 </a:solidFill>
                 <a:latin typeface="Montserrat"/>
               </a:rPr>
-              <a:t>gas pipeline meter street</a:t>
+              <a:t>sealed and tagged gas valve shut off</a:t>
             </a:r>
           </a:p>
         </p:txBody>
@@ -6147,7 +6436,7 @@
                 </a:solidFill>
                 <a:latin typeface="Montserrat"/>
               </a:rPr>
-              <a:t>013 / 016</a:t>
+              <a:t>013 / 020</a:t>
             </a:r>
           </a:p>
         </p:txBody>
@@ -6181,7 +6470,7 @@
                 </a:solidFill>
                 <a:latin typeface="Montserrat"/>
               </a:rPr>
-              <a:t>Curso Gas B · Tema 04 · ITC-ICG 07 · Mantenimiento e inspecciones</a:t>
+              <a:t>Curso Gas B · Tema 04 · ITC-ICG 07 · Mantenimiento, inspecciones y revisiones</a:t>
             </a:r>
           </a:p>
         </p:txBody>
@@ -6215,7 +6504,7 @@
                 </a:solidFill>
                 <a:latin typeface="Montserrat"/>
               </a:rPr>
-              <a:t>APARTADO 5 · MODIFICACIÓN</a:t>
+              <a:t>APARTADO 4.2 · REVISIÓN</a:t>
             </a:r>
           </a:p>
         </p:txBody>
@@ -6249,7 +6538,7 @@
                 </a:solidFill>
                 <a:latin typeface="Montserrat"/>
               </a:rPr>
-              <a:t>La regla del metro</a:t>
+              <a:t>Revisión: fuera de la red</a:t>
             </a:r>
           </a:p>
         </p:txBody>
@@ -6297,7 +6586,7 @@
                 </a:solidFill>
                 <a:latin typeface="Montserrat"/>
               </a:rPr>
-              <a:t>Cambio de material o trazado &gt; 1 m</a:t>
+              <a:t>Instalaciones sin red (depósito o bombonas)</a:t>
             </a:r>
           </a:p>
           <a:p>
@@ -6322,7 +6611,7 @@
                 </a:solidFill>
                 <a:latin typeface="Montserrat"/>
               </a:rPr>
-              <a:t>Ampliación de consumo o cambio de aparato</a:t>
+              <a:t>El titular la encarga a una instaladora</a:t>
             </a:r>
           </a:p>
           <a:p>
@@ -6347,39 +6636,14 @@
                 </a:solidFill>
                 <a:latin typeface="Montserrat"/>
               </a:rPr>
-              <a:t>La instaladora comunica al suministrador</a:t>
-            </a:r>
-          </a:p>
-          <a:p>
-            <a:pPr>
-              <a:spcAft>
-                <a:spcPts val="1000"/>
-              </a:spcAft>
-            </a:pPr>
-            <a:r>
-              <a:rPr sz="1600" b="1" i="0">
-                <a:solidFill>
-                  <a:srgbClr val="2E3A80"/>
-                </a:solidFill>
-                <a:latin typeface="Montserrat"/>
-              </a:rPr>
-              <a:t>•  </a:t>
-            </a:r>
-            <a:r>
-              <a:rPr sz="1600" b="0" i="0">
-                <a:solidFill>
-                  <a:srgbClr val="1B2330"/>
-                </a:solidFill>
-                <a:latin typeface="Montserrat"/>
-              </a:rPr>
-              <a:t>Enganche lo pide el suministrador; paga el usuario</a:t>
-            </a:r>
-          </a:p>
-        </p:txBody>
-      </p:sp>
-      <p:sp>
-        <p:nvSpPr>
-          <p:cNvPr id="8" name="imgph" descr="IMGQ:plumber replacing gas pipe section"/>
+              <a:t>Cada 5 años; coincide con el depósito</a:t>
+            </a:r>
+          </a:p>
+        </p:txBody>
+      </p:sp>
+      <p:sp>
+        <p:nvSpPr>
+          <p:cNvPr id="8" name="imgph" descr="IMGQ:LPG storage tank in garden of house"/>
           <p:cNvSpPr/>
           <p:nvPr/>
         </p:nvSpPr>
@@ -6465,7 +6729,7 @@
                 </a:solidFill>
                 <a:latin typeface="Montserrat"/>
               </a:rPr>
-              <a:t>plumber replacing gas pipe section</a:t>
+              <a:t>LPG storage tank in garden of house</a:t>
             </a:r>
           </a:p>
         </p:txBody>
@@ -6562,7 +6826,7 @@
                 </a:solidFill>
                 <a:latin typeface="Montserrat"/>
               </a:rPr>
-              <a:t>014 / 016</a:t>
+              <a:t>014 / 020</a:t>
             </a:r>
           </a:p>
         </p:txBody>
@@ -6596,7 +6860,7 @@
                 </a:solidFill>
                 <a:latin typeface="Montserrat"/>
               </a:rPr>
-              <a:t>Curso Gas B · Tema 04 · ITC-ICG 07 · Mantenimiento e inspecciones</a:t>
+              <a:t>Curso Gas B · Tema 04 · ITC-ICG 07 · Mantenimiento, inspecciones y revisiones</a:t>
             </a:r>
           </a:p>
         </p:txBody>
@@ -6630,7 +6894,7 @@
                 </a:solidFill>
                 <a:latin typeface="Montserrat"/>
               </a:rPr>
-              <a:t>ANEXO · IMPRESOS</a:t>
+              <a:t>APARTADO 4.2 · REVISIÓN</a:t>
             </a:r>
           </a:p>
         </p:txBody>
@@ -6664,7 +6928,7 @@
                 </a:solidFill>
                 <a:latin typeface="Montserrat"/>
               </a:rPr>
-              <a:t>Los cinco modelos IRG</a:t>
+              <a:t>La protección catódica</a:t>
             </a:r>
           </a:p>
         </p:txBody>
@@ -6712,7 +6976,7 @@
                 </a:solidFill>
                 <a:latin typeface="Montserrat"/>
               </a:rPr>
-              <a:t>IRG-1: acometida interior</a:t>
+              <a:t>Solo aparece en la revisión</a:t>
             </a:r>
           </a:p>
           <a:p>
@@ -6737,7 +7001,7 @@
                 </a:solidFill>
                 <a:latin typeface="Montserrat"/>
               </a:rPr>
-              <a:t>IRG-2: común / IRG-3: individual</a:t>
+              <a:t>Evita que el acero enterrado se corroa</a:t>
             </a:r>
           </a:p>
           <a:p>
@@ -6762,39 +7026,14 @@
                 </a:solidFill>
                 <a:latin typeface="Montserrat"/>
               </a:rPr>
-              <a:t>IRG-4 y 5: revisión sin red</a:t>
-            </a:r>
-          </a:p>
-          <a:p>
-            <a:pPr>
-              <a:spcAft>
-                <a:spcPts val="1000"/>
-              </a:spcAft>
-            </a:pPr>
-            <a:r>
-              <a:rPr sz="1600" b="1" i="0">
-                <a:solidFill>
-                  <a:srgbClr val="2E3A80"/>
-                </a:solidFill>
-                <a:latin typeface="Montserrat"/>
-              </a:rPr>
-              <a:t>•  </a:t>
-            </a:r>
-            <a:r>
-              <a:rPr sz="1600" b="0" i="0">
-                <a:solidFill>
-                  <a:srgbClr val="1B2330"/>
-                </a:solidFill>
-                <a:latin typeface="Montserrat"/>
-              </a:rPr>
-              <a:t>Inspección: solo información mínima</a:t>
-            </a:r>
-          </a:p>
-        </p:txBody>
-      </p:sp>
-      <p:sp>
-        <p:nvSpPr>
-          <p:cNvPr id="8" name="imgph" descr="IMGQ:stack of official forms desk"/>
+              <a:t>Señal: piensa depósito y acero enterrado</a:t>
+            </a:r>
+          </a:p>
+        </p:txBody>
+      </p:sp>
+      <p:sp>
+        <p:nvSpPr>
+          <p:cNvPr id="8" name="imgph" descr="IMGQ:buried steel gas pipe with cathodic protection anode"/>
           <p:cNvSpPr/>
           <p:nvPr/>
         </p:nvSpPr>
@@ -6880,7 +7119,7 @@
                 </a:solidFill>
                 <a:latin typeface="Montserrat"/>
               </a:rPr>
-              <a:t>stack of official forms desk</a:t>
+              <a:t>buried steel gas pipe with cathodic protection anode</a:t>
             </a:r>
           </a:p>
         </p:txBody>
@@ -6977,7 +7216,7 @@
                 </a:solidFill>
                 <a:latin typeface="Montserrat"/>
               </a:rPr>
-              <a:t>015 / 016</a:t>
+              <a:t>015 / 020</a:t>
             </a:r>
           </a:p>
         </p:txBody>
@@ -7011,7 +7250,7 @@
                 </a:solidFill>
                 <a:latin typeface="Montserrat"/>
               </a:rPr>
-              <a:t>Curso Gas B · Tema 04 · ITC-ICG 07 · Mantenimiento e inspecciones</a:t>
+              <a:t>Curso Gas B · Tema 04 · ITC-ICG 07 · Mantenimiento, inspecciones y revisiones</a:t>
             </a:r>
           </a:p>
         </p:txBody>
@@ -7045,7 +7284,7 @@
                 </a:solidFill>
                 <a:latin typeface="Montserrat"/>
               </a:rPr>
-              <a:t>ANEXO · INFORMACIÓN MÍNIMA</a:t>
+              <a:t>APARTADO 4.2 · CERTIFICADOS</a:t>
             </a:r>
           </a:p>
         </p:txBody>
@@ -7079,7 +7318,7 @@
                 </a:solidFill>
                 <a:latin typeface="Montserrat"/>
               </a:rPr>
-              <a:t>Gas natural o GLP en el papel</a:t>
+              <a:t>IRG-4 e IRG-5: revisión</a:t>
             </a:r>
           </a:p>
         </p:txBody>
@@ -7127,7 +7366,7 @@
                 </a:solidFill>
                 <a:latin typeface="Montserrat"/>
               </a:rPr>
-              <a:t>Gas natural → punto de suministro</a:t>
+              <a:t>IRG-4: revisión individual, sin red</a:t>
             </a:r>
           </a:p>
           <a:p>
@@ -7152,7 +7391,7 @@
                 </a:solidFill>
                 <a:latin typeface="Montserrat"/>
               </a:rPr>
-              <a:t>GLP → número de póliza</a:t>
+              <a:t>IRG-5: revisión común, sin red</a:t>
             </a:r>
           </a:p>
           <a:p>
@@ -7177,39 +7416,14 @@
                 </a:solidFill>
                 <a:latin typeface="Montserrat"/>
               </a:rPr>
-              <a:t>Puesta en servicio: datos del contador</a:t>
-            </a:r>
-          </a:p>
-          <a:p>
-            <a:pPr>
-              <a:spcAft>
-                <a:spcPts val="1000"/>
-              </a:spcAft>
-            </a:pPr>
-            <a:r>
-              <a:rPr sz="1600" b="1" i="0">
-                <a:solidFill>
-                  <a:srgbClr val="2E3A80"/>
-                </a:solidFill>
-                <a:latin typeface="Montserrat"/>
-              </a:rPr>
-              <a:t>•  </a:t>
-            </a:r>
-            <a:r>
-              <a:rPr sz="1600" b="0" i="0">
-                <a:solidFill>
-                  <a:srgbClr val="1B2330"/>
-                </a:solidFill>
-                <a:latin typeface="Montserrat"/>
-              </a:rPr>
-              <a:t>Todos: situación final y firmas</a:t>
-            </a:r>
-          </a:p>
-        </p:txBody>
-      </p:sp>
-      <p:sp>
-        <p:nvSpPr>
-          <p:cNvPr id="8" name="imgph" descr="IMGQ:gas contract paperwork signature"/>
+              <a:t>Validez: cinco años</a:t>
+            </a:r>
+          </a:p>
+        </p:txBody>
+      </p:sp>
+      <p:sp>
+        <p:nvSpPr>
+          <p:cNvPr id="8" name="imgph" descr="IMGQ:gas technician filling revision certificate form"/>
           <p:cNvSpPr/>
           <p:nvPr/>
         </p:nvSpPr>
@@ -7295,7 +7509,7 @@
                 </a:solidFill>
                 <a:latin typeface="Montserrat"/>
               </a:rPr>
-              <a:t>gas contract paperwork signature</a:t>
+              <a:t>gas technician filling revision certificate form</a:t>
             </a:r>
           </a:p>
         </p:txBody>
@@ -7392,7 +7606,7 @@
                 </a:solidFill>
                 <a:latin typeface="Montserrat"/>
               </a:rPr>
-              <a:t>016 / 016</a:t>
+              <a:t>016 / 020</a:t>
             </a:r>
           </a:p>
         </p:txBody>
@@ -7426,7 +7640,7 @@
                 </a:solidFill>
                 <a:latin typeface="Montserrat"/>
               </a:rPr>
-              <a:t>Curso Gas B · Tema 04 · ITC-ICG 07 · Mantenimiento e inspecciones</a:t>
+              <a:t>Curso Gas B · Tema 04 · ITC-ICG 07 · Mantenimiento, inspecciones y revisiones</a:t>
             </a:r>
           </a:p>
         </p:txBody>
@@ -7439,8 +7653,8 @@
         </p:nvSpPr>
         <p:spPr>
           <a:xfrm>
-            <a:off x="822960" y="640080"/>
-            <a:ext cx="10058400" cy="914400"/>
+            <a:off x="822960" y="457200"/>
+            <a:ext cx="8229600" cy="365760"/>
           </a:xfrm>
           <a:prstGeom prst="rect">
             <a:avLst/>
@@ -7454,13 +7668,13 @@
           <a:lstStyle/>
           <a:p>
             <a:r>
-              <a:rPr sz="3000" b="1" i="0">
-                <a:solidFill>
-                  <a:srgbClr val="1E2761"/>
-                </a:solidFill>
-                <a:latin typeface="Montserrat"/>
-              </a:rPr>
-              <a:t>Qué me llevo</a:t>
+              <a:rPr sz="1200" b="1" i="0">
+                <a:solidFill>
+                  <a:srgbClr val="64748B"/>
+                </a:solidFill>
+                <a:latin typeface="Montserrat"/>
+              </a:rPr>
+              <a:t>APARTADO 5 · MODIFICACIÓN</a:t>
             </a:r>
           </a:p>
         </p:txBody>
@@ -7473,8 +7687,8 @@
         </p:nvSpPr>
         <p:spPr>
           <a:xfrm>
-            <a:off x="822960" y="2011680"/>
-            <a:ext cx="10058400" cy="3657600"/>
+            <a:off x="822960" y="868680"/>
+            <a:ext cx="10515600" cy="914400"/>
           </a:xfrm>
           <a:prstGeom prst="rect">
             <a:avLst/>
@@ -7487,78 +7701,1400 @@
           </a:bodyPr>
           <a:lstStyle/>
           <a:p>
+            <a:r>
+              <a:rPr sz="2700" b="1" i="0">
+                <a:solidFill>
+                  <a:srgbClr val="1E2761"/>
+                </a:solidFill>
+                <a:latin typeface="Montserrat"/>
+              </a:rPr>
+              <a:t>La regla del metro</a:t>
+            </a:r>
+          </a:p>
+        </p:txBody>
+      </p:sp>
+      <p:sp>
+        <p:nvSpPr>
+          <p:cNvPr id="7" name="TextBox 6"/>
+          <p:cNvSpPr txBox="1"/>
+          <p:nvPr/>
+        </p:nvSpPr>
+        <p:spPr>
+          <a:xfrm>
+            <a:off x="822960" y="1920240"/>
+            <a:ext cx="4983480" cy="4206240"/>
+          </a:xfrm>
+          <a:prstGeom prst="rect">
+            <a:avLst/>
+          </a:prstGeom>
+          <a:noFill/>
+        </p:spPr>
+        <p:txBody>
+          <a:bodyPr wrap="square">
+            <a:spAutoFit/>
+          </a:bodyPr>
+          <a:lstStyle/>
+          <a:p>
             <a:pPr>
               <a:spcAft>
-                <a:spcPts val="1400"/>
+                <a:spcPts val="1000"/>
               </a:spcAft>
             </a:pPr>
             <a:r>
-              <a:rPr sz="2000" b="1" i="0">
+              <a:rPr sz="1600" b="1" i="0">
                 <a:solidFill>
                   <a:srgbClr val="2E3A80"/>
                 </a:solidFill>
                 <a:latin typeface="Montserrat"/>
               </a:rPr>
-              <a:t>✓  </a:t>
-            </a:r>
-            <a:r>
-              <a:rPr sz="2000" b="0" i="0">
+              <a:t>•  </a:t>
+            </a:r>
+            <a:r>
+              <a:rPr sz="1600" b="0" i="0">
                 <a:solidFill>
                   <a:srgbClr val="1B2330"/>
                 </a:solidFill>
                 <a:latin typeface="Montserrat"/>
               </a:rPr>
-              <a:t>¿Red? Sí, inspección; no, revisión. Las dos cada 5 años</a:t>
+              <a:t>Cambio de material o trazado &gt; 1 m</a:t>
             </a:r>
           </a:p>
           <a:p>
             <a:pPr>
               <a:spcAft>
-                <a:spcPts val="1400"/>
+                <a:spcPts val="1000"/>
               </a:spcAft>
             </a:pPr>
             <a:r>
-              <a:rPr sz="2000" b="1" i="0">
+              <a:rPr sz="1600" b="1" i="0">
                 <a:solidFill>
                   <a:srgbClr val="2E3A80"/>
                 </a:solidFill>
                 <a:latin typeface="Montserrat"/>
               </a:rPr>
-              <a:t>✓  </a:t>
-            </a:r>
-            <a:r>
-              <a:rPr sz="2000" b="0" i="0">
+              <a:t>•  </a:t>
+            </a:r>
+            <a:r>
+              <a:rPr sz="1600" b="0" i="0">
                 <a:solidFill>
                   <a:srgbClr val="1B2330"/>
                 </a:solidFill>
                 <a:latin typeface="Montserrat"/>
               </a:rPr>
-              <a:t>Principal corta y precinta; secundaria da plazo</a:t>
+              <a:t>Ampliación de consumo</a:t>
             </a:r>
           </a:p>
           <a:p>
             <a:pPr>
               <a:spcAft>
-                <a:spcPts val="1400"/>
+                <a:spcPts val="1000"/>
               </a:spcAft>
             </a:pPr>
             <a:r>
-              <a:rPr sz="2000" b="1" i="0">
+              <a:rPr sz="1600" b="1" i="0">
                 <a:solidFill>
                   <a:srgbClr val="2E3A80"/>
                 </a:solidFill>
                 <a:latin typeface="Montserrat"/>
               </a:rPr>
-              <a:t>✓  </a:t>
-            </a:r>
-            <a:r>
-              <a:rPr sz="2000" b="0" i="0">
+              <a:t>•  </a:t>
+            </a:r>
+            <a:r>
+              <a:rPr sz="1600" b="0" i="0">
                 <a:solidFill>
                   <a:srgbClr val="1B2330"/>
                 </a:solidFill>
                 <a:latin typeface="Montserrat"/>
               </a:rPr>
-              <a:t>Modificación: más de 1 metro de material o trazado</a:t>
+              <a:t>Cambio de aparato por otro distinto</a:t>
+            </a:r>
+          </a:p>
+        </p:txBody>
+      </p:sp>
+      <p:sp>
+        <p:nvSpPr>
+          <p:cNvPr id="8" name="imgph" descr="IMGQ:installer replacing section of copper gas pipe"/>
+          <p:cNvSpPr/>
+          <p:nvPr/>
+        </p:nvSpPr>
+        <p:spPr>
+          <a:xfrm>
+            <a:off x="5806440" y="1051560"/>
+            <a:ext cx="5298947" cy="4629150"/>
+          </a:xfrm>
+          <a:prstGeom prst="roundRect">
+            <a:avLst/>
+          </a:prstGeom>
+          <a:solidFill>
+            <a:srgbClr val="F3F6FB"/>
+          </a:solidFill>
+          <a:ln w="12700">
+            <a:solidFill>
+              <a:srgbClr val="C7D2E6"/>
+            </a:solidFill>
+          </a:ln>
+          <a:effectLst/>
+        </p:spPr>
+        <p:style>
+          <a:lnRef idx="1">
+            <a:schemeClr val="accent1"/>
+          </a:lnRef>
+          <a:fillRef idx="3">
+            <a:schemeClr val="accent1"/>
+          </a:fillRef>
+          <a:effectRef idx="2">
+            <a:schemeClr val="accent1"/>
+          </a:effectRef>
+          <a:fontRef idx="minor">
+            <a:schemeClr val="lt1"/>
+          </a:fontRef>
+        </p:style>
+        <p:txBody>
+          <a:bodyPr rtlCol="0" anchor="ctr"/>
+          <a:lstStyle/>
+          <a:p>
+            <a:pPr algn="ctr"/>
+          </a:p>
+        </p:txBody>
+      </p:sp>
+      <p:sp>
+        <p:nvSpPr>
+          <p:cNvPr id="9" name="TextBox 8"/>
+          <p:cNvSpPr txBox="1"/>
+          <p:nvPr/>
+        </p:nvSpPr>
+        <p:spPr>
+          <a:xfrm>
+            <a:off x="6080760" y="2726055"/>
+            <a:ext cx="4750307" cy="1280160"/>
+          </a:xfrm>
+          <a:prstGeom prst="rect">
+            <a:avLst/>
+          </a:prstGeom>
+          <a:noFill/>
+        </p:spPr>
+        <p:txBody>
+          <a:bodyPr wrap="square">
+            <a:spAutoFit/>
+          </a:bodyPr>
+          <a:lstStyle/>
+          <a:p>
+            <a:pPr algn="ctr"/>
+            <a:r>
+              <a:rPr sz="1400" b="1" i="0">
+                <a:solidFill>
+                  <a:srgbClr val="64748B"/>
+                </a:solidFill>
+                <a:latin typeface="Montserrat"/>
+              </a:rPr>
+              <a:t>IMAGEN REALISTA</a:t>
+            </a:r>
+          </a:p>
+          <a:p>
+            <a:pPr algn="ctr"/>
+            <a:r>
+              <a:rPr sz="1100" b="0" i="1">
+                <a:solidFill>
+                  <a:srgbClr val="64748B"/>
+                </a:solidFill>
+                <a:latin typeface="Montserrat"/>
+              </a:rPr>
+              <a:t>installer replacing section of copper gas pipe</a:t>
+            </a:r>
+          </a:p>
+        </p:txBody>
+      </p:sp>
+    </p:spTree>
+  </p:cSld>
+  <p:clrMapOvr>
+    <a:masterClrMapping/>
+  </p:clrMapOvr>
+</p:sld>
+</file>
+
+<file path=ppt/slides/slide17.xml><?xml version="1.0" encoding="utf-8"?>
+<p:sld xmlns:a="http://schemas.openxmlformats.org/drawingml/2006/main" xmlns:p="http://schemas.openxmlformats.org/presentationml/2006/main" xmlns:r="http://schemas.openxmlformats.org/officeDocument/2006/relationships">
+  <p:cSld>
+    <p:spTree>
+      <p:nvGrpSpPr>
+        <p:cNvPr id="1" name=""/>
+        <p:cNvGrpSpPr/>
+        <p:nvPr/>
+      </p:nvGrpSpPr>
+      <p:grpSpPr/>
+      <p:sp>
+        <p:nvSpPr>
+          <p:cNvPr id="2" name="Rectangle 1"/>
+          <p:cNvSpPr/>
+          <p:nvPr/>
+        </p:nvSpPr>
+        <p:spPr>
+          <a:xfrm>
+            <a:off x="0" y="0"/>
+            <a:ext cx="12191695" cy="6858000"/>
+          </a:xfrm>
+          <a:prstGeom prst="rect">
+            <a:avLst/>
+          </a:prstGeom>
+          <a:solidFill>
+            <a:srgbClr val="FFFFFF"/>
+          </a:solidFill>
+          <a:ln>
+            <a:noFill/>
+          </a:ln>
+          <a:effectLst/>
+        </p:spPr>
+        <p:style>
+          <a:lnRef idx="1">
+            <a:schemeClr val="accent1"/>
+          </a:lnRef>
+          <a:fillRef idx="3">
+            <a:schemeClr val="accent1"/>
+          </a:fillRef>
+          <a:effectRef idx="2">
+            <a:schemeClr val="accent1"/>
+          </a:effectRef>
+          <a:fontRef idx="minor">
+            <a:schemeClr val="lt1"/>
+          </a:fontRef>
+        </p:style>
+        <p:txBody>
+          <a:bodyPr rtlCol="0" anchor="ctr"/>
+          <a:lstStyle/>
+          <a:p>
+            <a:pPr algn="ctr"/>
+          </a:p>
+        </p:txBody>
+      </p:sp>
+      <p:sp>
+        <p:nvSpPr>
+          <p:cNvPr id="3" name="TextBox 2"/>
+          <p:cNvSpPr txBox="1"/>
+          <p:nvPr/>
+        </p:nvSpPr>
+        <p:spPr>
+          <a:xfrm>
+            <a:off x="10607040" y="320040"/>
+            <a:ext cx="1371600" cy="365760"/>
+          </a:xfrm>
+          <a:prstGeom prst="rect">
+            <a:avLst/>
+          </a:prstGeom>
+          <a:noFill/>
+        </p:spPr>
+        <p:txBody>
+          <a:bodyPr wrap="square">
+            <a:spAutoFit/>
+          </a:bodyPr>
+          <a:lstStyle/>
+          <a:p>
+            <a:pPr algn="r"/>
+            <a:r>
+              <a:rPr sz="1000" b="1" i="0">
+                <a:solidFill>
+                  <a:srgbClr val="64748B"/>
+                </a:solidFill>
+                <a:latin typeface="Montserrat"/>
+              </a:rPr>
+              <a:t>017 / 020</a:t>
+            </a:r>
+          </a:p>
+        </p:txBody>
+      </p:sp>
+      <p:sp>
+        <p:nvSpPr>
+          <p:cNvPr id="4" name="TextBox 3"/>
+          <p:cNvSpPr txBox="1"/>
+          <p:nvPr/>
+        </p:nvSpPr>
+        <p:spPr>
+          <a:xfrm>
+            <a:off x="457200" y="6419088"/>
+            <a:ext cx="8229600" cy="365760"/>
+          </a:xfrm>
+          <a:prstGeom prst="rect">
+            <a:avLst/>
+          </a:prstGeom>
+          <a:noFill/>
+        </p:spPr>
+        <p:txBody>
+          <a:bodyPr wrap="square">
+            <a:spAutoFit/>
+          </a:bodyPr>
+          <a:lstStyle/>
+          <a:p>
+            <a:r>
+              <a:rPr sz="900" b="0" i="0">
+                <a:solidFill>
+                  <a:srgbClr val="64748B"/>
+                </a:solidFill>
+                <a:latin typeface="Montserrat"/>
+              </a:rPr>
+              <a:t>Curso Gas B · Tema 04 · ITC-ICG 07 · Mantenimiento, inspecciones y revisiones</a:t>
+            </a:r>
+          </a:p>
+        </p:txBody>
+      </p:sp>
+      <p:sp>
+        <p:nvSpPr>
+          <p:cNvPr id="5" name="TextBox 4"/>
+          <p:cNvSpPr txBox="1"/>
+          <p:nvPr/>
+        </p:nvSpPr>
+        <p:spPr>
+          <a:xfrm>
+            <a:off x="822960" y="457200"/>
+            <a:ext cx="8229600" cy="365760"/>
+          </a:xfrm>
+          <a:prstGeom prst="rect">
+            <a:avLst/>
+          </a:prstGeom>
+          <a:noFill/>
+        </p:spPr>
+        <p:txBody>
+          <a:bodyPr wrap="square">
+            <a:spAutoFit/>
+          </a:bodyPr>
+          <a:lstStyle/>
+          <a:p>
+            <a:r>
+              <a:rPr sz="1200" b="1" i="0">
+                <a:solidFill>
+                  <a:srgbClr val="64748B"/>
+                </a:solidFill>
+                <a:latin typeface="Montserrat"/>
+              </a:rPr>
+              <a:t>APARTADO 5 · MODIFICACIÓN</a:t>
+            </a:r>
+          </a:p>
+        </p:txBody>
+      </p:sp>
+      <p:sp>
+        <p:nvSpPr>
+          <p:cNvPr id="6" name="TextBox 5"/>
+          <p:cNvSpPr txBox="1"/>
+          <p:nvPr/>
+        </p:nvSpPr>
+        <p:spPr>
+          <a:xfrm>
+            <a:off x="822960" y="868680"/>
+            <a:ext cx="10515600" cy="914400"/>
+          </a:xfrm>
+          <a:prstGeom prst="rect">
+            <a:avLst/>
+          </a:prstGeom>
+          <a:noFill/>
+        </p:spPr>
+        <p:txBody>
+          <a:bodyPr wrap="square">
+            <a:spAutoFit/>
+          </a:bodyPr>
+          <a:lstStyle/>
+          <a:p>
+            <a:r>
+              <a:rPr sz="2700" b="1" i="0">
+                <a:solidFill>
+                  <a:srgbClr val="1E2761"/>
+                </a:solidFill>
+                <a:latin typeface="Montserrat"/>
+              </a:rPr>
+              <a:t>La cadena de la modificación</a:t>
+            </a:r>
+          </a:p>
+        </p:txBody>
+      </p:sp>
+      <p:sp>
+        <p:nvSpPr>
+          <p:cNvPr id="7" name="TextBox 6"/>
+          <p:cNvSpPr txBox="1"/>
+          <p:nvPr/>
+        </p:nvSpPr>
+        <p:spPr>
+          <a:xfrm>
+            <a:off x="822960" y="1920240"/>
+            <a:ext cx="4983480" cy="4206240"/>
+          </a:xfrm>
+          <a:prstGeom prst="rect">
+            <a:avLst/>
+          </a:prstGeom>
+          <a:noFill/>
+        </p:spPr>
+        <p:txBody>
+          <a:bodyPr wrap="square">
+            <a:spAutoFit/>
+          </a:bodyPr>
+          <a:lstStyle/>
+          <a:p>
+            <a:pPr>
+              <a:spcAft>
+                <a:spcPts val="1000"/>
+              </a:spcAft>
+            </a:pPr>
+            <a:r>
+              <a:rPr sz="1600" b="1" i="0">
+                <a:solidFill>
+                  <a:srgbClr val="2E3A80"/>
+                </a:solidFill>
+                <a:latin typeface="Montserrat"/>
+              </a:rPr>
+              <a:t>•  </a:t>
+            </a:r>
+            <a:r>
+              <a:rPr sz="1600" b="0" i="0">
+                <a:solidFill>
+                  <a:srgbClr val="1B2330"/>
+                </a:solidFill>
+                <a:latin typeface="Montserrat"/>
+              </a:rPr>
+              <a:t>Instaladora comunica al suministrador</a:t>
+            </a:r>
+          </a:p>
+          <a:p>
+            <a:pPr>
+              <a:spcAft>
+                <a:spcPts val="1000"/>
+              </a:spcAft>
+            </a:pPr>
+            <a:r>
+              <a:rPr sz="1600" b="1" i="0">
+                <a:solidFill>
+                  <a:srgbClr val="2E3A80"/>
+                </a:solidFill>
+                <a:latin typeface="Montserrat"/>
+              </a:rPr>
+              <a:t>•  </a:t>
+            </a:r>
+            <a:r>
+              <a:rPr sz="1600" b="0" i="0">
+                <a:solidFill>
+                  <a:srgbClr val="1B2330"/>
+                </a:solidFill>
+                <a:latin typeface="Montserrat"/>
+              </a:rPr>
+              <a:t>Suministrador pide enganche al distribuidor</a:t>
+            </a:r>
+          </a:p>
+          <a:p>
+            <a:pPr>
+              <a:spcAft>
+                <a:spcPts val="1000"/>
+              </a:spcAft>
+            </a:pPr>
+            <a:r>
+              <a:rPr sz="1600" b="1" i="0">
+                <a:solidFill>
+                  <a:srgbClr val="2E3A80"/>
+                </a:solidFill>
+                <a:latin typeface="Montserrat"/>
+              </a:rPr>
+              <a:t>•  </a:t>
+            </a:r>
+            <a:r>
+              <a:rPr sz="1600" b="0" i="0">
+                <a:solidFill>
+                  <a:srgbClr val="1B2330"/>
+                </a:solidFill>
+                <a:latin typeface="Montserrat"/>
+              </a:rPr>
+              <a:t>Distribuidor hace pruebas previas</a:t>
+            </a:r>
+          </a:p>
+          <a:p>
+            <a:pPr>
+              <a:spcAft>
+                <a:spcPts val="1000"/>
+              </a:spcAft>
+            </a:pPr>
+            <a:r>
+              <a:rPr sz="1600" b="1" i="0">
+                <a:solidFill>
+                  <a:srgbClr val="2E3A80"/>
+                </a:solidFill>
+                <a:latin typeface="Montserrat"/>
+              </a:rPr>
+              <a:t>•  </a:t>
+            </a:r>
+            <a:r>
+              <a:rPr sz="1600" b="0" i="0">
+                <a:solidFill>
+                  <a:srgbClr val="1B2330"/>
+                </a:solidFill>
+                <a:latin typeface="Montserrat"/>
+              </a:rPr>
+              <a:t>El usuario final paga el enganche</a:t>
+            </a:r>
+          </a:p>
+        </p:txBody>
+      </p:sp>
+      <p:sp>
+        <p:nvSpPr>
+          <p:cNvPr id="8" name="imgph" descr="IMGQ:gas technician connecting meter with tools"/>
+          <p:cNvSpPr/>
+          <p:nvPr/>
+        </p:nvSpPr>
+        <p:spPr>
+          <a:xfrm>
+            <a:off x="5806440" y="1051560"/>
+            <a:ext cx="5298947" cy="4629150"/>
+          </a:xfrm>
+          <a:prstGeom prst="roundRect">
+            <a:avLst/>
+          </a:prstGeom>
+          <a:solidFill>
+            <a:srgbClr val="F3F6FB"/>
+          </a:solidFill>
+          <a:ln w="12700">
+            <a:solidFill>
+              <a:srgbClr val="C7D2E6"/>
+            </a:solidFill>
+          </a:ln>
+          <a:effectLst/>
+        </p:spPr>
+        <p:style>
+          <a:lnRef idx="1">
+            <a:schemeClr val="accent1"/>
+          </a:lnRef>
+          <a:fillRef idx="3">
+            <a:schemeClr val="accent1"/>
+          </a:fillRef>
+          <a:effectRef idx="2">
+            <a:schemeClr val="accent1"/>
+          </a:effectRef>
+          <a:fontRef idx="minor">
+            <a:schemeClr val="lt1"/>
+          </a:fontRef>
+        </p:style>
+        <p:txBody>
+          <a:bodyPr rtlCol="0" anchor="ctr"/>
+          <a:lstStyle/>
+          <a:p>
+            <a:pPr algn="ctr"/>
+          </a:p>
+        </p:txBody>
+      </p:sp>
+      <p:sp>
+        <p:nvSpPr>
+          <p:cNvPr id="9" name="TextBox 8"/>
+          <p:cNvSpPr txBox="1"/>
+          <p:nvPr/>
+        </p:nvSpPr>
+        <p:spPr>
+          <a:xfrm>
+            <a:off x="6080760" y="2726055"/>
+            <a:ext cx="4750307" cy="1280160"/>
+          </a:xfrm>
+          <a:prstGeom prst="rect">
+            <a:avLst/>
+          </a:prstGeom>
+          <a:noFill/>
+        </p:spPr>
+        <p:txBody>
+          <a:bodyPr wrap="square">
+            <a:spAutoFit/>
+          </a:bodyPr>
+          <a:lstStyle/>
+          <a:p>
+            <a:pPr algn="ctr"/>
+            <a:r>
+              <a:rPr sz="1400" b="1" i="0">
+                <a:solidFill>
+                  <a:srgbClr val="64748B"/>
+                </a:solidFill>
+                <a:latin typeface="Montserrat"/>
+              </a:rPr>
+              <a:t>IMAGEN REALISTA</a:t>
+            </a:r>
+          </a:p>
+          <a:p>
+            <a:pPr algn="ctr"/>
+            <a:r>
+              <a:rPr sz="1100" b="0" i="1">
+                <a:solidFill>
+                  <a:srgbClr val="64748B"/>
+                </a:solidFill>
+                <a:latin typeface="Montserrat"/>
+              </a:rPr>
+              <a:t>gas technician connecting meter with tools</a:t>
+            </a:r>
+          </a:p>
+        </p:txBody>
+      </p:sp>
+    </p:spTree>
+  </p:cSld>
+  <p:clrMapOvr>
+    <a:masterClrMapping/>
+  </p:clrMapOvr>
+</p:sld>
+</file>
+
+<file path=ppt/slides/slide18.xml><?xml version="1.0" encoding="utf-8"?>
+<p:sld xmlns:a="http://schemas.openxmlformats.org/drawingml/2006/main" xmlns:p="http://schemas.openxmlformats.org/presentationml/2006/main" xmlns:r="http://schemas.openxmlformats.org/officeDocument/2006/relationships">
+  <p:cSld>
+    <p:spTree>
+      <p:nvGrpSpPr>
+        <p:cNvPr id="1" name=""/>
+        <p:cNvGrpSpPr/>
+        <p:nvPr/>
+      </p:nvGrpSpPr>
+      <p:grpSpPr/>
+      <p:sp>
+        <p:nvSpPr>
+          <p:cNvPr id="2" name="Rectangle 1"/>
+          <p:cNvSpPr/>
+          <p:nvPr/>
+        </p:nvSpPr>
+        <p:spPr>
+          <a:xfrm>
+            <a:off x="0" y="0"/>
+            <a:ext cx="12191695" cy="6858000"/>
+          </a:xfrm>
+          <a:prstGeom prst="rect">
+            <a:avLst/>
+          </a:prstGeom>
+          <a:solidFill>
+            <a:srgbClr val="FFFFFF"/>
+          </a:solidFill>
+          <a:ln>
+            <a:noFill/>
+          </a:ln>
+          <a:effectLst/>
+        </p:spPr>
+        <p:style>
+          <a:lnRef idx="1">
+            <a:schemeClr val="accent1"/>
+          </a:lnRef>
+          <a:fillRef idx="3">
+            <a:schemeClr val="accent1"/>
+          </a:fillRef>
+          <a:effectRef idx="2">
+            <a:schemeClr val="accent1"/>
+          </a:effectRef>
+          <a:fontRef idx="minor">
+            <a:schemeClr val="lt1"/>
+          </a:fontRef>
+        </p:style>
+        <p:txBody>
+          <a:bodyPr rtlCol="0" anchor="ctr"/>
+          <a:lstStyle/>
+          <a:p>
+            <a:pPr algn="ctr"/>
+          </a:p>
+        </p:txBody>
+      </p:sp>
+      <p:sp>
+        <p:nvSpPr>
+          <p:cNvPr id="3" name="TextBox 2"/>
+          <p:cNvSpPr txBox="1"/>
+          <p:nvPr/>
+        </p:nvSpPr>
+        <p:spPr>
+          <a:xfrm>
+            <a:off x="10607040" y="320040"/>
+            <a:ext cx="1371600" cy="365760"/>
+          </a:xfrm>
+          <a:prstGeom prst="rect">
+            <a:avLst/>
+          </a:prstGeom>
+          <a:noFill/>
+        </p:spPr>
+        <p:txBody>
+          <a:bodyPr wrap="square">
+            <a:spAutoFit/>
+          </a:bodyPr>
+          <a:lstStyle/>
+          <a:p>
+            <a:pPr algn="r"/>
+            <a:r>
+              <a:rPr sz="1000" b="1" i="0">
+                <a:solidFill>
+                  <a:srgbClr val="64748B"/>
+                </a:solidFill>
+                <a:latin typeface="Montserrat"/>
+              </a:rPr>
+              <a:t>018 / 020</a:t>
+            </a:r>
+          </a:p>
+        </p:txBody>
+      </p:sp>
+      <p:sp>
+        <p:nvSpPr>
+          <p:cNvPr id="4" name="TextBox 3"/>
+          <p:cNvSpPr txBox="1"/>
+          <p:nvPr/>
+        </p:nvSpPr>
+        <p:spPr>
+          <a:xfrm>
+            <a:off x="457200" y="6419088"/>
+            <a:ext cx="8229600" cy="365760"/>
+          </a:xfrm>
+          <a:prstGeom prst="rect">
+            <a:avLst/>
+          </a:prstGeom>
+          <a:noFill/>
+        </p:spPr>
+        <p:txBody>
+          <a:bodyPr wrap="square">
+            <a:spAutoFit/>
+          </a:bodyPr>
+          <a:lstStyle/>
+          <a:p>
+            <a:r>
+              <a:rPr sz="900" b="0" i="0">
+                <a:solidFill>
+                  <a:srgbClr val="64748B"/>
+                </a:solidFill>
+                <a:latin typeface="Montserrat"/>
+              </a:rPr>
+              <a:t>Curso Gas B · Tema 04 · ITC-ICG 07 · Mantenimiento, inspecciones y revisiones</a:t>
+            </a:r>
+          </a:p>
+        </p:txBody>
+      </p:sp>
+      <p:sp>
+        <p:nvSpPr>
+          <p:cNvPr id="5" name="TextBox 4"/>
+          <p:cNvSpPr txBox="1"/>
+          <p:nvPr/>
+        </p:nvSpPr>
+        <p:spPr>
+          <a:xfrm>
+            <a:off x="822960" y="457200"/>
+            <a:ext cx="8229600" cy="365760"/>
+          </a:xfrm>
+          <a:prstGeom prst="rect">
+            <a:avLst/>
+          </a:prstGeom>
+          <a:noFill/>
+        </p:spPr>
+        <p:txBody>
+          <a:bodyPr wrap="square">
+            <a:spAutoFit/>
+          </a:bodyPr>
+          <a:lstStyle/>
+          <a:p>
+            <a:r>
+              <a:rPr sz="1200" b="1" i="0">
+                <a:solidFill>
+                  <a:srgbClr val="64748B"/>
+                </a:solidFill>
+                <a:latin typeface="Montserrat"/>
+              </a:rPr>
+              <a:t>ANEXO · IMPRESOS</a:t>
+            </a:r>
+          </a:p>
+        </p:txBody>
+      </p:sp>
+      <p:sp>
+        <p:nvSpPr>
+          <p:cNvPr id="6" name="TextBox 5"/>
+          <p:cNvSpPr txBox="1"/>
+          <p:nvPr/>
+        </p:nvSpPr>
+        <p:spPr>
+          <a:xfrm>
+            <a:off x="822960" y="868680"/>
+            <a:ext cx="10515600" cy="914400"/>
+          </a:xfrm>
+          <a:prstGeom prst="rect">
+            <a:avLst/>
+          </a:prstGeom>
+          <a:noFill/>
+        </p:spPr>
+        <p:txBody>
+          <a:bodyPr wrap="square">
+            <a:spAutoFit/>
+          </a:bodyPr>
+          <a:lstStyle/>
+          <a:p>
+            <a:r>
+              <a:rPr sz="2700" b="1" i="0">
+                <a:solidFill>
+                  <a:srgbClr val="1E2761"/>
+                </a:solidFill>
+                <a:latin typeface="Montserrat"/>
+              </a:rPr>
+              <a:t>Los cinco modelos IRG</a:t>
+            </a:r>
+          </a:p>
+        </p:txBody>
+      </p:sp>
+      <p:sp>
+        <p:nvSpPr>
+          <p:cNvPr id="7" name="TextBox 6"/>
+          <p:cNvSpPr txBox="1"/>
+          <p:nvPr/>
+        </p:nvSpPr>
+        <p:spPr>
+          <a:xfrm>
+            <a:off x="822960" y="1920240"/>
+            <a:ext cx="4983480" cy="4206240"/>
+          </a:xfrm>
+          <a:prstGeom prst="rect">
+            <a:avLst/>
+          </a:prstGeom>
+          <a:noFill/>
+        </p:spPr>
+        <p:txBody>
+          <a:bodyPr wrap="square">
+            <a:spAutoFit/>
+          </a:bodyPr>
+          <a:lstStyle/>
+          <a:p>
+            <a:pPr>
+              <a:spcAft>
+                <a:spcPts val="1000"/>
+              </a:spcAft>
+            </a:pPr>
+            <a:r>
+              <a:rPr sz="1600" b="1" i="0">
+                <a:solidFill>
+                  <a:srgbClr val="2E3A80"/>
+                </a:solidFill>
+                <a:latin typeface="Montserrat"/>
+              </a:rPr>
+              <a:t>•  </a:t>
+            </a:r>
+            <a:r>
+              <a:rPr sz="1600" b="0" i="0">
+                <a:solidFill>
+                  <a:srgbClr val="1B2330"/>
+                </a:solidFill>
+                <a:latin typeface="Montserrat"/>
+              </a:rPr>
+              <a:t>IRG-1, 2, 3: instalación (montaje)</a:t>
+            </a:r>
+          </a:p>
+          <a:p>
+            <a:pPr>
+              <a:spcAft>
+                <a:spcPts val="1000"/>
+              </a:spcAft>
+            </a:pPr>
+            <a:r>
+              <a:rPr sz="1600" b="1" i="0">
+                <a:solidFill>
+                  <a:srgbClr val="2E3A80"/>
+                </a:solidFill>
+                <a:latin typeface="Montserrat"/>
+              </a:rPr>
+              <a:t>•  </a:t>
+            </a:r>
+            <a:r>
+              <a:rPr sz="1600" b="0" i="0">
+                <a:solidFill>
+                  <a:srgbClr val="1B2330"/>
+                </a:solidFill>
+                <a:latin typeface="Montserrat"/>
+              </a:rPr>
+              <a:t>IRG-4, 5: revisión (sin red)</a:t>
+            </a:r>
+          </a:p>
+          <a:p>
+            <a:pPr>
+              <a:spcAft>
+                <a:spcPts val="1000"/>
+              </a:spcAft>
+            </a:pPr>
+            <a:r>
+              <a:rPr sz="1600" b="1" i="0">
+                <a:solidFill>
+                  <a:srgbClr val="2E3A80"/>
+                </a:solidFill>
+                <a:latin typeface="Montserrat"/>
+              </a:rPr>
+              <a:t>•  </a:t>
+            </a:r>
+            <a:r>
+              <a:rPr sz="1600" b="0" i="0">
+                <a:solidFill>
+                  <a:srgbClr val="1B2330"/>
+                </a:solidFill>
+                <a:latin typeface="Montserrat"/>
+              </a:rPr>
+              <a:t>Inspección de red: sin número IRG</a:t>
+            </a:r>
+          </a:p>
+        </p:txBody>
+      </p:sp>
+      <p:sp>
+        <p:nvSpPr>
+          <p:cNvPr id="8" name="imgph" descr="IMGQ:set of official technical forms on table"/>
+          <p:cNvSpPr/>
+          <p:nvPr/>
+        </p:nvSpPr>
+        <p:spPr>
+          <a:xfrm>
+            <a:off x="5806440" y="1051560"/>
+            <a:ext cx="5298947" cy="4629150"/>
+          </a:xfrm>
+          <a:prstGeom prst="roundRect">
+            <a:avLst/>
+          </a:prstGeom>
+          <a:solidFill>
+            <a:srgbClr val="F3F6FB"/>
+          </a:solidFill>
+          <a:ln w="12700">
+            <a:solidFill>
+              <a:srgbClr val="C7D2E6"/>
+            </a:solidFill>
+          </a:ln>
+          <a:effectLst/>
+        </p:spPr>
+        <p:style>
+          <a:lnRef idx="1">
+            <a:schemeClr val="accent1"/>
+          </a:lnRef>
+          <a:fillRef idx="3">
+            <a:schemeClr val="accent1"/>
+          </a:fillRef>
+          <a:effectRef idx="2">
+            <a:schemeClr val="accent1"/>
+          </a:effectRef>
+          <a:fontRef idx="minor">
+            <a:schemeClr val="lt1"/>
+          </a:fontRef>
+        </p:style>
+        <p:txBody>
+          <a:bodyPr rtlCol="0" anchor="ctr"/>
+          <a:lstStyle/>
+          <a:p>
+            <a:pPr algn="ctr"/>
+          </a:p>
+        </p:txBody>
+      </p:sp>
+      <p:sp>
+        <p:nvSpPr>
+          <p:cNvPr id="9" name="TextBox 8"/>
+          <p:cNvSpPr txBox="1"/>
+          <p:nvPr/>
+        </p:nvSpPr>
+        <p:spPr>
+          <a:xfrm>
+            <a:off x="6080760" y="2726055"/>
+            <a:ext cx="4750307" cy="1280160"/>
+          </a:xfrm>
+          <a:prstGeom prst="rect">
+            <a:avLst/>
+          </a:prstGeom>
+          <a:noFill/>
+        </p:spPr>
+        <p:txBody>
+          <a:bodyPr wrap="square">
+            <a:spAutoFit/>
+          </a:bodyPr>
+          <a:lstStyle/>
+          <a:p>
+            <a:pPr algn="ctr"/>
+            <a:r>
+              <a:rPr sz="1400" b="1" i="0">
+                <a:solidFill>
+                  <a:srgbClr val="64748B"/>
+                </a:solidFill>
+                <a:latin typeface="Montserrat"/>
+              </a:rPr>
+              <a:t>IMAGEN REALISTA</a:t>
+            </a:r>
+          </a:p>
+          <a:p>
+            <a:pPr algn="ctr"/>
+            <a:r>
+              <a:rPr sz="1100" b="0" i="1">
+                <a:solidFill>
+                  <a:srgbClr val="64748B"/>
+                </a:solidFill>
+                <a:latin typeface="Montserrat"/>
+              </a:rPr>
+              <a:t>set of official technical forms on table</a:t>
+            </a:r>
+          </a:p>
+        </p:txBody>
+      </p:sp>
+    </p:spTree>
+  </p:cSld>
+  <p:clrMapOvr>
+    <a:masterClrMapping/>
+  </p:clrMapOvr>
+</p:sld>
+</file>
+
+<file path=ppt/slides/slide19.xml><?xml version="1.0" encoding="utf-8"?>
+<p:sld xmlns:a="http://schemas.openxmlformats.org/drawingml/2006/main" xmlns:p="http://schemas.openxmlformats.org/presentationml/2006/main" xmlns:r="http://schemas.openxmlformats.org/officeDocument/2006/relationships">
+  <p:cSld>
+    <p:spTree>
+      <p:nvGrpSpPr>
+        <p:cNvPr id="1" name=""/>
+        <p:cNvGrpSpPr/>
+        <p:nvPr/>
+      </p:nvGrpSpPr>
+      <p:grpSpPr/>
+      <p:sp>
+        <p:nvSpPr>
+          <p:cNvPr id="2" name="Rectangle 1"/>
+          <p:cNvSpPr/>
+          <p:nvPr/>
+        </p:nvSpPr>
+        <p:spPr>
+          <a:xfrm>
+            <a:off x="0" y="0"/>
+            <a:ext cx="12191695" cy="6858000"/>
+          </a:xfrm>
+          <a:prstGeom prst="rect">
+            <a:avLst/>
+          </a:prstGeom>
+          <a:solidFill>
+            <a:srgbClr val="FFFFFF"/>
+          </a:solidFill>
+          <a:ln>
+            <a:noFill/>
+          </a:ln>
+          <a:effectLst/>
+        </p:spPr>
+        <p:style>
+          <a:lnRef idx="1">
+            <a:schemeClr val="accent1"/>
+          </a:lnRef>
+          <a:fillRef idx="3">
+            <a:schemeClr val="accent1"/>
+          </a:fillRef>
+          <a:effectRef idx="2">
+            <a:schemeClr val="accent1"/>
+          </a:effectRef>
+          <a:fontRef idx="minor">
+            <a:schemeClr val="lt1"/>
+          </a:fontRef>
+        </p:style>
+        <p:txBody>
+          <a:bodyPr rtlCol="0" anchor="ctr"/>
+          <a:lstStyle/>
+          <a:p>
+            <a:pPr algn="ctr"/>
+          </a:p>
+        </p:txBody>
+      </p:sp>
+      <p:sp>
+        <p:nvSpPr>
+          <p:cNvPr id="3" name="TextBox 2"/>
+          <p:cNvSpPr txBox="1"/>
+          <p:nvPr/>
+        </p:nvSpPr>
+        <p:spPr>
+          <a:xfrm>
+            <a:off x="10607040" y="320040"/>
+            <a:ext cx="1371600" cy="365760"/>
+          </a:xfrm>
+          <a:prstGeom prst="rect">
+            <a:avLst/>
+          </a:prstGeom>
+          <a:noFill/>
+        </p:spPr>
+        <p:txBody>
+          <a:bodyPr wrap="square">
+            <a:spAutoFit/>
+          </a:bodyPr>
+          <a:lstStyle/>
+          <a:p>
+            <a:pPr algn="r"/>
+            <a:r>
+              <a:rPr sz="1000" b="1" i="0">
+                <a:solidFill>
+                  <a:srgbClr val="64748B"/>
+                </a:solidFill>
+                <a:latin typeface="Montserrat"/>
+              </a:rPr>
+              <a:t>019 / 020</a:t>
+            </a:r>
+          </a:p>
+        </p:txBody>
+      </p:sp>
+      <p:sp>
+        <p:nvSpPr>
+          <p:cNvPr id="4" name="TextBox 3"/>
+          <p:cNvSpPr txBox="1"/>
+          <p:nvPr/>
+        </p:nvSpPr>
+        <p:spPr>
+          <a:xfrm>
+            <a:off x="457200" y="6419088"/>
+            <a:ext cx="8229600" cy="365760"/>
+          </a:xfrm>
+          <a:prstGeom prst="rect">
+            <a:avLst/>
+          </a:prstGeom>
+          <a:noFill/>
+        </p:spPr>
+        <p:txBody>
+          <a:bodyPr wrap="square">
+            <a:spAutoFit/>
+          </a:bodyPr>
+          <a:lstStyle/>
+          <a:p>
+            <a:r>
+              <a:rPr sz="900" b="0" i="0">
+                <a:solidFill>
+                  <a:srgbClr val="64748B"/>
+                </a:solidFill>
+                <a:latin typeface="Montserrat"/>
+              </a:rPr>
+              <a:t>Curso Gas B · Tema 04 · ITC-ICG 07 · Mantenimiento, inspecciones y revisiones</a:t>
+            </a:r>
+          </a:p>
+        </p:txBody>
+      </p:sp>
+      <p:sp>
+        <p:nvSpPr>
+          <p:cNvPr id="5" name="TextBox 4"/>
+          <p:cNvSpPr txBox="1"/>
+          <p:nvPr/>
+        </p:nvSpPr>
+        <p:spPr>
+          <a:xfrm>
+            <a:off x="822960" y="457200"/>
+            <a:ext cx="8229600" cy="365760"/>
+          </a:xfrm>
+          <a:prstGeom prst="rect">
+            <a:avLst/>
+          </a:prstGeom>
+          <a:noFill/>
+        </p:spPr>
+        <p:txBody>
+          <a:bodyPr wrap="square">
+            <a:spAutoFit/>
+          </a:bodyPr>
+          <a:lstStyle/>
+          <a:p>
+            <a:r>
+              <a:rPr sz="1200" b="1" i="0">
+                <a:solidFill>
+                  <a:srgbClr val="64748B"/>
+                </a:solidFill>
+                <a:latin typeface="Montserrat"/>
+              </a:rPr>
+              <a:t>ANEXO · INFORMACIÓN MÍNIMA</a:t>
+            </a:r>
+          </a:p>
+        </p:txBody>
+      </p:sp>
+      <p:sp>
+        <p:nvSpPr>
+          <p:cNvPr id="6" name="TextBox 5"/>
+          <p:cNvSpPr txBox="1"/>
+          <p:nvPr/>
+        </p:nvSpPr>
+        <p:spPr>
+          <a:xfrm>
+            <a:off x="822960" y="868680"/>
+            <a:ext cx="10515600" cy="914400"/>
+          </a:xfrm>
+          <a:prstGeom prst="rect">
+            <a:avLst/>
+          </a:prstGeom>
+          <a:noFill/>
+        </p:spPr>
+        <p:txBody>
+          <a:bodyPr wrap="square">
+            <a:spAutoFit/>
+          </a:bodyPr>
+          <a:lstStyle/>
+          <a:p>
+            <a:r>
+              <a:rPr sz="2700" b="1" i="0">
+                <a:solidFill>
+                  <a:srgbClr val="1E2761"/>
+                </a:solidFill>
+                <a:latin typeface="Montserrat"/>
+              </a:rPr>
+              <a:t>Gas natural o GLP: se identifican distinto</a:t>
+            </a:r>
+          </a:p>
+        </p:txBody>
+      </p:sp>
+      <p:sp>
+        <p:nvSpPr>
+          <p:cNvPr id="7" name="TextBox 6"/>
+          <p:cNvSpPr txBox="1"/>
+          <p:nvPr/>
+        </p:nvSpPr>
+        <p:spPr>
+          <a:xfrm>
+            <a:off x="822960" y="1920240"/>
+            <a:ext cx="4983480" cy="4206240"/>
+          </a:xfrm>
+          <a:prstGeom prst="rect">
+            <a:avLst/>
+          </a:prstGeom>
+          <a:noFill/>
+        </p:spPr>
+        <p:txBody>
+          <a:bodyPr wrap="square">
+            <a:spAutoFit/>
+          </a:bodyPr>
+          <a:lstStyle/>
+          <a:p>
+            <a:pPr>
+              <a:spcAft>
+                <a:spcPts val="1000"/>
+              </a:spcAft>
+            </a:pPr>
+            <a:r>
+              <a:rPr sz="1600" b="1" i="0">
+                <a:solidFill>
+                  <a:srgbClr val="2E3A80"/>
+                </a:solidFill>
+                <a:latin typeface="Montserrat"/>
+              </a:rPr>
+              <a:t>•  </a:t>
+            </a:r>
+            <a:r>
+              <a:rPr sz="1600" b="0" i="0">
+                <a:solidFill>
+                  <a:srgbClr val="1B2330"/>
+                </a:solidFill>
+                <a:latin typeface="Montserrat"/>
+              </a:rPr>
+              <a:t>Gas natural → punto de suministro</a:t>
+            </a:r>
+          </a:p>
+          <a:p>
+            <a:pPr>
+              <a:spcAft>
+                <a:spcPts val="1000"/>
+              </a:spcAft>
+            </a:pPr>
+            <a:r>
+              <a:rPr sz="1600" b="1" i="0">
+                <a:solidFill>
+                  <a:srgbClr val="2E3A80"/>
+                </a:solidFill>
+                <a:latin typeface="Montserrat"/>
+              </a:rPr>
+              <a:t>•  </a:t>
+            </a:r>
+            <a:r>
+              <a:rPr sz="1600" b="0" i="0">
+                <a:solidFill>
+                  <a:srgbClr val="1B2330"/>
+                </a:solidFill>
+                <a:latin typeface="Montserrat"/>
+              </a:rPr>
+              <a:t>GLP → número de póliza</a:t>
+            </a:r>
+          </a:p>
+          <a:p>
+            <a:pPr>
+              <a:spcAft>
+                <a:spcPts val="1000"/>
+              </a:spcAft>
+            </a:pPr>
+            <a:r>
+              <a:rPr sz="1600" b="1" i="0">
+                <a:solidFill>
+                  <a:srgbClr val="2E3A80"/>
+                </a:solidFill>
+                <a:latin typeface="Montserrat"/>
+              </a:rPr>
+              <a:t>•  </a:t>
+            </a:r>
+            <a:r>
+              <a:rPr sz="1600" b="0" i="0">
+                <a:solidFill>
+                  <a:srgbClr val="1B2330"/>
+                </a:solidFill>
+                <a:latin typeface="Montserrat"/>
+              </a:rPr>
+              <a:t>Aparece en todos los impresos</a:t>
+            </a:r>
+          </a:p>
+        </p:txBody>
+      </p:sp>
+      <p:sp>
+        <p:nvSpPr>
+          <p:cNvPr id="8" name="imgph" descr="IMGQ:gas bill document with supply point code"/>
+          <p:cNvSpPr/>
+          <p:nvPr/>
+        </p:nvSpPr>
+        <p:spPr>
+          <a:xfrm>
+            <a:off x="5806440" y="1051560"/>
+            <a:ext cx="5298947" cy="4629150"/>
+          </a:xfrm>
+          <a:prstGeom prst="roundRect">
+            <a:avLst/>
+          </a:prstGeom>
+          <a:solidFill>
+            <a:srgbClr val="F3F6FB"/>
+          </a:solidFill>
+          <a:ln w="12700">
+            <a:solidFill>
+              <a:srgbClr val="C7D2E6"/>
+            </a:solidFill>
+          </a:ln>
+          <a:effectLst/>
+        </p:spPr>
+        <p:style>
+          <a:lnRef idx="1">
+            <a:schemeClr val="accent1"/>
+          </a:lnRef>
+          <a:fillRef idx="3">
+            <a:schemeClr val="accent1"/>
+          </a:fillRef>
+          <a:effectRef idx="2">
+            <a:schemeClr val="accent1"/>
+          </a:effectRef>
+          <a:fontRef idx="minor">
+            <a:schemeClr val="lt1"/>
+          </a:fontRef>
+        </p:style>
+        <p:txBody>
+          <a:bodyPr rtlCol="0" anchor="ctr"/>
+          <a:lstStyle/>
+          <a:p>
+            <a:pPr algn="ctr"/>
+          </a:p>
+        </p:txBody>
+      </p:sp>
+      <p:sp>
+        <p:nvSpPr>
+          <p:cNvPr id="9" name="TextBox 8"/>
+          <p:cNvSpPr txBox="1"/>
+          <p:nvPr/>
+        </p:nvSpPr>
+        <p:spPr>
+          <a:xfrm>
+            <a:off x="6080760" y="2726055"/>
+            <a:ext cx="4750307" cy="1280160"/>
+          </a:xfrm>
+          <a:prstGeom prst="rect">
+            <a:avLst/>
+          </a:prstGeom>
+          <a:noFill/>
+        </p:spPr>
+        <p:txBody>
+          <a:bodyPr wrap="square">
+            <a:spAutoFit/>
+          </a:bodyPr>
+          <a:lstStyle/>
+          <a:p>
+            <a:pPr algn="ctr"/>
+            <a:r>
+              <a:rPr sz="1400" b="1" i="0">
+                <a:solidFill>
+                  <a:srgbClr val="64748B"/>
+                </a:solidFill>
+                <a:latin typeface="Montserrat"/>
+              </a:rPr>
+              <a:t>IMAGEN REALISTA</a:t>
+            </a:r>
+          </a:p>
+          <a:p>
+            <a:pPr algn="ctr"/>
+            <a:r>
+              <a:rPr sz="1100" b="0" i="1">
+                <a:solidFill>
+                  <a:srgbClr val="64748B"/>
+                </a:solidFill>
+                <a:latin typeface="Montserrat"/>
+              </a:rPr>
+              <a:t>gas bill document with supply point code</a:t>
             </a:r>
           </a:p>
         </p:txBody>
@@ -7655,7 +9191,7 @@
                 </a:solidFill>
                 <a:latin typeface="Montserrat"/>
               </a:rPr>
-              <a:t>002 / 016</a:t>
+              <a:t>002 / 020</a:t>
             </a:r>
           </a:p>
         </p:txBody>
@@ -7689,7 +9225,7 @@
                 </a:solidFill>
                 <a:latin typeface="Montserrat"/>
               </a:rPr>
-              <a:t>Curso Gas B · Tema 04 · ITC-ICG 07 · Mantenimiento e inspecciones</a:t>
+              <a:t>Curso Gas B · Tema 04 · ITC-ICG 07 · Mantenimiento, inspecciones y revisiones</a:t>
             </a:r>
           </a:p>
         </p:txBody>
@@ -7804,7 +9340,7 @@
                 </a:solidFill>
                 <a:latin typeface="Montserrat"/>
               </a:rPr>
-              <a:t>5 años</a:t>
+              <a:t>5</a:t>
             </a:r>
           </a:p>
         </p:txBody>
@@ -7839,7 +9375,7 @@
                 </a:solidFill>
                 <a:latin typeface="Montserrat"/>
               </a:rPr>
-              <a:t>periodicidad de la revisión</a:t>
+              <a:t>años entre inspecciones</a:t>
             </a:r>
           </a:p>
         </p:txBody>
@@ -7920,7 +9456,7 @@
                 </a:solidFill>
                 <a:latin typeface="Montserrat"/>
               </a:rPr>
-              <a:t>3 meses</a:t>
+              <a:t>15</a:t>
             </a:r>
           </a:p>
         </p:txBody>
@@ -7955,7 +9491,7 @@
                 </a:solidFill>
                 <a:latin typeface="Montserrat"/>
               </a:rPr>
-              <a:t>aviso previo del distribuidor</a:t>
+              <a:t>días hábiles: anomalía secundaria</a:t>
             </a:r>
           </a:p>
         </p:txBody>
@@ -8036,7 +9572,7 @@
                 </a:solidFill>
                 <a:latin typeface="Montserrat"/>
               </a:rPr>
-              <a:t>15 días</a:t>
+              <a:t>10</a:t>
             </a:r>
           </a:p>
         </p:txBody>
@@ -8071,7 +9607,338 @@
                 </a:solidFill>
                 <a:latin typeface="Montserrat"/>
               </a:rPr>
-              <a:t>corregir anomalía secundaria</a:t>
+              <a:t>años que se guardan los datos</a:t>
+            </a:r>
+          </a:p>
+        </p:txBody>
+      </p:sp>
+    </p:spTree>
+  </p:cSld>
+  <p:clrMapOvr>
+    <a:masterClrMapping/>
+  </p:clrMapOvr>
+</p:sld>
+</file>
+
+<file path=ppt/slides/slide20.xml><?xml version="1.0" encoding="utf-8"?>
+<p:sld xmlns:a="http://schemas.openxmlformats.org/drawingml/2006/main" xmlns:p="http://schemas.openxmlformats.org/presentationml/2006/main" xmlns:r="http://schemas.openxmlformats.org/officeDocument/2006/relationships">
+  <p:cSld>
+    <p:spTree>
+      <p:nvGrpSpPr>
+        <p:cNvPr id="1" name=""/>
+        <p:cNvGrpSpPr/>
+        <p:nvPr/>
+      </p:nvGrpSpPr>
+      <p:grpSpPr/>
+      <p:sp>
+        <p:nvSpPr>
+          <p:cNvPr id="2" name="Rectangle 1"/>
+          <p:cNvSpPr/>
+          <p:nvPr/>
+        </p:nvSpPr>
+        <p:spPr>
+          <a:xfrm>
+            <a:off x="0" y="0"/>
+            <a:ext cx="12191695" cy="6858000"/>
+          </a:xfrm>
+          <a:prstGeom prst="rect">
+            <a:avLst/>
+          </a:prstGeom>
+          <a:solidFill>
+            <a:srgbClr val="1E2761"/>
+          </a:solidFill>
+          <a:ln>
+            <a:noFill/>
+          </a:ln>
+          <a:effectLst/>
+        </p:spPr>
+        <p:style>
+          <a:lnRef idx="1">
+            <a:schemeClr val="accent1"/>
+          </a:lnRef>
+          <a:fillRef idx="3">
+            <a:schemeClr val="accent1"/>
+          </a:fillRef>
+          <a:effectRef idx="2">
+            <a:schemeClr val="accent1"/>
+          </a:effectRef>
+          <a:fontRef idx="minor">
+            <a:schemeClr val="lt1"/>
+          </a:fontRef>
+        </p:style>
+        <p:txBody>
+          <a:bodyPr rtlCol="0" anchor="ctr"/>
+          <a:lstStyle/>
+          <a:p>
+            <a:pPr algn="ctr"/>
+          </a:p>
+        </p:txBody>
+      </p:sp>
+      <p:sp>
+        <p:nvSpPr>
+          <p:cNvPr id="3" name="TextBox 2"/>
+          <p:cNvSpPr txBox="1"/>
+          <p:nvPr/>
+        </p:nvSpPr>
+        <p:spPr>
+          <a:xfrm>
+            <a:off x="822960" y="640080"/>
+            <a:ext cx="10515600" cy="457200"/>
+          </a:xfrm>
+          <a:prstGeom prst="rect">
+            <a:avLst/>
+          </a:prstGeom>
+          <a:noFill/>
+        </p:spPr>
+        <p:txBody>
+          <a:bodyPr wrap="square">
+            <a:spAutoFit/>
+          </a:bodyPr>
+          <a:lstStyle/>
+          <a:p>
+            <a:r>
+              <a:rPr sz="1400" b="1" i="0">
+                <a:solidFill>
+                  <a:srgbClr val="CADCFC"/>
+                </a:solidFill>
+                <a:latin typeface="Montserrat"/>
+              </a:rPr>
+              <a:t>LO QUE YA DOMINAS</a:t>
+            </a:r>
+          </a:p>
+        </p:txBody>
+      </p:sp>
+      <p:sp>
+        <p:nvSpPr>
+          <p:cNvPr id="4" name="TextBox 3"/>
+          <p:cNvSpPr txBox="1"/>
+          <p:nvPr/>
+        </p:nvSpPr>
+        <p:spPr>
+          <a:xfrm>
+            <a:off x="822960" y="1143000"/>
+            <a:ext cx="10515600" cy="1097280"/>
+          </a:xfrm>
+          <a:prstGeom prst="rect">
+            <a:avLst/>
+          </a:prstGeom>
+          <a:noFill/>
+        </p:spPr>
+        <p:txBody>
+          <a:bodyPr wrap="square">
+            <a:spAutoFit/>
+          </a:bodyPr>
+          <a:lstStyle/>
+          <a:p>
+            <a:r>
+              <a:rPr sz="3400" b="1" i="0">
+                <a:solidFill>
+                  <a:srgbClr val="FFFFFF"/>
+                </a:solidFill>
+                <a:latin typeface="Montserrat"/>
+              </a:rPr>
+              <a:t>Ya dominas la ITC-ICG 07 de principio a fin</a:t>
+            </a:r>
+          </a:p>
+        </p:txBody>
+      </p:sp>
+      <p:sp>
+        <p:nvSpPr>
+          <p:cNvPr id="5" name="TextBox 4"/>
+          <p:cNvSpPr txBox="1"/>
+          <p:nvPr/>
+        </p:nvSpPr>
+        <p:spPr>
+          <a:xfrm>
+            <a:off x="822960" y="2514600"/>
+            <a:ext cx="10515600" cy="2834640"/>
+          </a:xfrm>
+          <a:prstGeom prst="rect">
+            <a:avLst/>
+          </a:prstGeom>
+          <a:noFill/>
+        </p:spPr>
+        <p:txBody>
+          <a:bodyPr wrap="square">
+            <a:spAutoFit/>
+          </a:bodyPr>
+          <a:lstStyle/>
+          <a:p>
+            <a:pPr>
+              <a:spcAft>
+                <a:spcPts val="1200"/>
+              </a:spcAft>
+            </a:pPr>
+            <a:r>
+              <a:rPr sz="2000" b="1" i="0">
+                <a:solidFill>
+                  <a:srgbClr val="CADCFC"/>
+                </a:solidFill>
+                <a:latin typeface="Montserrat"/>
+              </a:rPr>
+              <a:t>✓  </a:t>
+            </a:r>
+            <a:r>
+              <a:rPr sz="1900" b="0" i="0">
+                <a:solidFill>
+                  <a:srgbClr val="FFFFFF"/>
+                </a:solidFill>
+                <a:latin typeface="Montserrat"/>
+              </a:rPr>
+              <a:t>Inspección con red, revisión sin red: cada 5 años</a:t>
+            </a:r>
+          </a:p>
+          <a:p>
+            <a:pPr>
+              <a:spcAft>
+                <a:spcPts val="1200"/>
+              </a:spcAft>
+            </a:pPr>
+            <a:r>
+              <a:rPr sz="2000" b="1" i="0">
+                <a:solidFill>
+                  <a:srgbClr val="CADCFC"/>
+                </a:solidFill>
+                <a:latin typeface="Montserrat"/>
+              </a:rPr>
+              <a:t>✓  </a:t>
+            </a:r>
+            <a:r>
+              <a:rPr sz="1900" b="0" i="0">
+                <a:solidFill>
+                  <a:srgbClr val="FFFFFF"/>
+                </a:solidFill>
+                <a:latin typeface="Montserrat"/>
+              </a:rPr>
+              <a:t>El aparato entra en la inspección hasta 70 kW</a:t>
+            </a:r>
+          </a:p>
+          <a:p>
+            <a:pPr>
+              <a:spcAft>
+                <a:spcPts val="1200"/>
+              </a:spcAft>
+            </a:pPr>
+            <a:r>
+              <a:rPr sz="2000" b="1" i="0">
+                <a:solidFill>
+                  <a:srgbClr val="CADCFC"/>
+                </a:solidFill>
+                <a:latin typeface="Montserrat"/>
+              </a:rPr>
+              <a:t>✓  </a:t>
+            </a:r>
+            <a:r>
+              <a:rPr sz="1900" b="0" i="0">
+                <a:solidFill>
+                  <a:srgbClr val="FFFFFF"/>
+                </a:solidFill>
+                <a:latin typeface="Montserrat"/>
+              </a:rPr>
+              <a:t>Principal corta; secundaria da plazo</a:t>
+            </a:r>
+          </a:p>
+          <a:p>
+            <a:pPr>
+              <a:spcAft>
+                <a:spcPts val="1200"/>
+              </a:spcAft>
+            </a:pPr>
+            <a:r>
+              <a:rPr sz="2000" b="1" i="0">
+                <a:solidFill>
+                  <a:srgbClr val="CADCFC"/>
+                </a:solidFill>
+                <a:latin typeface="Montserrat"/>
+              </a:rPr>
+              <a:t>✓  </a:t>
+            </a:r>
+            <a:r>
+              <a:rPr sz="1900" b="0" i="0">
+                <a:solidFill>
+                  <a:srgbClr val="FFFFFF"/>
+                </a:solidFill>
+                <a:latin typeface="Montserrat"/>
+              </a:rPr>
+              <a:t>IRG-1 a IRG-5 y la regla del metro</a:t>
+            </a:r>
+          </a:p>
+        </p:txBody>
+      </p:sp>
+      <p:sp>
+        <p:nvSpPr>
+          <p:cNvPr id="6" name="Rounded Rectangle 5"/>
+          <p:cNvSpPr/>
+          <p:nvPr/>
+        </p:nvSpPr>
+        <p:spPr>
+          <a:xfrm>
+            <a:off x="822960" y="5532120"/>
+            <a:ext cx="10515600" cy="777240"/>
+          </a:xfrm>
+          <a:prstGeom prst="roundRect">
+            <a:avLst/>
+          </a:prstGeom>
+          <a:solidFill>
+            <a:srgbClr val="2E3A80"/>
+          </a:solidFill>
+          <a:ln>
+            <a:noFill/>
+          </a:ln>
+          <a:effectLst/>
+        </p:spPr>
+        <p:style>
+          <a:lnRef idx="1">
+            <a:schemeClr val="accent1"/>
+          </a:lnRef>
+          <a:fillRef idx="3">
+            <a:schemeClr val="accent1"/>
+          </a:fillRef>
+          <a:effectRef idx="2">
+            <a:schemeClr val="accent1"/>
+          </a:effectRef>
+          <a:fontRef idx="minor">
+            <a:schemeClr val="lt1"/>
+          </a:fontRef>
+        </p:style>
+        <p:txBody>
+          <a:bodyPr rtlCol="0" anchor="ctr"/>
+          <a:lstStyle/>
+          <a:p>
+            <a:pPr algn="ctr"/>
+          </a:p>
+        </p:txBody>
+      </p:sp>
+      <p:sp>
+        <p:nvSpPr>
+          <p:cNvPr id="7" name="TextBox 6"/>
+          <p:cNvSpPr txBox="1"/>
+          <p:nvPr/>
+        </p:nvSpPr>
+        <p:spPr>
+          <a:xfrm>
+            <a:off x="1051560" y="5605272"/>
+            <a:ext cx="10058400" cy="640080"/>
+          </a:xfrm>
+          <a:prstGeom prst="rect">
+            <a:avLst/>
+          </a:prstGeom>
+          <a:noFill/>
+        </p:spPr>
+        <p:txBody>
+          <a:bodyPr wrap="square">
+            <a:spAutoFit/>
+          </a:bodyPr>
+          <a:lstStyle/>
+          <a:p>
+            <a:r>
+              <a:rPr sz="1500" b="1" i="1">
+                <a:solidFill>
+                  <a:srgbClr val="CADCFC"/>
+                </a:solidFill>
+                <a:latin typeface="Montserrat"/>
+              </a:rPr>
+              <a:t>Has cerrado el corazón del Gas B. De aquí sales sabiendo diseñar, legalizar y mantener una instalación.</a:t>
             </a:r>
           </a:p>
         </p:txBody>
@@ -8168,7 +10035,7 @@
                 </a:solidFill>
                 <a:latin typeface="Montserrat"/>
               </a:rPr>
-              <a:t>003 / 016</a:t>
+              <a:t>003 / 020</a:t>
             </a:r>
           </a:p>
         </p:txBody>
@@ -8202,7 +10069,7 @@
                 </a:solidFill>
                 <a:latin typeface="Montserrat"/>
               </a:rPr>
-              <a:t>Curso Gas B · Tema 04 · ITC-ICG 07 · Mantenimiento e inspecciones</a:t>
+              <a:t>Curso Gas B · Tema 04 · ITC-ICG 07 · Mantenimiento, inspecciones y revisiones</a:t>
             </a:r>
           </a:p>
         </p:txBody>
@@ -8270,7 +10137,7 @@
                 </a:solidFill>
                 <a:latin typeface="Montserrat"/>
               </a:rPr>
-              <a:t>¿De quién es el mantenimiento?</a:t>
+              <a:t>¿Quién mantiene la instalación?</a:t>
             </a:r>
           </a:p>
         </p:txBody>
@@ -8318,7 +10185,7 @@
                 </a:solidFill>
                 <a:latin typeface="Montserrat"/>
               </a:rPr>
-              <a:t>Responsable: el titular (o el usuario)</a:t>
+              <a:t>El titular es el responsable</a:t>
             </a:r>
           </a:p>
           <a:p>
@@ -8343,7 +10210,7 @@
                 </a:solidFill>
                 <a:latin typeface="Montserrat"/>
               </a:rPr>
-              <a:t>Permanentemente en servicio y seguro</a:t>
+              <a:t>En su defecto, los usuarios</a:t>
             </a:r>
           </a:p>
           <a:p>
@@ -8371,36 +10238,11 @@
               <a:t>Modificaciones: siempre un instalador</a:t>
             </a:r>
           </a:p>
-          <a:p>
-            <a:pPr>
-              <a:spcAft>
-                <a:spcPts val="1000"/>
-              </a:spcAft>
-            </a:pPr>
-            <a:r>
-              <a:rPr sz="1600" b="1" i="0">
-                <a:solidFill>
-                  <a:srgbClr val="2E3A80"/>
-                </a:solidFill>
-                <a:latin typeface="Montserrat"/>
-              </a:rPr>
-              <a:t>•  </a:t>
-            </a:r>
-            <a:r>
-              <a:rPr sz="1600" b="0" i="0">
-                <a:solidFill>
-                  <a:srgbClr val="1B2330"/>
-                </a:solidFill>
-                <a:latin typeface="Montserrat"/>
-              </a:rPr>
-              <a:t>El instalador emite certificado</a:t>
-            </a:r>
-          </a:p>
-        </p:txBody>
-      </p:sp>
-      <p:sp>
-        <p:nvSpPr>
-          <p:cNvPr id="8" name="imgph" descr="IMGQ:homeowner and technician gas boiler"/>
+        </p:txBody>
+      </p:sp>
+      <p:sp>
+        <p:nvSpPr>
+          <p:cNvPr id="8" name="imgph" descr="IMGQ:homeowner checking gas boiler at home"/>
           <p:cNvSpPr/>
           <p:nvPr/>
         </p:nvSpPr>
@@ -8486,7 +10328,7 @@
                 </a:solidFill>
                 <a:latin typeface="Montserrat"/>
               </a:rPr>
-              <a:t>homeowner and technician gas boiler</a:t>
+              <a:t>homeowner checking gas boiler at home</a:t>
             </a:r>
           </a:p>
         </p:txBody>
@@ -8583,7 +10425,7 @@
                 </a:solidFill>
                 <a:latin typeface="Montserrat"/>
               </a:rPr>
-              <a:t>004 / 016</a:t>
+              <a:t>004 / 020</a:t>
             </a:r>
           </a:p>
         </p:txBody>
@@ -8617,7 +10459,7 @@
                 </a:solidFill>
                 <a:latin typeface="Montserrat"/>
               </a:rPr>
-              <a:t>Curso Gas B · Tema 04 · ITC-ICG 07 · Mantenimiento e inspecciones</a:t>
+              <a:t>Curso Gas B · Tema 04 · ITC-ICG 07 · Mantenimiento, inspecciones y revisiones</a:t>
             </a:r>
           </a:p>
         </p:txBody>
@@ -8651,7 +10493,7 @@
                 </a:solidFill>
                 <a:latin typeface="Montserrat"/>
               </a:rPr>
-              <a:t>APARTADO 4.1 · INSPECCIÓN</a:t>
+              <a:t>APARTADO 4 · LA GRAN DISTINCIÓN</a:t>
             </a:r>
           </a:p>
         </p:txBody>
@@ -8685,7 +10527,7 @@
                 </a:solidFill>
                 <a:latin typeface="Montserrat"/>
               </a:rPr>
-              <a:t>Inspección: alimentadas desde red</a:t>
+              <a:t>Inspección o revisión: una pregunta</a:t>
             </a:r>
           </a:p>
         </p:txBody>
@@ -8733,7 +10575,7 @@
                 </a:solidFill>
                 <a:latin typeface="Montserrat"/>
               </a:rPr>
-              <a:t>Cada 5 años, en su año natural</a:t>
+              <a:t>¿Está conectada a la red?</a:t>
             </a:r>
           </a:p>
           <a:p>
@@ -8758,7 +10600,7 @@
                 </a:solidFill>
                 <a:latin typeface="Montserrat"/>
               </a:rPr>
-              <a:t>La hace instalador habilitado o distribuidor</a:t>
+              <a:t>Sí → inspección (4.1)</a:t>
             </a:r>
           </a:p>
           <a:p>
@@ -8783,7 +10625,7 @@
                 </a:solidFill>
                 <a:latin typeface="Montserrat"/>
               </a:rPr>
-              <a:t>Parte común también cada 5 años</a:t>
+              <a:t>No → revisión (4.2)</a:t>
             </a:r>
           </a:p>
           <a:p>
@@ -8808,14 +10650,14 @@
                 </a:solidFill>
                 <a:latin typeface="Montserrat"/>
               </a:rPr>
-              <a:t>Coste repercutido al usuario</a:t>
-            </a:r>
-          </a:p>
-        </p:txBody>
-      </p:sp>
-      <p:sp>
-        <p:nvSpPr>
-          <p:cNvPr id="8" name="imgph" descr="IMGQ:gas inspector checking meter"/>
+              <a:t>Las dos: cada 5 años</a:t>
+            </a:r>
+          </a:p>
+        </p:txBody>
+      </p:sp>
+      <p:sp>
+        <p:nvSpPr>
+          <p:cNvPr id="8" name="imgph" descr="IMGQ:gas meter connected to street distribution network"/>
           <p:cNvSpPr/>
           <p:nvPr/>
         </p:nvSpPr>
@@ -8901,7 +10743,7 @@
                 </a:solidFill>
                 <a:latin typeface="Montserrat"/>
               </a:rPr>
-              <a:t>gas inspector checking meter</a:t>
+              <a:t>gas meter connected to street distribution network</a:t>
             </a:r>
           </a:p>
         </p:txBody>
@@ -8998,7 +10840,7 @@
                 </a:solidFill>
                 <a:latin typeface="Montserrat"/>
               </a:rPr>
-              <a:t>005 / 016</a:t>
+              <a:t>005 / 020</a:t>
             </a:r>
           </a:p>
         </p:txBody>
@@ -9032,7 +10874,7 @@
                 </a:solidFill>
                 <a:latin typeface="Montserrat"/>
               </a:rPr>
-              <a:t>Curso Gas B · Tema 04 · ITC-ICG 07 · Mantenimiento e inspecciones</a:t>
+              <a:t>Curso Gas B · Tema 04 · ITC-ICG 07 · Mantenimiento, inspecciones y revisiones</a:t>
             </a:r>
           </a:p>
         </p:txBody>
@@ -9066,7 +10908,7 @@
                 </a:solidFill>
                 <a:latin typeface="Montserrat"/>
               </a:rPr>
-              <a:t>APARTADO 4.1 · ALCANCE</a:t>
+              <a:t>APARTADO 4.1 · INSPECCIÓN</a:t>
             </a:r>
           </a:p>
         </p:txBody>
@@ -9100,7 +10942,7 @@
                 </a:solidFill>
                 <a:latin typeface="Montserrat"/>
               </a:rPr>
-              <a:t>El alcance depende de la potencia</a:t>
+              <a:t>Inspección: cada cinco años</a:t>
             </a:r>
           </a:p>
         </p:txBody>
@@ -9148,7 +10990,7 @@
                 </a:solidFill>
                 <a:latin typeface="Montserrat"/>
               </a:rPr>
-              <a:t>≤ 70 kW: de la llave de usuario, aparatos incluidos</a:t>
+              <a:t>Instalaciones alimentadas desde red</a:t>
             </a:r>
           </a:p>
           <a:p>
@@ -9173,7 +11015,7 @@
                 </a:solidFill>
                 <a:latin typeface="Montserrat"/>
               </a:rPr>
-              <a:t>&gt; 70 kW: de la llave de edificio, aparatos excluidos</a:t>
+              <a:t>Dentro del año natural de vencimiento</a:t>
             </a:r>
           </a:p>
           <a:p>
@@ -9198,14 +11040,14 @@
                 </a:solidFill>
                 <a:latin typeface="Montserrat"/>
               </a:rPr>
-              <a:t>&gt; 5 bar: de la llave de acometida, excluidos</a:t>
-            </a:r>
-          </a:p>
-        </p:txBody>
-      </p:sp>
-      <p:sp>
-        <p:nvSpPr>
-          <p:cNvPr id="8" name="imgph" descr="IMGQ:gas shutoff valve pipe wall"/>
+              <a:t>La parte común, también cada 5 años</a:t>
+            </a:r>
+          </a:p>
+        </p:txBody>
+      </p:sp>
+      <p:sp>
+        <p:nvSpPr>
+          <p:cNvPr id="8" name="imgph" descr="IMGQ:technician inspecting gas installation with checklist"/>
           <p:cNvSpPr/>
           <p:nvPr/>
         </p:nvSpPr>
@@ -9291,7 +11133,7 @@
                 </a:solidFill>
                 <a:latin typeface="Montserrat"/>
               </a:rPr>
-              <a:t>gas shutoff valve pipe wall</a:t>
+              <a:t>technician inspecting gas installation with checklist</a:t>
             </a:r>
           </a:p>
         </p:txBody>
@@ -9388,7 +11230,7 @@
                 </a:solidFill>
                 <a:latin typeface="Montserrat"/>
               </a:rPr>
-              <a:t>006 / 016</a:t>
+              <a:t>006 / 020</a:t>
             </a:r>
           </a:p>
         </p:txBody>
@@ -9422,7 +11264,7 @@
                 </a:solidFill>
                 <a:latin typeface="Montserrat"/>
               </a:rPr>
-              <a:t>Curso Gas B · Tema 04 · ITC-ICG 07 · Mantenimiento e inspecciones</a:t>
+              <a:t>Curso Gas B · Tema 04 · ITC-ICG 07 · Mantenimiento, inspecciones y revisiones</a:t>
             </a:r>
           </a:p>
         </p:txBody>
@@ -9456,7 +11298,7 @@
                 </a:solidFill>
                 <a:latin typeface="Montserrat"/>
               </a:rPr>
-              <a:t>APARTADO 4.1 · CONTENIDO</a:t>
+              <a:t>APARTADO 4.1 · ALCANCE</a:t>
             </a:r>
           </a:p>
         </p:txBody>
@@ -9490,7 +11332,7 @@
                 </a:solidFill>
                 <a:latin typeface="Montserrat"/>
               </a:rPr>
-              <a:t>Qué se comprueba</a:t>
+              <a:t>El aparato, ¿entra o no?</a:t>
             </a:r>
           </a:p>
         </p:txBody>
@@ -9538,7 +11380,7 @@
                 </a:solidFill>
                 <a:latin typeface="Montserrat"/>
               </a:rPr>
-              <a:t>Estanquidad y conservación</a:t>
+              <a:t>≤ 70 kW: llave de usuario, aparatos incluidos</a:t>
             </a:r>
           </a:p>
           <a:p>
@@ -9563,7 +11405,7 @@
                 </a:solidFill>
                 <a:latin typeface="Montserrat"/>
               </a:rPr>
-              <a:t>Combustión higiénica de aparatos</a:t>
+              <a:t>&gt; 70 kW: llave de edificio, excluidos</a:t>
             </a:r>
           </a:p>
           <a:p>
@@ -9588,39 +11430,14 @@
                 </a:solidFill>
                 <a:latin typeface="Montserrat"/>
               </a:rPr>
-              <a:t>Ventilación y volumen del local</a:t>
-            </a:r>
-          </a:p>
-          <a:p>
-            <a:pPr>
-              <a:spcAft>
-                <a:spcPts val="1000"/>
-              </a:spcAft>
-            </a:pPr>
-            <a:r>
-              <a:rPr sz="1600" b="1" i="0">
-                <a:solidFill>
-                  <a:srgbClr val="2E3A80"/>
-                </a:solidFill>
-                <a:latin typeface="Montserrat"/>
-              </a:rPr>
-              <a:t>•  </a:t>
-            </a:r>
-            <a:r>
-              <a:rPr sz="1600" b="0" i="0">
-                <a:solidFill>
-                  <a:srgbClr val="1B2330"/>
-                </a:solidFill>
-                <a:latin typeface="Montserrat"/>
-              </a:rPr>
-              <a:t>Detección de gas y evacuación de humos</a:t>
-            </a:r>
-          </a:p>
-        </p:txBody>
-      </p:sp>
-      <p:sp>
-        <p:nvSpPr>
-          <p:cNvPr id="8" name="imgph" descr="IMGQ:technician flue gas analyzer boiler"/>
+              <a:t>&gt; 5 bar: llave de acometida, excluidos</a:t>
+            </a:r>
+          </a:p>
+        </p:txBody>
+      </p:sp>
+      <p:sp>
+        <p:nvSpPr>
+          <p:cNvPr id="8" name="imgph" descr="IMGQ:gas shut off valve on wall"/>
           <p:cNvSpPr/>
           <p:nvPr/>
         </p:nvSpPr>
@@ -9706,7 +11523,7 @@
                 </a:solidFill>
                 <a:latin typeface="Montserrat"/>
               </a:rPr>
-              <a:t>technician flue gas analyzer boiler</a:t>
+              <a:t>gas shut off valve on wall</a:t>
             </a:r>
           </a:p>
         </p:txBody>
@@ -9803,7 +11620,7 @@
                 </a:solidFill>
                 <a:latin typeface="Montserrat"/>
               </a:rPr>
-              <a:t>007 / 016</a:t>
+              <a:t>007 / 020</a:t>
             </a:r>
           </a:p>
         </p:txBody>
@@ -9837,7 +11654,7 @@
                 </a:solidFill>
                 <a:latin typeface="Montserrat"/>
               </a:rPr>
-              <a:t>Curso Gas B · Tema 04 · ITC-ICG 07 · Mantenimiento e inspecciones</a:t>
+              <a:t>Curso Gas B · Tema 04 · ITC-ICG 07 · Mantenimiento, inspecciones y revisiones</a:t>
             </a:r>
           </a:p>
         </p:txBody>
@@ -9871,7 +11688,7 @@
                 </a:solidFill>
                 <a:latin typeface="Montserrat"/>
               </a:rPr>
-              <a:t>APARTADO 4.1 · CRITERIOS</a:t>
+              <a:t>APARTADO 4.1 · CONTENIDO</a:t>
             </a:r>
           </a:p>
         </p:txBody>
@@ -9905,7 +11722,7 @@
                 </a:solidFill>
                 <a:latin typeface="Montserrat"/>
               </a:rPr>
-              <a:t>La excepción de tipos A y B</a:t>
+              <a:t>Qué se mira en la inspección</a:t>
             </a:r>
           </a:p>
         </p:txBody>
@@ -9953,7 +11770,7 @@
                 </a:solidFill>
                 <a:latin typeface="Montserrat"/>
               </a:rPr>
-              <a:t>Regla: criterios de cuando se montó</a:t>
+              <a:t>Estanquidad y conservación</a:t>
             </a:r>
           </a:p>
           <a:p>
@@ -9978,7 +11795,7 @@
                 </a:solidFill>
                 <a:latin typeface="Montserrat"/>
               </a:rPr>
-              <a:t>Excepción 1: tipo A o B en dormitorio o baño</a:t>
+              <a:t>Combustión higiénica</a:t>
             </a:r>
           </a:p>
           <a:p>
@@ -10003,7 +11820,7 @@
                 </a:solidFill>
                 <a:latin typeface="Montserrat"/>
               </a:rPr>
-              <a:t>Excepción 2: sin detección y corte de gas</a:t>
+              <a:t>Ventilación y volumen del local</a:t>
             </a:r>
           </a:p>
           <a:p>
@@ -10028,14 +11845,14 @@
                 </a:solidFill>
                 <a:latin typeface="Montserrat"/>
               </a:rPr>
-              <a:t>Esas dos: norma de hoy, hasta la próxima visita</a:t>
-            </a:r>
-          </a:p>
-        </p:txBody>
-      </p:sp>
-      <p:sp>
-        <p:nvSpPr>
-          <p:cNvPr id="8" name="imgph" descr="IMGQ:gas water heater bathroom wall"/>
+              <a:t>Detección de gas y evacuación de humos</a:t>
+            </a:r>
+          </a:p>
+        </p:txBody>
+      </p:sp>
+      <p:sp>
+        <p:nvSpPr>
+          <p:cNvPr id="8" name="imgph" descr="IMGQ:blue gas flame on burner"/>
           <p:cNvSpPr/>
           <p:nvPr/>
         </p:nvSpPr>
@@ -10121,7 +11938,7 @@
                 </a:solidFill>
                 <a:latin typeface="Montserrat"/>
               </a:rPr>
-              <a:t>gas water heater bathroom wall</a:t>
+              <a:t>blue gas flame on burner</a:t>
             </a:r>
           </a:p>
         </p:txBody>
@@ -10218,7 +12035,7 @@
                 </a:solidFill>
                 <a:latin typeface="Montserrat"/>
               </a:rPr>
-              <a:t>008 / 016</a:t>
+              <a:t>008 / 020</a:t>
             </a:r>
           </a:p>
         </p:txBody>
@@ -10252,7 +12069,7 @@
                 </a:solidFill>
                 <a:latin typeface="Montserrat"/>
               </a:rPr>
-              <a:t>Curso Gas B · Tema 04 · ITC-ICG 07 · Mantenimiento e inspecciones</a:t>
+              <a:t>Curso Gas B · Tema 04 · ITC-ICG 07 · Mantenimiento, inspecciones y revisiones</a:t>
             </a:r>
           </a:p>
         </p:txBody>
@@ -10286,7 +12103,7 @@
                 </a:solidFill>
                 <a:latin typeface="Montserrat"/>
               </a:rPr>
-              <a:t>APARTADO 4.1.1 · PROCEDIMIENTO</a:t>
+              <a:t>APARTADO 4.1 · CRITERIOS</a:t>
             </a:r>
           </a:p>
         </p:txBody>
@@ -10320,7 +12137,7 @@
                 </a:solidFill>
                 <a:latin typeface="Montserrat"/>
               </a:rPr>
-              <a:t>Avisos y quién puede inspeccionar</a:t>
+              <a:t>La excepción peligrosa</a:t>
             </a:r>
           </a:p>
         </p:txBody>
@@ -10368,7 +12185,7 @@
                 </a:solidFill>
                 <a:latin typeface="Montserrat"/>
               </a:rPr>
-              <a:t>Distribuidor avisa con 3 meses</a:t>
+              <a:t>Criterios: versión de cuando se montó</a:t>
             </a:r>
           </a:p>
           <a:p>
@@ -10393,7 +12210,7 @@
                 </a:solidFill>
                 <a:latin typeface="Montserrat"/>
               </a:rPr>
-              <a:t>Distribuidor visita: aviso mínimo 5 días</a:t>
+              <a:t>Salvo tipo A o B en dormitorio o baño</a:t>
             </a:r>
           </a:p>
           <a:p>
@@ -10418,7 +12235,7 @@
                 </a:solidFill>
                 <a:latin typeface="Montserrat"/>
               </a:rPr>
-              <a:t>Individuales: instalador A, B o C</a:t>
+              <a:t>y falta de detección y corte de gas</a:t>
             </a:r>
           </a:p>
           <a:p>
@@ -10443,14 +12260,14 @@
                 </a:solidFill>
                 <a:latin typeface="Montserrat"/>
               </a:rPr>
-              <a:t>Comunes: solo A o B</a:t>
-            </a:r>
-          </a:p>
-        </p:txBody>
-      </p:sp>
-      <p:sp>
-        <p:nvSpPr>
-          <p:cNvPr id="8" name="imgph" descr="IMGQ:technician calendar phone appointment"/>
+              <a:t>Esos casos: norma de hoy</a:t>
+            </a:r>
+          </a:p>
+        </p:txBody>
+      </p:sp>
+      <p:sp>
+        <p:nvSpPr>
+          <p:cNvPr id="8" name="imgph" descr="IMGQ:gas water heater installed in bathroom"/>
           <p:cNvSpPr/>
           <p:nvPr/>
         </p:nvSpPr>
@@ -10536,7 +12353,7 @@
                 </a:solidFill>
                 <a:latin typeface="Montserrat"/>
               </a:rPr>
-              <a:t>technician calendar phone appointment</a:t>
+              <a:t>gas water heater installed in bathroom</a:t>
             </a:r>
           </a:p>
         </p:txBody>
@@ -10633,7 +12450,7 @@
                 </a:solidFill>
                 <a:latin typeface="Montserrat"/>
               </a:rPr>
-              <a:t>009 / 016</a:t>
+              <a:t>009 / 020</a:t>
             </a:r>
           </a:p>
         </p:txBody>
@@ -10667,7 +12484,7 @@
                 </a:solidFill>
                 <a:latin typeface="Montserrat"/>
               </a:rPr>
-              <a:t>Curso Gas B · Tema 04 · ITC-ICG 07 · Mantenimiento e inspecciones</a:t>
+              <a:t>Curso Gas B · Tema 04 · ITC-ICG 07 · Mantenimiento, inspecciones y revisiones</a:t>
             </a:r>
           </a:p>
         </p:txBody>
@@ -10701,7 +12518,7 @@
                 </a:solidFill>
                 <a:latin typeface="Montserrat"/>
               </a:rPr>
-              <a:t>APARTADO 4.1.1 · IMPARCIALIDAD</a:t>
+              <a:t>APARTADO 4.1.1 · PROCEDIMIENTO</a:t>
             </a:r>
           </a:p>
         </p:txBody>
@@ -10735,7 +12552,7 @@
                 </a:solidFill>
                 <a:latin typeface="Montserrat"/>
               </a:rPr>
-              <a:t>El que inspecciona no repara</a:t>
+              <a:t>Aviso y quién inspecciona</a:t>
             </a:r>
           </a:p>
         </p:txBody>
@@ -10783,7 +12600,7 @@
                 </a:solidFill>
                 <a:latin typeface="Montserrat"/>
               </a:rPr>
-              <a:t>Favorable → certificado de inspección</a:t>
+              <a:t>El distribuidor avisa con 3 meses</a:t>
             </a:r>
           </a:p>
           <a:p>
@@ -10808,7 +12625,7 @@
                 </a:solidFill>
                 <a:latin typeface="Montserrat"/>
               </a:rPr>
-              <a:t>Copia al titular, a la distribuidora y a ti</a:t>
+              <a:t>Individuales: instaladores A, B o C</a:t>
             </a:r>
           </a:p>
           <a:p>
@@ -10833,39 +12650,14 @@
                 </a:solidFill>
                 <a:latin typeface="Montserrat"/>
               </a:rPr>
-              <a:t>Anomalías → informe con plazo</a:t>
-            </a:r>
-          </a:p>
-          <a:p>
-            <a:pPr>
-              <a:spcAft>
-                <a:spcPts val="1000"/>
-              </a:spcAft>
-            </a:pPr>
-            <a:r>
-              <a:rPr sz="1600" b="1" i="0">
-                <a:solidFill>
-                  <a:srgbClr val="2E3A80"/>
-                </a:solidFill>
-                <a:latin typeface="Montserrat"/>
-              </a:rPr>
-              <a:t>•  </a:t>
-            </a:r>
-            <a:r>
-              <a:rPr sz="1600" b="0" i="0">
-                <a:solidFill>
-                  <a:srgbClr val="1B2330"/>
-                </a:solidFill>
-                <a:latin typeface="Montserrat"/>
-              </a:rPr>
-              <a:t>No la repara quien la inspeccionó</a:t>
-            </a:r>
-          </a:p>
-        </p:txBody>
-      </p:sp>
-      <p:sp>
-        <p:nvSpPr>
-          <p:cNvPr id="8" name="imgph" descr="IMGQ:inspector writing report clipboard"/>
+              <a:t>Comunes: solo A o B</a:t>
+            </a:r>
+          </a:p>
+        </p:txBody>
+      </p:sp>
+      <p:sp>
+        <p:nvSpPr>
+          <p:cNvPr id="8" name="imgph" descr="IMGQ:gas installer showing professional ID card"/>
           <p:cNvSpPr/>
           <p:nvPr/>
         </p:nvSpPr>
@@ -10951,7 +12743,7 @@
                 </a:solidFill>
                 <a:latin typeface="Montserrat"/>
               </a:rPr>
-              <a:t>inspector writing report clipboard</a:t>
+              <a:t>gas installer showing professional ID card</a:t>
             </a:r>
           </a:p>
         </p:txBody>

--- a/Curso Gas B/04 - ITC-ICG 07 - Instalaciones receptoras de combustibles gaseosos/04 - ITC-ICG 07 - Instalaciones receptoras de combustibles gaseosos - Vídeo 3.pptx
+++ b/Curso Gas B/04 - ITC-ICG 07 - Instalaciones receptoras de combustibles gaseosos/04 - ITC-ICG 07 - Instalaciones receptoras de combustibles gaseosos - Vídeo 3.pptx
@@ -25,6 +25,7 @@
     <p:sldId id="273" r:id="rId25"/>
     <p:sldId id="274" r:id="rId26"/>
     <p:sldId id="275" r:id="rId27"/>
+    <p:sldId id="276" r:id="rId28"/>
   </p:sldIdLst>
   <p:sldSz cx="12191695" cy="6858000" type="screen4x3"/>
   <p:notesSz cx="6858000" cy="9144000"/>
@@ -596,12 +597,12 @@
           <a:lstStyle/>
           <a:p>
             <a:r>
-              <a:t>N1: Hay muchos plazos, ¿cómo no me hago un lío?</a:t>
-            </a:r>
-          </a:p>
-          <a:p>
-            <a:r>
-              <a:t>N2: Te los pongo todos juntos, en orden, y verás que se recuerdan como una frasecita. Tres meses: es la antelación con que el distribuidor avisa de la obligación de inspección. Cinco días: la antelación mínima con que el distribuidor comunica la fecha de la visita cuando la hace él. Quince días hábiles: el plazo para corregir una anomalía secundaria por falta de estanquidad. Diez años: lo que el distribuidor guarda en su base de datos la fecha y el resultado de las inspecciones, consultable por la comunidad autónoma. Y por encima de todo, cinco años, la periodicidad. Truco para memorizar: avisa con tres meses, se planta con cinco días, arreglas en quince días hábiles y guarda diez años.</a:t>
+              <a:t>N1: ¿Cómo arranca el proceso de la inspección y quién puede hacerla?</a:t>
+            </a:r>
+          </a:p>
+          <a:p>
+            <a:r>
+              <a:t>N2: El distribuidor tiene que avisar al usuario, con tres meses de antelación, de que le toca la inspección obligatoria; y la puede hacer una empresa instaladora habilitada o el propio distribuidor. Ahora, quién está autorizado a inspeccionar depende del tipo de instalación. Para las instalaciones individuales valen los instaladores de categoría a, be o ce. Para las comunes, solo a o be; la ce no llega a las comunes. Fíjate en lo que esto significa para ti: como sacas la be, vas a poder inspeccionar tanto individuales como comunes. La ce se queda solo en individuales. Átalo así: en comunes, a o be; la ce, fuera de comunes.</a:t>
             </a:r>
           </a:p>
         </p:txBody>
@@ -671,12 +672,12 @@
           <a:lstStyle/>
           <a:p>
             <a:r>
-              <a:t>N1: Si encuentro una anomalía en la inspección, ¿la arreglo yo mismo?</a:t>
-            </a:r>
-          </a:p>
-          <a:p>
-            <a:r>
-              <a:t>N2: No, y esta es una regla de oro que se pregunta mucho: la misma empresa, o el mismo instalador, que hace la inspección no puede reparar las anomalías que ha detectado. Cuando aparecen anomalías, se remite a la distribuidora un informe de anomalías, con su plazo máximo de corrección, y se entrega copia al titular; pero la reparación la tiene que hacer otro. ¿Por qué? Para evitar el conflicto de interés. Es como que el profesor que te pone el examen no debería ser también quien te cobra las clases particulares para aprobarlo: se prestaría a inflar defectos para luego cobrarte el arreglo. Separando quien inspecciona de quien repara, el sistema es más honesto.</a:t>
+              <a:t>N1: Hay muchos plazos, ¿cómo no me hago un lío?</a:t>
+            </a:r>
+          </a:p>
+          <a:p>
+            <a:r>
+              <a:t>N2: Te los pongo todos juntos, en orden, y verás que se recuerdan como una frasecita. Tres meses: es la antelación con que el distribuidor avisa de la obligación de inspección. Cinco días: la antelación mínima con que el distribuidor comunica la fecha de la visita cuando la hace él. Quince días hábiles: el plazo para corregir una anomalía secundaria por falta de estanquidad. Diez años: lo que el distribuidor guarda en su base de datos la fecha y el resultado de las inspecciones, consultable por la comunidad autónoma. Y por encima de todo, cinco años, la periodicidad. Truco para memorizar: avisa con tres meses, se planta con cinco días, arreglas en quince días hábiles y guarda diez años.</a:t>
             </a:r>
           </a:p>
         </p:txBody>
@@ -746,12 +747,12 @@
           <a:lstStyle/>
           <a:p>
             <a:r>
-              <a:t>N1: ¿Qué diferencia hay entre una anomalía principal y una secundaria?</a:t>
-            </a:r>
-          </a:p>
-          <a:p>
-            <a:r>
-              <a:t>N2: Es cuestión de gravedad. Una anomalía principal es grave: si no se puede corregir en el momento, se interrumpe el suministro y se precinta la parte de la instalación o el aparato afectado. Y grábate esto: todas las fugas se consideran anomalía principal, sin excepción. Una anomalía secundaria es menos grave: en lugar de cortar, se da un plazo para arreglarla, por ejemplo quince días hábiles si es una falta de estanquidad secundaria. Para volver a dar gas después de resolver una principal, la empresa instaladora emite un certificado de subsanación y hace el desprecintado. Asócialo: principal, precinto y corte; secundaria, plazo. Y la reina de las principales, siempre, la fuga.</a:t>
+              <a:t>N1: Si encuentro una anomalía en la inspección, ¿la arreglo yo mismo?</a:t>
+            </a:r>
+          </a:p>
+          <a:p>
+            <a:r>
+              <a:t>N2: No, y esta es una regla de oro que se pregunta mucho: la misma empresa, o el mismo instalador, que hace la inspección no puede reparar las anomalías que ha detectado. Cuando aparecen anomalías, se remite a la distribuidora un informe de anomalías, con su plazo máximo de corrección, y se entrega copia al titular; pero la reparación la tiene que hacer otro. ¿Por qué? Para evitar el conflicto de interés. Es como que el profesor que te pone el examen no debería ser también quien te cobra las clases particulares para aprobarlo: se prestaría a inflar defectos para luego cobrarte el arreglo. Separando quien inspecciona de quien repara, el sistema es más honesto.</a:t>
             </a:r>
           </a:p>
         </p:txBody>
@@ -821,12 +822,12 @@
           <a:lstStyle/>
           <a:p>
             <a:r>
-              <a:t>N1: Y la revisión, ¿en qué se diferencia en la práctica?</a:t>
-            </a:r>
-          </a:p>
-          <a:p>
-            <a:r>
-              <a:t>N2: La revisión es para las instalaciones que no están conectadas a una red de distribución: las que van con un depósito propio de gases del petróleo o con bombonas. Aquí no hay distribuidor por detrás, así que es el titular, o en su defecto el usuario, quien tiene que encargar la revisión a una empresa instaladora de gas, según la ITC-ICG cero nueve. Se hace cada cinco años, igual que la inspección, y comprueba prácticamente lo mismo. Dos diferencias que caen en examen: la revisión se hace coincidir con la revisión del depósito o los envases que alimentan la instalación, para hacerlo todo de una vez, y añade una comprobación extra que vemos ahora, la protección catódica.</a:t>
+              <a:t>N1: ¿Qué diferencia hay entre una anomalía principal y una secundaria?</a:t>
+            </a:r>
+          </a:p>
+          <a:p>
+            <a:r>
+              <a:t>N2: Es cuestión de gravedad. Una anomalía principal es grave: si no se puede corregir en el momento, se interrumpe el suministro y se precinta la parte de la instalación o el aparato afectado. Y grábate esto: todas las fugas se consideran anomalía principal, sin excepción. Una anomalía secundaria es menos grave: en lugar de cortar, se da un plazo para arreglarla, por ejemplo quince días hábiles si es una falta de estanquidad secundaria. Para volver a dar gas después de resolver una principal, la empresa instaladora emite un certificado de subsanación y hace el desprecintado. Asócialo: principal, precinto y corte; secundaria, plazo. Y la reina de las principales, siempre, la fuga.</a:t>
             </a:r>
           </a:p>
         </p:txBody>
@@ -896,12 +897,12 @@
           <a:lstStyle/>
           <a:p>
             <a:r>
-              <a:t>N1: ¿Qué es la protección catódica y por qué solo sale en la revisión?</a:t>
-            </a:r>
-          </a:p>
-          <a:p>
-            <a:r>
-              <a:t>N2: La protección catódica es un sistema que evita que una tubería de acero enterrada se oxide y se corroa. Dicho en fácil, se le aplica una pequeña corriente eléctrica que engaña al metal para que no se lo coma la corrosión del terreno. Se comprueba solo en la revisión porque las instalaciones sin red, las de depósito propio, suelen llevar tramos de acero enterrado hasta el depósito, y esos son los que corren riesgo de corroerse bajo tierra. Regla práctica: si en una pregunta ves protección catódica, piensa automáticamente en revisión y en tubería de acero enterrada. En la inspección de las de red no aparece este punto.</a:t>
+              <a:t>N1: Y la revisión, ¿en qué se diferencia en la práctica?</a:t>
+            </a:r>
+          </a:p>
+          <a:p>
+            <a:r>
+              <a:t>N2: La revisión es para las instalaciones que no están conectadas a una red de distribución: las que van con un depósito propio de gases del petróleo o con bombonas. Aquí no hay distribuidor por detrás, así que es el titular, o en su defecto el usuario, quien tiene que encargar la revisión a una empresa instaladora de gas, según la ITC-ICG cero nueve. Se hace cada cinco años, igual que la inspección, y comprueba prácticamente lo mismo. Dos diferencias que caen en examen: la revisión se hace coincidir con la revisión del depósito o los envases que alimentan la instalación, para hacerlo todo de una vez, y añade una comprobación extra que vemos ahora, la protección catódica.</a:t>
             </a:r>
           </a:p>
         </p:txBody>
@@ -971,12 +972,12 @@
           <a:lstStyle/>
           <a:p>
             <a:r>
-              <a:t>N1: ¿Qué papel se firma cuando la revisión sale bien?</a:t>
-            </a:r>
-          </a:p>
-          <a:p>
-            <a:r>
-              <a:t>N2: Cuando la visita es favorable, se entrega al usuario un certificado de revisión periódica, y hay dos modelos según el tramo. El uno erre ge guion cuatro es el de la revisión periódica de instalaciones individuales y aparatos no alimentados desde red. El uno erre ge guion cinco es el de la revisión de la instalación común, también sin red. Los dos certifican que no hay anomalías principales ni secundarias, y su validez es de cinco años, que es justo lo que tarda en tocar la siguiente. Fíjate en el matiz importante: estos dos, el cuatro y el cinco, son de revisión, o sea de instalaciones de depósito propio; no los confundas con la inspección de las de red, que no lleva número erre ge.</a:t>
+              <a:t>N1: ¿Qué es la protección catódica y por qué solo sale en la revisión?</a:t>
+            </a:r>
+          </a:p>
+          <a:p>
+            <a:r>
+              <a:t>N2: La protección catódica es un sistema que evita que una tubería de acero enterrada se oxide y se corroa. Dicho en fácil, se le aplica una pequeña corriente eléctrica que engaña al metal para que no se lo coma la corrosión del terreno. Se comprueba solo en la revisión porque las instalaciones sin red, las de depósito propio, suelen llevar tramos de acero enterrado hasta el depósito, y esos son los que corren riesgo de corroerse bajo tierra. Regla práctica: si en una pregunta ves protección catódica, piensa automáticamente en revisión y en tubería de acero enterrada. En la inspección de las de red no aparece este punto.</a:t>
             </a:r>
           </a:p>
         </p:txBody>
@@ -1046,12 +1047,12 @@
           <a:lstStyle/>
           <a:p>
             <a:r>
-              <a:t>N1: ¿Cuándo se considera oficialmente que he modificado una instalación?</a:t>
-            </a:r>
-          </a:p>
-          <a:p>
-            <a:r>
-              <a:t>N2: Hay tres casos, y el primero lleva un número que conviene memorizar. Uno: cuando cambias el material o el trazado en una longitud superior a un metro. Cambiar medio metro de tubo no cuenta; pasar de un metro, sí. Dos: cualquier ampliación de consumo. Y tres: sustituir un aparato por otro de características técnicas diferentes; cambiar una caldera por otra idéntica no dispara nada, pero por una distinta sí. Cuando ocurre cualquiera de estos, hay modificación oficial, y eso obliga a comunicarlo al suministrador. Retén la frase: más de un metro de material o trazado, es modificación.</a:t>
+              <a:t>N1: ¿Qué papel se firma cuando la revisión sale bien?</a:t>
+            </a:r>
+          </a:p>
+          <a:p>
+            <a:r>
+              <a:t>N2: Cuando la visita es favorable, se entrega al usuario un certificado de revisión periódica, y hay dos modelos según el tramo. El uno erre ge guion cuatro es el de la revisión periódica de instalaciones individuales y aparatos no alimentados desde red. El uno erre ge guion cinco es el de la revisión de la instalación común, también sin red. Los dos certifican que no hay anomalías principales ni secundarias, y su validez es de cinco años, que es justo lo que tarda en tocar la siguiente. Fíjate en el matiz importante: estos dos, el cuatro y el cinco, son de revisión, o sea de instalaciones de depósito propio; no los confundas con la inspección de las de red, que no lleva número erre ge.</a:t>
             </a:r>
           </a:p>
         </p:txBody>
@@ -1121,12 +1122,12 @@
           <a:lstStyle/>
           <a:p>
             <a:r>
-              <a:t>N1: Y cuando hay modificación, ¿quién avisa a quién?</a:t>
-            </a:r>
-          </a:p>
-          <a:p>
-            <a:r>
-              <a:t>N2: Es una cadena con cuatro eslabones, encádenala en orden. Primero, la empresa instaladora que ha hecho la modificación lo comunica al suministrador; el que modifica es quien avisa, no el usuario. Segundo, el suministrador solicita el enganche al distribuidor. Tercero, el distribuidor realiza las pruebas previas que marca el reglamento, para asegurarse de que la modificación quedó bien. Y cuarto, el coste de los derechos de enganche lo paga el usuario final. La frase para recordarlo: la instaladora comunica, el suministrador pide enganche, el distribuidor prueba y el usuario paga. Cada uno en su sitio.</a:t>
+              <a:t>N1: ¿Cuándo se considera oficialmente que he modificado una instalación?</a:t>
+            </a:r>
+          </a:p>
+          <a:p>
+            <a:r>
+              <a:t>N2: Hay tres casos, y el primero lleva un número que conviene memorizar. Uno: cuando cambias el material o el trazado en una longitud superior a un metro. Cambiar medio metro de tubo no cuenta; pasar de un metro, sí. Dos: cualquier ampliación de consumo. Y tres: sustituir un aparato por otro de características técnicas diferentes; cambiar una caldera por otra idéntica no dispara nada, pero por una distinta sí. Cuando ocurre cualquiera de estos, hay modificación oficial, y eso obliga a comunicarlo al suministrador. Retén la frase: más de un metro de material o trazado, es modificación.</a:t>
             </a:r>
           </a:p>
         </p:txBody>
@@ -1196,12 +1197,12 @@
           <a:lstStyle/>
           <a:p>
             <a:r>
-              <a:t>N1: ¿Cómo me aprendo los cinco modelos sin volverme loco?</a:t>
-            </a:r>
-          </a:p>
-          <a:p>
-            <a:r>
-              <a:t>N2: No los memorices a lo bruto; míralos por parejas con una lógica. Los tres primeros, del uno erre ge uno al tres, son certificados de instalación, del montaje: el uno es la acometida interior, el dos la instalación común y el tres la individual. Los dos últimos, el cuatro y el cinco, son certificados de revisión periódica de instalaciones no alimentadas desde red, es decir, de depósito propio: el cuatro para individuales y el cinco para comunes. Fíjate en un detalle que se pregunta: los certificados de inspección de las instalaciones de red no tienen número erre ge; de esos, el anexo solo fija la información mínima. O sea, con número erre ge están el montaje y la revisión sin red; la inspección de red va sin número.</a:t>
+              <a:t>N1: Y cuando hay modificación, ¿quién avisa a quién?</a:t>
+            </a:r>
+          </a:p>
+          <a:p>
+            <a:r>
+              <a:t>N2: Es una cadena con cuatro eslabones, encádenala en orden. Primero, la empresa instaladora que ha hecho la modificación lo comunica al suministrador; el que modifica es quien avisa, no el usuario. Segundo, el suministrador solicita el enganche al distribuidor. Tercero, el distribuidor realiza las pruebas previas que marca el reglamento, para asegurarse de que la modificación quedó bien. Y cuarto, el coste de los derechos de enganche lo paga el usuario final. La frase para recordarlo: la instaladora comunica, el suministrador pide enganche, el distribuidor prueba y el usuario paga. Cada uno en su sitio.</a:t>
             </a:r>
           </a:p>
         </p:txBody>
@@ -1271,12 +1272,12 @@
           <a:lstStyle/>
           <a:p>
             <a:r>
-              <a:t>N1: ¿Por qué unos impresos piden un código y otros un número de póliza?</a:t>
-            </a:r>
-          </a:p>
-          <a:p>
-            <a:r>
-              <a:t>N2: Porque el gas se identifica de forma distinta según el tipo. Para el gas natural, la instalación se identifica con el código del punto de suministro, ese código largo que en las facturas verás como cups. Para los gases del petróleo, el ge ele pe, se identifica con el número de póliza. Este par se repite en todos los impresos, así que si te lo aprendes, resuelves varias preguntas de golpe: gas natural igual a punto de suministro; ge ele pe igual a número de póliza. Y de ahí sale un detalle coherente: los impresos de revisión, los del ge ele pe de depósito, solo piden número de póliza, porque esas instalaciones no tienen punto de suministro de red. Ah, y el certificado de puesta en servicio es el único que pide datos del contador, número de serie y lectura inicial, porque es el momento en que el contador arranca a cero.</a:t>
+              <a:t>N1: ¿Cómo me aprendo los cinco modelos sin volverme loco?</a:t>
+            </a:r>
+          </a:p>
+          <a:p>
+            <a:r>
+              <a:t>N2: No los memorices a lo bruto; míralos por parejas con una lógica. Los tres primeros, del uno erre ge uno al tres, son certificados de instalación, del montaje: el uno es la acometida interior, el dos la instalación común y el tres la individual. Los dos últimos, el cuatro y el cinco, son certificados de revisión periódica de instalaciones no alimentadas desde red, es decir, de depósito propio: el cuatro para individuales y el cinco para comunes. Fíjate en un detalle que se pregunta: los certificados de inspección de las instalaciones de red no tienen número erre ge; de esos, el anexo solo fija la información mínima. O sea, con número erre ge están el montaje y la revisión sin red; la inspección de red va sin número.</a:t>
             </a:r>
           </a:p>
         </p:txBody>
@@ -1421,6 +1422,81 @@
           <a:lstStyle/>
           <a:p>
             <a:r>
+              <a:t>N1: ¿Por qué unos impresos piden un código y otros un número de póliza?</a:t>
+            </a:r>
+          </a:p>
+          <a:p>
+            <a:r>
+              <a:t>N2: Porque el gas se identifica de forma distinta según el tipo. Para el gas natural, la instalación se identifica con el código del punto de suministro, ese código largo que en las facturas verás como cups. Para los gases del petróleo, el ge ele pe, se identifica con el número de póliza. Este par se repite en todos los impresos, así que si te lo aprendes, resuelves varias preguntas de golpe: gas natural igual a punto de suministro; ge ele pe igual a número de póliza. Y de ahí sale un detalle coherente: los impresos de revisión, los del ge ele pe de depósito, solo piden número de póliza, porque esas instalaciones no tienen punto de suministro de red. Ah, y el certificado de puesta en servicio es el único que pide datos del contador, número de serie y lectura inicial, porque es el momento en que el contador arranca a cero.</a:t>
+            </a:r>
+          </a:p>
+        </p:txBody>
+      </p:sp>
+      <p:sp>
+        <p:nvSpPr>
+          <p:cNvPr id="4" name="Slide Number Placeholder 3"/>
+          <p:cNvSpPr>
+            <a:spLocks noGrp="1"/>
+          </p:cNvSpPr>
+          <p:nvPr>
+            <p:ph type="sldNum" idx="5" sz="quarter"/>
+          </p:nvPr>
+        </p:nvSpPr>
+        <p:spPr/>
+      </p:sp>
+    </p:spTree>
+  </p:cSld>
+  <p:clrMapOvr>
+    <a:masterClrMapping/>
+  </p:clrMapOvr>
+</p:notes>
+</file>
+
+<file path=ppt/notesSlides/notesSlide21.xml><?xml version="1.0" encoding="utf-8"?>
+<p:notes xmlns:a="http://schemas.openxmlformats.org/drawingml/2006/main" xmlns:p="http://schemas.openxmlformats.org/presentationml/2006/main" xmlns:r="http://schemas.openxmlformats.org/officeDocument/2006/relationships">
+  <p:cSld>
+    <p:spTree>
+      <p:nvGrpSpPr>
+        <p:cNvPr id="1" name=""/>
+        <p:cNvGrpSpPr/>
+        <p:nvPr/>
+      </p:nvGrpSpPr>
+      <p:grpSpPr>
+        <a:xfrm>
+          <a:off x="0" y="0"/>
+          <a:ext cx="0" cy="0"/>
+          <a:chOff x="0" y="0"/>
+          <a:chExt cx="0" cy="0"/>
+        </a:xfrm>
+      </p:grpSpPr>
+      <p:sp>
+        <p:nvSpPr>
+          <p:cNvPr id="2" name="Slide Image Placeholder 1"/>
+          <p:cNvSpPr>
+            <a:spLocks noGrp="1"/>
+          </p:cNvSpPr>
+          <p:nvPr>
+            <p:ph type="sldImg" idx="2"/>
+          </p:nvPr>
+        </p:nvSpPr>
+        <p:spPr/>
+      </p:sp>
+      <p:sp>
+        <p:nvSpPr>
+          <p:cNvPr id="3" name="Notes Placeholder 2"/>
+          <p:cNvSpPr>
+            <a:spLocks noGrp="1"/>
+          </p:cNvSpPr>
+          <p:nvPr>
+            <p:ph type="body" idx="3" sz="quarter"/>
+          </p:nvPr>
+        </p:nvSpPr>
+        <p:spPr/>
+        <p:txBody>
+          <a:bodyPr/>
+          <a:lstStyle/>
+          <a:p>
+            <a:r>
               <a:t>N1: Último vídeo del tema. ¿Cómo lo cierro todo en la cabeza?</a:t>
             </a:r>
           </a:p>
@@ -1504,16 +1580,7 @@
         <p:txBody>
           <a:bodyPr/>
           <a:lstStyle/>
-          <a:p>
-            <a:r>
-              <a:t>N1: Una vez montada, ¿de quién es la responsabilidad de que siga bien?</a:t>
-            </a:r>
-          </a:p>
-          <a:p>
-            <a:r>
-              <a:t>N2: Del dueño. Igual que en el articulado del reglamento, el responsable del mantenimiento, la conservación y el buen uso de la instalación es el titular; y si no hay titular claro, los usuarios. Ellos tienen que mantenerla permanentemente en servicio con el nivel de seguridad adecuado y atender las recomendaciones que les dé el suministrador. El instalador y la compañía ayudan y avisan, pero el que responde año tras año es el propietario. Ahora bien, ojo a una cosa: cualquier modificación de la instalación la tiene que hacer siempre un instalador, nunca el usuario por su cuenta, y ese instalador emite un certificado que se queda el usuario. Tocar el gas no es cosa de aficionados.</a:t>
-            </a:r>
-          </a:p>
+          <a:p/>
         </p:txBody>
       </p:sp>
       <p:sp>
@@ -1581,12 +1648,12 @@
           <a:lstStyle/>
           <a:p>
             <a:r>
-              <a:t>N1: Oigo inspección y revisión y me lío. ¿Cómo las distingo?</a:t>
-            </a:r>
-          </a:p>
-          <a:p>
-            <a:r>
-              <a:t>N2: Con una sola pregunta, y este es el punto clave del tema: ¿la instalación está conectada a la red de distribución de una compañía? Si la respuesta es sí, gas natural de ciudad o gases del petróleo de red, entonces es una inspección, el apartado cuatro punto uno. Si la respuesta es no, por ejemplo un depósito propio en un chalé o unas bombonas, entonces es una revisión, el apartado cuatro punto dos. Las dos se hacen cada cinco años y comprueban casi lo mismo: estanquidad, conservación, combustión, ventilación, evacuación de humos. Las diferencias que caen las vemos luego, pero quédate con la pregunta madre: ¿hay red o no hay red? De ahí sale todo.</a:t>
+              <a:t>N1: Una vez montada, ¿de quién es la responsabilidad de que siga bien?</a:t>
+            </a:r>
+          </a:p>
+          <a:p>
+            <a:r>
+              <a:t>N2: Del dueño. Igual que en el articulado del reglamento, el responsable del mantenimiento, la conservación y el buen uso de la instalación es el titular; y si no hay titular claro, los usuarios. Ellos tienen que mantenerla permanentemente en servicio con el nivel de seguridad adecuado y atender las recomendaciones que les dé el suministrador. El instalador y la compañía ayudan y avisan, pero el que responde año tras año es el propietario. Ahora bien, ojo a una cosa: cualquier modificación de la instalación la tiene que hacer siempre un instalador, nunca el usuario por su cuenta, y ese instalador emite un certificado que se queda el usuario. Tocar el gas no es cosa de aficionados.</a:t>
             </a:r>
           </a:p>
         </p:txBody>
@@ -1656,12 +1723,12 @@
           <a:lstStyle/>
           <a:p>
             <a:r>
-              <a:t>N1: ¿Cada cuánto se inspecciona una instalación conectada a la red?</a:t>
-            </a:r>
-          </a:p>
-          <a:p>
-            <a:r>
-              <a:t>N2: Cada cinco años, es una inspección quinquenal. Se cuenta desde la fecha de puesta en servicio o desde la última inspección, y hay que hacerla dentro del año natural en que vence ese plazo, no vale retrasarla sin más. La hacen las empresas instaladoras de gas habilitadas o los distribuidores, y le repercuten el coste al usuario; si la hace el distribuidor, no puede cobrar más que los costes regulados. Y un dato: la parte común del edificio, el montante compartido, también se inspecciona cada cinco años. Si te preguntan la periodicidad de la inspección periódica, la respuesta es cinco años, sin dudarlo.</a:t>
+              <a:t>N1: Oigo inspección y revisión y me lío. ¿Cómo las distingo?</a:t>
+            </a:r>
+          </a:p>
+          <a:p>
+            <a:r>
+              <a:t>N2: Con una sola pregunta, y este es el punto clave del tema: ¿la instalación está conectada a la red de distribución de una compañía? Si la respuesta es sí, gas natural de ciudad o gases del petróleo de red, entonces es una inspección, el apartado cuatro punto uno. Si la respuesta es no, por ejemplo un depósito propio en un chalé o unas bombonas, entonces es una revisión, el apartado cuatro punto dos. Las dos se hacen cada cinco años y comprueban casi lo mismo: estanquidad, conservación, combustión, ventilación, evacuación de humos. Las diferencias que caen las vemos luego, pero quédate con la pregunta madre: ¿hay red o no hay red? De ahí sale todo.</a:t>
             </a:r>
           </a:p>
         </p:txBody>
@@ -1731,12 +1798,12 @@
           <a:lstStyle/>
           <a:p>
             <a:r>
-              <a:t>N1: ¿La inspección incluye el aparato o solo las tuberías?</a:t>
-            </a:r>
-          </a:p>
-          <a:p>
-            <a:r>
-              <a:t>N2: Depende de la potencia, y este es el detalle que más se pregunta. En instalaciones de hasta setenta kilovatios, la inspección va desde la llave de usuario hasta los aparatos de gas, incluidos; es decir, el aparato sí entra. En instalaciones centralizadas de calefacción o de más de setenta kilovatios, va desde la llave de edificio hasta la conexión de los aparatos, pero excluidos; el aparato ya no entra. Y en instalaciones de más de cinco bar, desde la llave de acometida, aparatos también excluidos. La regla para no fallar: cuanto más grande es la instalación, más atrás empieza la inspección, de usuario a edificio a acometida, y el aparato se queda fuera. En las pequeñas domésticas, el aparato sí se mira.</a:t>
+              <a:t>N1: ¿Cada cuánto se inspecciona una instalación conectada a la red?</a:t>
+            </a:r>
+          </a:p>
+          <a:p>
+            <a:r>
+              <a:t>N2: Cada cinco años, es una inspección quinquenal. Se cuenta desde la fecha de puesta en servicio o desde la última inspección, y hay que hacerla dentro del año natural en que vence ese plazo, no vale retrasarla sin más. La hacen las empresas instaladoras de gas habilitadas o los distribuidores, y le repercuten el coste al usuario; si la hace el distribuidor, no puede cobrar más que los costes regulados. Y un dato: la parte común del edificio, el montante compartido, también se inspecciona cada cinco años. Si te preguntan la periodicidad de la inspección periódica, la respuesta es cinco años, sin dudarlo.</a:t>
             </a:r>
           </a:p>
         </p:txBody>
@@ -1806,12 +1873,12 @@
           <a:lstStyle/>
           <a:p>
             <a:r>
-              <a:t>N1: ¿Y qué comprueban exactamente durante la inspección?</a:t>
-            </a:r>
-          </a:p>
-          <a:p>
-            <a:r>
-              <a:t>N2: Piénsalo como un recorrido de seguridad, de arriba abajo. Primero la estanquidad: ¿hay alguna fuga? Luego la conservación: ¿está la instalación en buen estado, sin corrosión ni golpes? Después la combustión higiénica de los aparatos: ¿queman limpio, sin exceso de monóxido? Los requisitos de ventilación y el volumen mínimo del local: ¿entra aire suficiente y el cuarto es lo bastante grande? Los sistemas de detección de gas, cuando sustituyen a la ventilación rápida. Y por último la correcta evacuación de los productos de la combustión: ¿salen bien los humos? Los procedimientos son la UNE sesenta mil seiscientos setenta guion doce y guion trece en baja presión, o la sesenta mil seiscientos veinte guion seis en alta.</a:t>
+              <a:t>N1: ¿La inspección incluye el aparato o solo las tuberías?</a:t>
+            </a:r>
+          </a:p>
+          <a:p>
+            <a:r>
+              <a:t>N2: Depende de la potencia, y este es el detalle que más se pregunta. En instalaciones de hasta setenta kilovatios, la inspección va desde la llave de usuario hasta los aparatos de gas, incluidos; es decir, el aparato sí entra. En instalaciones centralizadas de calefacción o de más de setenta kilovatios, va desde la llave de edificio hasta la conexión de los aparatos, pero excluidos; el aparato ya no entra. Y en instalaciones de más de cinco bar, desde la llave de acometida, aparatos también excluidos. La regla para no fallar: cuanto más grande es la instalación, más atrás empieza la inspección, de usuario a edificio a acometida, y el aparato se queda fuera. En las pequeñas domésticas, el aparato sí se mira.</a:t>
             </a:r>
           </a:p>
         </p:txBody>
@@ -1881,12 +1948,12 @@
           <a:lstStyle/>
           <a:p>
             <a:r>
-              <a:t>N1: ¿Con qué versión de la norma se juzga una instalación antigua?</a:t>
-            </a:r>
-          </a:p>
-          <a:p>
-            <a:r>
-              <a:t>N2: En general, con los criterios de la versión de la norma que estaba vigente cuando se puso en servicio, o cuando se modificó o amplió. Es justo: no puedes exigirle a una instalación de hace años que cumpla algo que no existía cuando se montó. Pero hay dos cosas tan peligrosas que se aplican siempre con la norma vigente de hoy, sin perdón por antigüedad. Una: tener un aparato de tipo a o de tipo be instalado en un dormitorio, o en un baño o ducha. Dos: no tener sistema de detección y corte de gas. Para adaptarse te dan de plazo hasta la siguiente inspección. La razón es de vida o muerte: un aparato que respira del cuarto donde duermes o te duchas es riesgo directo de intoxicación por monóxido; por eso eso no se tolera aunque la instalación sea vieja.</a:t>
+              <a:t>N1: ¿Y qué comprueban exactamente durante la inspección?</a:t>
+            </a:r>
+          </a:p>
+          <a:p>
+            <a:r>
+              <a:t>N2: Piénsalo como un recorrido de seguridad, de arriba abajo. Primero la estanquidad: ¿hay alguna fuga? Luego la conservación: ¿está la instalación en buen estado, sin corrosión ni golpes? Después la combustión higiénica de los aparatos: ¿queman limpio, sin exceso de monóxido? Los requisitos de ventilación y el volumen mínimo del local: ¿entra aire suficiente y el cuarto es lo bastante grande? Los sistemas de detección de gas, cuando sustituyen a la ventilación rápida. Y por último la correcta evacuación de los productos de la combustión: ¿salen bien los humos? Los procedimientos son la UNE sesenta mil seiscientos setenta guion doce y guion trece en baja presión, o la sesenta mil seiscientos veinte guion seis en alta.</a:t>
             </a:r>
           </a:p>
         </p:txBody>
@@ -1956,12 +2023,12 @@
           <a:lstStyle/>
           <a:p>
             <a:r>
-              <a:t>N1: ¿Cómo arranca el proceso de la inspección y quién puede hacerla?</a:t>
-            </a:r>
-          </a:p>
-          <a:p>
-            <a:r>
-              <a:t>N2: El distribuidor tiene que avisar al usuario, con tres meses de antelación, de que le toca la inspección obligatoria; y la puede hacer una empresa instaladora habilitada o el propio distribuidor. Ahora, quién está autorizado a inspeccionar depende del tipo de instalación. Para las instalaciones individuales valen los instaladores de categoría a, be o ce. Para las comunes, solo a o be; la ce no llega a las comunes. Fíjate en lo que esto significa para ti: como sacas la be, vas a poder inspeccionar tanto individuales como comunes. La ce se queda solo en individuales. Átalo así: en comunes, a o be; la ce, fuera de comunes.</a:t>
+              <a:t>N1: ¿Con qué versión de la norma se juzga una instalación antigua?</a:t>
+            </a:r>
+          </a:p>
+          <a:p>
+            <a:r>
+              <a:t>N2: En general, con los criterios de la versión de la norma que estaba vigente cuando se puso en servicio, o cuando se modificó o amplió. Es justo: no puedes exigirle a una instalación de hace años que cumpla algo que no existía cuando se montó. Pero hay dos cosas tan peligrosas que se aplican siempre con la norma vigente de hoy, sin perdón por antigüedad. Una: tener un aparato de tipo a o de tipo be instalado en un dormitorio, o en un baño o ducha. Dos: no tener sistema de detección y corte de gas. Para adaptarse te dan de plazo hasta la siguiente inspección. La razón es de vida o muerte: un aparato que respira del cuarto donde duermes o te duchas es riesgo directo de intoxicación por monóxido; por eso eso no se tolera aunque la instalación sea vieja.</a:t>
             </a:r>
           </a:p>
         </p:txBody>
@@ -5036,7 +5103,7 @@
             <a:r>
               <a:rPr sz="1400" b="1" i="0">
                 <a:solidFill>
-                  <a:srgbClr val="CADCFC"/>
+                  <a:srgbClr val="F4A24C"/>
                 </a:solidFill>
                 <a:latin typeface="Montserrat"/>
               </a:rPr>
@@ -5047,13 +5114,57 @@
       </p:sp>
       <p:sp>
         <p:nvSpPr>
-          <p:cNvPr id="4" name="TextBox 3"/>
+          <p:cNvPr id="4" name="Rounded Rectangle 3"/>
+          <p:cNvSpPr/>
+          <p:nvPr/>
+        </p:nvSpPr>
+        <p:spPr>
+          <a:xfrm>
+            <a:off x="868680" y="2057400"/>
+            <a:ext cx="1463040" cy="82296"/>
+          </a:xfrm>
+          <a:prstGeom prst="roundRect">
+            <a:avLst/>
+          </a:prstGeom>
+          <a:solidFill>
+            <a:srgbClr val="E8801A"/>
+          </a:solidFill>
+          <a:ln>
+            <a:noFill/>
+          </a:ln>
+          <a:effectLst/>
+        </p:spPr>
+        <p:style>
+          <a:lnRef idx="1">
+            <a:schemeClr val="accent1"/>
+          </a:lnRef>
+          <a:fillRef idx="3">
+            <a:schemeClr val="accent1"/>
+          </a:fillRef>
+          <a:effectRef idx="2">
+            <a:schemeClr val="accent1"/>
+          </a:effectRef>
+          <a:fontRef idx="minor">
+            <a:schemeClr val="lt1"/>
+          </a:fontRef>
+        </p:style>
+        <p:txBody>
+          <a:bodyPr rtlCol="0" anchor="ctr"/>
+          <a:lstStyle/>
+          <a:p>
+            <a:pPr algn="ctr"/>
+          </a:p>
+        </p:txBody>
+      </p:sp>
+      <p:sp>
+        <p:nvSpPr>
+          <p:cNvPr id="5" name="TextBox 4"/>
           <p:cNvSpPr txBox="1"/>
           <p:nvPr/>
         </p:nvSpPr>
         <p:spPr>
           <a:xfrm>
-            <a:off x="822960" y="2194560"/>
+            <a:off x="822960" y="2286000"/>
             <a:ext cx="10515600" cy="2011680"/>
           </a:xfrm>
           <a:prstGeom prst="rect">
@@ -5092,7 +5203,7 @@
       </p:sp>
       <p:sp>
         <p:nvSpPr>
-          <p:cNvPr id="5" name="TextBox 4"/>
+          <p:cNvPr id="6" name="TextBox 5"/>
           <p:cNvSpPr txBox="1"/>
           <p:nvPr/>
         </p:nvSpPr>
@@ -5216,7 +5327,7 @@
                 </a:solidFill>
                 <a:latin typeface="Montserrat"/>
               </a:rPr>
-              <a:t>010 / 020</a:t>
+              <a:t>010 / 021</a:t>
             </a:r>
           </a:p>
         </p:txBody>
@@ -5264,7 +5375,7 @@
         <p:spPr>
           <a:xfrm>
             <a:off x="822960" y="457200"/>
-            <a:ext cx="8229600" cy="365760"/>
+            <a:ext cx="10058400" cy="365760"/>
           </a:xfrm>
           <a:prstGeom prst="rect">
             <a:avLst/>
@@ -5278,13 +5389,13 @@
           <a:lstStyle/>
           <a:p>
             <a:r>
-              <a:rPr sz="1200" b="1" i="0">
-                <a:solidFill>
-                  <a:srgbClr val="64748B"/>
-                </a:solidFill>
-                <a:latin typeface="Montserrat"/>
-              </a:rPr>
-              <a:t>APARTADO 4.1.1 · PLAZOS</a:t>
+              <a:rPr sz="1300" b="1" i="0">
+                <a:solidFill>
+                  <a:srgbClr val="E8801A"/>
+                </a:solidFill>
+                <a:latin typeface="Montserrat"/>
+              </a:rPr>
+              <a:t>APARTADO 4.1.1 · PROCEDIMIENTO</a:t>
             </a:r>
           </a:p>
         </p:txBody>
@@ -5312,26 +5423,70 @@
           <a:lstStyle/>
           <a:p>
             <a:r>
-              <a:rPr sz="2700" b="1" i="0">
+              <a:rPr sz="2800" b="1" i="0">
                 <a:solidFill>
                   <a:srgbClr val="1E2761"/>
                 </a:solidFill>
                 <a:latin typeface="Montserrat"/>
               </a:rPr>
-              <a:t>Las cifras del procedimiento</a:t>
-            </a:r>
-          </a:p>
-        </p:txBody>
-      </p:sp>
-      <p:sp>
-        <p:nvSpPr>
-          <p:cNvPr id="7" name="TextBox 6"/>
+              <a:t>Aviso y quién inspecciona</a:t>
+            </a:r>
+          </a:p>
+        </p:txBody>
+      </p:sp>
+      <p:sp>
+        <p:nvSpPr>
+          <p:cNvPr id="7" name="Rounded Rectangle 6"/>
+          <p:cNvSpPr/>
+          <p:nvPr/>
+        </p:nvSpPr>
+        <p:spPr>
+          <a:xfrm>
+            <a:off x="868680" y="1627632"/>
+            <a:ext cx="2011680" cy="73152"/>
+          </a:xfrm>
+          <a:prstGeom prst="roundRect">
+            <a:avLst/>
+          </a:prstGeom>
+          <a:solidFill>
+            <a:srgbClr val="E8801A"/>
+          </a:solidFill>
+          <a:ln>
+            <a:noFill/>
+          </a:ln>
+          <a:effectLst/>
+        </p:spPr>
+        <p:style>
+          <a:lnRef idx="1">
+            <a:schemeClr val="accent1"/>
+          </a:lnRef>
+          <a:fillRef idx="3">
+            <a:schemeClr val="accent1"/>
+          </a:fillRef>
+          <a:effectRef idx="2">
+            <a:schemeClr val="accent1"/>
+          </a:effectRef>
+          <a:fontRef idx="minor">
+            <a:schemeClr val="lt1"/>
+          </a:fontRef>
+        </p:style>
+        <p:txBody>
+          <a:bodyPr rtlCol="0" anchor="ctr"/>
+          <a:lstStyle/>
+          <a:p>
+            <a:pPr algn="ctr"/>
+          </a:p>
+        </p:txBody>
+      </p:sp>
+      <p:sp>
+        <p:nvSpPr>
+          <p:cNvPr id="8" name="TextBox 7"/>
           <p:cNvSpPr txBox="1"/>
           <p:nvPr/>
         </p:nvSpPr>
         <p:spPr>
           <a:xfrm>
-            <a:off x="822960" y="1920240"/>
+            <a:off x="822960" y="1965960"/>
             <a:ext cx="4983480" cy="4206240"/>
           </a:xfrm>
           <a:prstGeom prst="rect">
@@ -5347,17 +5502,17 @@
           <a:p>
             <a:pPr>
               <a:spcAft>
-                <a:spcPts val="1000"/>
+                <a:spcPts val="1100"/>
               </a:spcAft>
             </a:pPr>
             <a:r>
               <a:rPr sz="1600" b="1" i="0">
                 <a:solidFill>
-                  <a:srgbClr val="2E3A80"/>
-                </a:solidFill>
-                <a:latin typeface="Montserrat"/>
-              </a:rPr>
-              <a:t>•  </a:t>
+                  <a:srgbClr val="E8801A"/>
+                </a:solidFill>
+                <a:latin typeface="Montserrat"/>
+              </a:rPr>
+              <a:t>▸  </a:t>
             </a:r>
             <a:r>
               <a:rPr sz="1600" b="0" i="0">
@@ -5366,23 +5521,23 @@
                 </a:solidFill>
                 <a:latin typeface="Montserrat"/>
               </a:rPr>
-              <a:t>3 meses: aviso de la obligación</a:t>
+              <a:t>El distribuidor avisa con 3 meses</a:t>
             </a:r>
           </a:p>
           <a:p>
             <a:pPr>
               <a:spcAft>
-                <a:spcPts val="1000"/>
+                <a:spcPts val="1100"/>
               </a:spcAft>
             </a:pPr>
             <a:r>
               <a:rPr sz="1600" b="1" i="0">
                 <a:solidFill>
-                  <a:srgbClr val="2E3A80"/>
-                </a:solidFill>
-                <a:latin typeface="Montserrat"/>
-              </a:rPr>
-              <a:t>•  </a:t>
+                  <a:srgbClr val="E8801A"/>
+                </a:solidFill>
+                <a:latin typeface="Montserrat"/>
+              </a:rPr>
+              <a:t>▸  </a:t>
             </a:r>
             <a:r>
               <a:rPr sz="1600" b="0" i="0">
@@ -5391,23 +5546,23 @@
                 </a:solidFill>
                 <a:latin typeface="Montserrat"/>
               </a:rPr>
-              <a:t>5 días: antelación de la visita</a:t>
+              <a:t>Individuales: instaladores A, B o C</a:t>
             </a:r>
           </a:p>
           <a:p>
             <a:pPr>
               <a:spcAft>
-                <a:spcPts val="1000"/>
+                <a:spcPts val="1100"/>
               </a:spcAft>
             </a:pPr>
             <a:r>
               <a:rPr sz="1600" b="1" i="0">
                 <a:solidFill>
-                  <a:srgbClr val="2E3A80"/>
-                </a:solidFill>
-                <a:latin typeface="Montserrat"/>
-              </a:rPr>
-              <a:t>•  </a:t>
+                  <a:srgbClr val="E8801A"/>
+                </a:solidFill>
+                <a:latin typeface="Montserrat"/>
+              </a:rPr>
+              <a:t>▸  </a:t>
             </a:r>
             <a:r>
               <a:rPr sz="1600" b="0" i="0">
@@ -5416,39 +5571,14 @@
                 </a:solidFill>
                 <a:latin typeface="Montserrat"/>
               </a:rPr>
-              <a:t>15 días hábiles: anomalía secundaria</a:t>
-            </a:r>
-          </a:p>
-          <a:p>
-            <a:pPr>
-              <a:spcAft>
-                <a:spcPts val="1000"/>
-              </a:spcAft>
-            </a:pPr>
-            <a:r>
-              <a:rPr sz="1600" b="1" i="0">
-                <a:solidFill>
-                  <a:srgbClr val="2E3A80"/>
-                </a:solidFill>
-                <a:latin typeface="Montserrat"/>
-              </a:rPr>
-              <a:t>•  </a:t>
-            </a:r>
-            <a:r>
-              <a:rPr sz="1600" b="0" i="0">
-                <a:solidFill>
-                  <a:srgbClr val="1B2330"/>
-                </a:solidFill>
-                <a:latin typeface="Montserrat"/>
-              </a:rPr>
-              <a:t>10 años: se guardan los datos</a:t>
-            </a:r>
-          </a:p>
-        </p:txBody>
-      </p:sp>
-      <p:sp>
-        <p:nvSpPr>
-          <p:cNvPr id="8" name="imgph" descr="IMGQ:calendar and clock on desk"/>
+              <a:t>Comunes: solo A o B</a:t>
+            </a:r>
+          </a:p>
+        </p:txBody>
+      </p:sp>
+      <p:sp>
+        <p:nvSpPr>
+          <p:cNvPr id="9" name="imgph" descr="IMGQ:gas installer showing professional ID card"/>
           <p:cNvSpPr/>
           <p:nvPr/>
         </p:nvSpPr>
@@ -5494,7 +5624,7 @@
       </p:sp>
       <p:sp>
         <p:nvSpPr>
-          <p:cNvPr id="9" name="TextBox 8"/>
+          <p:cNvPr id="10" name="TextBox 9"/>
           <p:cNvSpPr txBox="1"/>
           <p:nvPr/>
         </p:nvSpPr>
@@ -5534,7 +5664,7 @@
                 </a:solidFill>
                 <a:latin typeface="Montserrat"/>
               </a:rPr>
-              <a:t>calendar and clock on desk</a:t>
+              <a:t>gas installer showing professional ID card</a:t>
             </a:r>
           </a:p>
         </p:txBody>
@@ -5631,7 +5761,7 @@
                 </a:solidFill>
                 <a:latin typeface="Montserrat"/>
               </a:rPr>
-              <a:t>011 / 020</a:t>
+              <a:t>011 / 021</a:t>
             </a:r>
           </a:p>
         </p:txBody>
@@ -5679,7 +5809,7 @@
         <p:spPr>
           <a:xfrm>
             <a:off x="822960" y="457200"/>
-            <a:ext cx="8229600" cy="365760"/>
+            <a:ext cx="10058400" cy="365760"/>
           </a:xfrm>
           <a:prstGeom prst="rect">
             <a:avLst/>
@@ -5693,13 +5823,13 @@
           <a:lstStyle/>
           <a:p>
             <a:r>
-              <a:rPr sz="1200" b="1" i="0">
-                <a:solidFill>
-                  <a:srgbClr val="64748B"/>
-                </a:solidFill>
-                <a:latin typeface="Montserrat"/>
-              </a:rPr>
-              <a:t>APARTADO 4.1.1 · IMPARCIALIDAD</a:t>
+              <a:rPr sz="1300" b="1" i="0">
+                <a:solidFill>
+                  <a:srgbClr val="E8801A"/>
+                </a:solidFill>
+                <a:latin typeface="Montserrat"/>
+              </a:rPr>
+              <a:t>APARTADO 4.1.1 · PLAZOS</a:t>
             </a:r>
           </a:p>
         </p:txBody>
@@ -5727,26 +5857,70 @@
           <a:lstStyle/>
           <a:p>
             <a:r>
-              <a:rPr sz="2700" b="1" i="0">
+              <a:rPr sz="2800" b="1" i="0">
                 <a:solidFill>
                   <a:srgbClr val="1E2761"/>
                 </a:solidFill>
                 <a:latin typeface="Montserrat"/>
               </a:rPr>
-              <a:t>El que inspecciona no repara</a:t>
-            </a:r>
-          </a:p>
-        </p:txBody>
-      </p:sp>
-      <p:sp>
-        <p:nvSpPr>
-          <p:cNvPr id="7" name="TextBox 6"/>
+              <a:t>Las cifras del procedimiento</a:t>
+            </a:r>
+          </a:p>
+        </p:txBody>
+      </p:sp>
+      <p:sp>
+        <p:nvSpPr>
+          <p:cNvPr id="7" name="Rounded Rectangle 6"/>
+          <p:cNvSpPr/>
+          <p:nvPr/>
+        </p:nvSpPr>
+        <p:spPr>
+          <a:xfrm>
+            <a:off x="868680" y="1627632"/>
+            <a:ext cx="2011680" cy="73152"/>
+          </a:xfrm>
+          <a:prstGeom prst="roundRect">
+            <a:avLst/>
+          </a:prstGeom>
+          <a:solidFill>
+            <a:srgbClr val="E8801A"/>
+          </a:solidFill>
+          <a:ln>
+            <a:noFill/>
+          </a:ln>
+          <a:effectLst/>
+        </p:spPr>
+        <p:style>
+          <a:lnRef idx="1">
+            <a:schemeClr val="accent1"/>
+          </a:lnRef>
+          <a:fillRef idx="3">
+            <a:schemeClr val="accent1"/>
+          </a:fillRef>
+          <a:effectRef idx="2">
+            <a:schemeClr val="accent1"/>
+          </a:effectRef>
+          <a:fontRef idx="minor">
+            <a:schemeClr val="lt1"/>
+          </a:fontRef>
+        </p:style>
+        <p:txBody>
+          <a:bodyPr rtlCol="0" anchor="ctr"/>
+          <a:lstStyle/>
+          <a:p>
+            <a:pPr algn="ctr"/>
+          </a:p>
+        </p:txBody>
+      </p:sp>
+      <p:sp>
+        <p:nvSpPr>
+          <p:cNvPr id="8" name="TextBox 7"/>
           <p:cNvSpPr txBox="1"/>
           <p:nvPr/>
         </p:nvSpPr>
         <p:spPr>
           <a:xfrm>
-            <a:off x="822960" y="1920240"/>
+            <a:off x="822960" y="1965960"/>
             <a:ext cx="4983480" cy="4206240"/>
           </a:xfrm>
           <a:prstGeom prst="rect">
@@ -5762,17 +5936,17 @@
           <a:p>
             <a:pPr>
               <a:spcAft>
-                <a:spcPts val="1000"/>
+                <a:spcPts val="1100"/>
               </a:spcAft>
             </a:pPr>
             <a:r>
               <a:rPr sz="1600" b="1" i="0">
                 <a:solidFill>
-                  <a:srgbClr val="2E3A80"/>
-                </a:solidFill>
-                <a:latin typeface="Montserrat"/>
-              </a:rPr>
-              <a:t>•  </a:t>
+                  <a:srgbClr val="E8801A"/>
+                </a:solidFill>
+                <a:latin typeface="Montserrat"/>
+              </a:rPr>
+              <a:t>▸  </a:t>
             </a:r>
             <a:r>
               <a:rPr sz="1600" b="0" i="0">
@@ -5781,23 +5955,23 @@
                 </a:solidFill>
                 <a:latin typeface="Montserrat"/>
               </a:rPr>
-              <a:t>Detectas anomalías → informe</a:t>
+              <a:t>3 meses: aviso de la obligación</a:t>
             </a:r>
           </a:p>
           <a:p>
             <a:pPr>
               <a:spcAft>
-                <a:spcPts val="1000"/>
+                <a:spcPts val="1100"/>
               </a:spcAft>
             </a:pPr>
             <a:r>
               <a:rPr sz="1600" b="1" i="0">
                 <a:solidFill>
-                  <a:srgbClr val="2E3A80"/>
-                </a:solidFill>
-                <a:latin typeface="Montserrat"/>
-              </a:rPr>
-              <a:t>•  </a:t>
+                  <a:srgbClr val="E8801A"/>
+                </a:solidFill>
+                <a:latin typeface="Montserrat"/>
+              </a:rPr>
+              <a:t>▸  </a:t>
             </a:r>
             <a:r>
               <a:rPr sz="1600" b="0" i="0">
@@ -5806,23 +5980,23 @@
                 </a:solidFill>
                 <a:latin typeface="Montserrat"/>
               </a:rPr>
-              <a:t>No las arregla quien inspecciona</a:t>
+              <a:t>5 días: antelación de la visita</a:t>
             </a:r>
           </a:p>
           <a:p>
             <a:pPr>
               <a:spcAft>
-                <a:spcPts val="1000"/>
+                <a:spcPts val="1100"/>
               </a:spcAft>
             </a:pPr>
             <a:r>
               <a:rPr sz="1600" b="1" i="0">
                 <a:solidFill>
-                  <a:srgbClr val="2E3A80"/>
-                </a:solidFill>
-                <a:latin typeface="Montserrat"/>
-              </a:rPr>
-              <a:t>•  </a:t>
+                  <a:srgbClr val="E8801A"/>
+                </a:solidFill>
+                <a:latin typeface="Montserrat"/>
+              </a:rPr>
+              <a:t>▸  </a:t>
             </a:r>
             <a:r>
               <a:rPr sz="1600" b="0" i="0">
@@ -5831,14 +6005,39 @@
                 </a:solidFill>
                 <a:latin typeface="Montserrat"/>
               </a:rPr>
-              <a:t>Evita el conflicto de interés</a:t>
-            </a:r>
-          </a:p>
-        </p:txBody>
-      </p:sp>
-      <p:sp>
-        <p:nvSpPr>
-          <p:cNvPr id="8" name="imgph" descr="IMGQ:two gas technicians discussing paperwork"/>
+              <a:t>15 días hábiles: anomalía secundaria</a:t>
+            </a:r>
+          </a:p>
+          <a:p>
+            <a:pPr>
+              <a:spcAft>
+                <a:spcPts val="1100"/>
+              </a:spcAft>
+            </a:pPr>
+            <a:r>
+              <a:rPr sz="1600" b="1" i="0">
+                <a:solidFill>
+                  <a:srgbClr val="E8801A"/>
+                </a:solidFill>
+                <a:latin typeface="Montserrat"/>
+              </a:rPr>
+              <a:t>▸  </a:t>
+            </a:r>
+            <a:r>
+              <a:rPr sz="1600" b="0" i="0">
+                <a:solidFill>
+                  <a:srgbClr val="1B2330"/>
+                </a:solidFill>
+                <a:latin typeface="Montserrat"/>
+              </a:rPr>
+              <a:t>10 años: se guardan los datos</a:t>
+            </a:r>
+          </a:p>
+        </p:txBody>
+      </p:sp>
+      <p:sp>
+        <p:nvSpPr>
+          <p:cNvPr id="9" name="imgph" descr="IMGQ:calendar and clock on desk"/>
           <p:cNvSpPr/>
           <p:nvPr/>
         </p:nvSpPr>
@@ -5884,7 +6083,7 @@
       </p:sp>
       <p:sp>
         <p:nvSpPr>
-          <p:cNvPr id="9" name="TextBox 8"/>
+          <p:cNvPr id="10" name="TextBox 9"/>
           <p:cNvSpPr txBox="1"/>
           <p:nvPr/>
         </p:nvSpPr>
@@ -5924,7 +6123,7 @@
                 </a:solidFill>
                 <a:latin typeface="Montserrat"/>
               </a:rPr>
-              <a:t>two gas technicians discussing paperwork</a:t>
+              <a:t>calendar and clock on desk</a:t>
             </a:r>
           </a:p>
         </p:txBody>
@@ -6021,7 +6220,7 @@
                 </a:solidFill>
                 <a:latin typeface="Montserrat"/>
               </a:rPr>
-              <a:t>012 / 020</a:t>
+              <a:t>012 / 021</a:t>
             </a:r>
           </a:p>
         </p:txBody>
@@ -6069,7 +6268,7 @@
         <p:spPr>
           <a:xfrm>
             <a:off x="822960" y="457200"/>
-            <a:ext cx="8229600" cy="365760"/>
+            <a:ext cx="10058400" cy="365760"/>
           </a:xfrm>
           <a:prstGeom prst="rect">
             <a:avLst/>
@@ -6083,13 +6282,13 @@
           <a:lstStyle/>
           <a:p>
             <a:r>
-              <a:rPr sz="1200" b="1" i="0">
-                <a:solidFill>
-                  <a:srgbClr val="64748B"/>
-                </a:solidFill>
-                <a:latin typeface="Montserrat"/>
-              </a:rPr>
-              <a:t>APARTADO 4.1.1 · ANOMALÍAS</a:t>
+              <a:rPr sz="1300" b="1" i="0">
+                <a:solidFill>
+                  <a:srgbClr val="E8801A"/>
+                </a:solidFill>
+                <a:latin typeface="Montserrat"/>
+              </a:rPr>
+              <a:t>APARTADO 4.1.1 · IMPARCIALIDAD</a:t>
             </a:r>
           </a:p>
         </p:txBody>
@@ -6117,26 +6316,70 @@
           <a:lstStyle/>
           <a:p>
             <a:r>
-              <a:rPr sz="2700" b="1" i="0">
+              <a:rPr sz="2800" b="1" i="0">
                 <a:solidFill>
                   <a:srgbClr val="1E2761"/>
                 </a:solidFill>
                 <a:latin typeface="Montserrat"/>
               </a:rPr>
-              <a:t>Principal corta, secundaria da plazo</a:t>
-            </a:r>
-          </a:p>
-        </p:txBody>
-      </p:sp>
-      <p:sp>
-        <p:nvSpPr>
-          <p:cNvPr id="7" name="TextBox 6"/>
+              <a:t>El que inspecciona no repara</a:t>
+            </a:r>
+          </a:p>
+        </p:txBody>
+      </p:sp>
+      <p:sp>
+        <p:nvSpPr>
+          <p:cNvPr id="7" name="Rounded Rectangle 6"/>
+          <p:cNvSpPr/>
+          <p:nvPr/>
+        </p:nvSpPr>
+        <p:spPr>
+          <a:xfrm>
+            <a:off x="868680" y="1627632"/>
+            <a:ext cx="2011680" cy="73152"/>
+          </a:xfrm>
+          <a:prstGeom prst="roundRect">
+            <a:avLst/>
+          </a:prstGeom>
+          <a:solidFill>
+            <a:srgbClr val="E8801A"/>
+          </a:solidFill>
+          <a:ln>
+            <a:noFill/>
+          </a:ln>
+          <a:effectLst/>
+        </p:spPr>
+        <p:style>
+          <a:lnRef idx="1">
+            <a:schemeClr val="accent1"/>
+          </a:lnRef>
+          <a:fillRef idx="3">
+            <a:schemeClr val="accent1"/>
+          </a:fillRef>
+          <a:effectRef idx="2">
+            <a:schemeClr val="accent1"/>
+          </a:effectRef>
+          <a:fontRef idx="minor">
+            <a:schemeClr val="lt1"/>
+          </a:fontRef>
+        </p:style>
+        <p:txBody>
+          <a:bodyPr rtlCol="0" anchor="ctr"/>
+          <a:lstStyle/>
+          <a:p>
+            <a:pPr algn="ctr"/>
+          </a:p>
+        </p:txBody>
+      </p:sp>
+      <p:sp>
+        <p:nvSpPr>
+          <p:cNvPr id="8" name="TextBox 7"/>
           <p:cNvSpPr txBox="1"/>
           <p:nvPr/>
         </p:nvSpPr>
         <p:spPr>
           <a:xfrm>
-            <a:off x="822960" y="1920240"/>
+            <a:off x="822960" y="1965960"/>
             <a:ext cx="4983480" cy="4206240"/>
           </a:xfrm>
           <a:prstGeom prst="rect">
@@ -6152,17 +6395,17 @@
           <a:p>
             <a:pPr>
               <a:spcAft>
-                <a:spcPts val="1000"/>
+                <a:spcPts val="1100"/>
               </a:spcAft>
             </a:pPr>
             <a:r>
               <a:rPr sz="1600" b="1" i="0">
                 <a:solidFill>
-                  <a:srgbClr val="2E3A80"/>
-                </a:solidFill>
-                <a:latin typeface="Montserrat"/>
-              </a:rPr>
-              <a:t>•  </a:t>
+                  <a:srgbClr val="E8801A"/>
+                </a:solidFill>
+                <a:latin typeface="Montserrat"/>
+              </a:rPr>
+              <a:t>▸  </a:t>
             </a:r>
             <a:r>
               <a:rPr sz="1600" b="0" i="0">
@@ -6171,23 +6414,23 @@
                 </a:solidFill>
                 <a:latin typeface="Montserrat"/>
               </a:rPr>
-              <a:t>Principal → corte y precinto</a:t>
+              <a:t>Detectas anomalías → informe</a:t>
             </a:r>
           </a:p>
           <a:p>
             <a:pPr>
               <a:spcAft>
-                <a:spcPts val="1000"/>
+                <a:spcPts val="1100"/>
               </a:spcAft>
             </a:pPr>
             <a:r>
               <a:rPr sz="1600" b="1" i="0">
                 <a:solidFill>
-                  <a:srgbClr val="2E3A80"/>
-                </a:solidFill>
-                <a:latin typeface="Montserrat"/>
-              </a:rPr>
-              <a:t>•  </a:t>
+                  <a:srgbClr val="E8801A"/>
+                </a:solidFill>
+                <a:latin typeface="Montserrat"/>
+              </a:rPr>
+              <a:t>▸  </a:t>
             </a:r>
             <a:r>
               <a:rPr sz="1600" b="0" i="0">
@@ -6196,23 +6439,23 @@
                 </a:solidFill>
                 <a:latin typeface="Montserrat"/>
               </a:rPr>
-              <a:t>Todas las fugas son principales</a:t>
+              <a:t>No las arregla quien inspecciona</a:t>
             </a:r>
           </a:p>
           <a:p>
             <a:pPr>
               <a:spcAft>
-                <a:spcPts val="1000"/>
+                <a:spcPts val="1100"/>
               </a:spcAft>
             </a:pPr>
             <a:r>
               <a:rPr sz="1600" b="1" i="0">
                 <a:solidFill>
-                  <a:srgbClr val="2E3A80"/>
-                </a:solidFill>
-                <a:latin typeface="Montserrat"/>
-              </a:rPr>
-              <a:t>•  </a:t>
+                  <a:srgbClr val="E8801A"/>
+                </a:solidFill>
+                <a:latin typeface="Montserrat"/>
+              </a:rPr>
+              <a:t>▸  </a:t>
             </a:r>
             <a:r>
               <a:rPr sz="1600" b="0" i="0">
@@ -6221,39 +6464,14 @@
                 </a:solidFill>
                 <a:latin typeface="Montserrat"/>
               </a:rPr>
-              <a:t>Secundaria → plazo de corrección</a:t>
-            </a:r>
-          </a:p>
-          <a:p>
-            <a:pPr>
-              <a:spcAft>
-                <a:spcPts val="1000"/>
-              </a:spcAft>
-            </a:pPr>
-            <a:r>
-              <a:rPr sz="1600" b="1" i="0">
-                <a:solidFill>
-                  <a:srgbClr val="2E3A80"/>
-                </a:solidFill>
-                <a:latin typeface="Montserrat"/>
-              </a:rPr>
-              <a:t>•  </a:t>
-            </a:r>
-            <a:r>
-              <a:rPr sz="1600" b="0" i="0">
-                <a:solidFill>
-                  <a:srgbClr val="1B2330"/>
-                </a:solidFill>
-                <a:latin typeface="Montserrat"/>
-              </a:rPr>
-              <a:t>Volver a dar gas: certificado de subsanación</a:t>
-            </a:r>
-          </a:p>
-        </p:txBody>
-      </p:sp>
-      <p:sp>
-        <p:nvSpPr>
-          <p:cNvPr id="8" name="imgph" descr="IMGQ:sealed and tagged gas valve shut off"/>
+              <a:t>Evita el conflicto de interés</a:t>
+            </a:r>
+          </a:p>
+        </p:txBody>
+      </p:sp>
+      <p:sp>
+        <p:nvSpPr>
+          <p:cNvPr id="9" name="imgph" descr="IMGQ:two gas technicians discussing paperwork"/>
           <p:cNvSpPr/>
           <p:nvPr/>
         </p:nvSpPr>
@@ -6299,7 +6517,7 @@
       </p:sp>
       <p:sp>
         <p:nvSpPr>
-          <p:cNvPr id="9" name="TextBox 8"/>
+          <p:cNvPr id="10" name="TextBox 9"/>
           <p:cNvSpPr txBox="1"/>
           <p:nvPr/>
         </p:nvSpPr>
@@ -6339,7 +6557,7 @@
                 </a:solidFill>
                 <a:latin typeface="Montserrat"/>
               </a:rPr>
-              <a:t>sealed and tagged gas valve shut off</a:t>
+              <a:t>two gas technicians discussing paperwork</a:t>
             </a:r>
           </a:p>
         </p:txBody>
@@ -6436,7 +6654,7 @@
                 </a:solidFill>
                 <a:latin typeface="Montserrat"/>
               </a:rPr>
-              <a:t>013 / 020</a:t>
+              <a:t>013 / 021</a:t>
             </a:r>
           </a:p>
         </p:txBody>
@@ -6484,7 +6702,7 @@
         <p:spPr>
           <a:xfrm>
             <a:off x="822960" y="457200"/>
-            <a:ext cx="8229600" cy="365760"/>
+            <a:ext cx="10058400" cy="365760"/>
           </a:xfrm>
           <a:prstGeom prst="rect">
             <a:avLst/>
@@ -6498,13 +6716,13 @@
           <a:lstStyle/>
           <a:p>
             <a:r>
-              <a:rPr sz="1200" b="1" i="0">
-                <a:solidFill>
-                  <a:srgbClr val="64748B"/>
-                </a:solidFill>
-                <a:latin typeface="Montserrat"/>
-              </a:rPr>
-              <a:t>APARTADO 4.2 · REVISIÓN</a:t>
+              <a:rPr sz="1300" b="1" i="0">
+                <a:solidFill>
+                  <a:srgbClr val="E8801A"/>
+                </a:solidFill>
+                <a:latin typeface="Montserrat"/>
+              </a:rPr>
+              <a:t>APARTADO 4.1.1 · ANOMALÍAS</a:t>
             </a:r>
           </a:p>
         </p:txBody>
@@ -6532,26 +6750,70 @@
           <a:lstStyle/>
           <a:p>
             <a:r>
-              <a:rPr sz="2700" b="1" i="0">
+              <a:rPr sz="2800" b="1" i="0">
                 <a:solidFill>
                   <a:srgbClr val="1E2761"/>
                 </a:solidFill>
                 <a:latin typeface="Montserrat"/>
               </a:rPr>
-              <a:t>Revisión: fuera de la red</a:t>
-            </a:r>
-          </a:p>
-        </p:txBody>
-      </p:sp>
-      <p:sp>
-        <p:nvSpPr>
-          <p:cNvPr id="7" name="TextBox 6"/>
+              <a:t>Principal corta, secundaria da plazo</a:t>
+            </a:r>
+          </a:p>
+        </p:txBody>
+      </p:sp>
+      <p:sp>
+        <p:nvSpPr>
+          <p:cNvPr id="7" name="Rounded Rectangle 6"/>
+          <p:cNvSpPr/>
+          <p:nvPr/>
+        </p:nvSpPr>
+        <p:spPr>
+          <a:xfrm>
+            <a:off x="868680" y="1627632"/>
+            <a:ext cx="2011680" cy="73152"/>
+          </a:xfrm>
+          <a:prstGeom prst="roundRect">
+            <a:avLst/>
+          </a:prstGeom>
+          <a:solidFill>
+            <a:srgbClr val="E8801A"/>
+          </a:solidFill>
+          <a:ln>
+            <a:noFill/>
+          </a:ln>
+          <a:effectLst/>
+        </p:spPr>
+        <p:style>
+          <a:lnRef idx="1">
+            <a:schemeClr val="accent1"/>
+          </a:lnRef>
+          <a:fillRef idx="3">
+            <a:schemeClr val="accent1"/>
+          </a:fillRef>
+          <a:effectRef idx="2">
+            <a:schemeClr val="accent1"/>
+          </a:effectRef>
+          <a:fontRef idx="minor">
+            <a:schemeClr val="lt1"/>
+          </a:fontRef>
+        </p:style>
+        <p:txBody>
+          <a:bodyPr rtlCol="0" anchor="ctr"/>
+          <a:lstStyle/>
+          <a:p>
+            <a:pPr algn="ctr"/>
+          </a:p>
+        </p:txBody>
+      </p:sp>
+      <p:sp>
+        <p:nvSpPr>
+          <p:cNvPr id="8" name="TextBox 7"/>
           <p:cNvSpPr txBox="1"/>
           <p:nvPr/>
         </p:nvSpPr>
         <p:spPr>
           <a:xfrm>
-            <a:off x="822960" y="1920240"/>
+            <a:off x="822960" y="1965960"/>
             <a:ext cx="4983480" cy="4206240"/>
           </a:xfrm>
           <a:prstGeom prst="rect">
@@ -6567,17 +6829,17 @@
           <a:p>
             <a:pPr>
               <a:spcAft>
-                <a:spcPts val="1000"/>
+                <a:spcPts val="1100"/>
               </a:spcAft>
             </a:pPr>
             <a:r>
               <a:rPr sz="1600" b="1" i="0">
                 <a:solidFill>
-                  <a:srgbClr val="2E3A80"/>
-                </a:solidFill>
-                <a:latin typeface="Montserrat"/>
-              </a:rPr>
-              <a:t>•  </a:t>
+                  <a:srgbClr val="E8801A"/>
+                </a:solidFill>
+                <a:latin typeface="Montserrat"/>
+              </a:rPr>
+              <a:t>▸  </a:t>
             </a:r>
             <a:r>
               <a:rPr sz="1600" b="0" i="0">
@@ -6586,23 +6848,23 @@
                 </a:solidFill>
                 <a:latin typeface="Montserrat"/>
               </a:rPr>
-              <a:t>Instalaciones sin red (depósito o bombonas)</a:t>
+              <a:t>Principal → corte y precinto</a:t>
             </a:r>
           </a:p>
           <a:p>
             <a:pPr>
               <a:spcAft>
-                <a:spcPts val="1000"/>
+                <a:spcPts val="1100"/>
               </a:spcAft>
             </a:pPr>
             <a:r>
               <a:rPr sz="1600" b="1" i="0">
                 <a:solidFill>
-                  <a:srgbClr val="2E3A80"/>
-                </a:solidFill>
-                <a:latin typeface="Montserrat"/>
-              </a:rPr>
-              <a:t>•  </a:t>
+                  <a:srgbClr val="E8801A"/>
+                </a:solidFill>
+                <a:latin typeface="Montserrat"/>
+              </a:rPr>
+              <a:t>▸  </a:t>
             </a:r>
             <a:r>
               <a:rPr sz="1600" b="0" i="0">
@@ -6611,23 +6873,23 @@
                 </a:solidFill>
                 <a:latin typeface="Montserrat"/>
               </a:rPr>
-              <a:t>El titular la encarga a una instaladora</a:t>
+              <a:t>Todas las fugas son principales</a:t>
             </a:r>
           </a:p>
           <a:p>
             <a:pPr>
               <a:spcAft>
-                <a:spcPts val="1000"/>
+                <a:spcPts val="1100"/>
               </a:spcAft>
             </a:pPr>
             <a:r>
               <a:rPr sz="1600" b="1" i="0">
                 <a:solidFill>
-                  <a:srgbClr val="2E3A80"/>
-                </a:solidFill>
-                <a:latin typeface="Montserrat"/>
-              </a:rPr>
-              <a:t>•  </a:t>
+                  <a:srgbClr val="E8801A"/>
+                </a:solidFill>
+                <a:latin typeface="Montserrat"/>
+              </a:rPr>
+              <a:t>▸  </a:t>
             </a:r>
             <a:r>
               <a:rPr sz="1600" b="0" i="0">
@@ -6636,14 +6898,39 @@
                 </a:solidFill>
                 <a:latin typeface="Montserrat"/>
               </a:rPr>
-              <a:t>Cada 5 años; coincide con el depósito</a:t>
-            </a:r>
-          </a:p>
-        </p:txBody>
-      </p:sp>
-      <p:sp>
-        <p:nvSpPr>
-          <p:cNvPr id="8" name="imgph" descr="IMGQ:LPG storage tank in garden of house"/>
+              <a:t>Secundaria → plazo de corrección</a:t>
+            </a:r>
+          </a:p>
+          <a:p>
+            <a:pPr>
+              <a:spcAft>
+                <a:spcPts val="1100"/>
+              </a:spcAft>
+            </a:pPr>
+            <a:r>
+              <a:rPr sz="1600" b="1" i="0">
+                <a:solidFill>
+                  <a:srgbClr val="E8801A"/>
+                </a:solidFill>
+                <a:latin typeface="Montserrat"/>
+              </a:rPr>
+              <a:t>▸  </a:t>
+            </a:r>
+            <a:r>
+              <a:rPr sz="1600" b="0" i="0">
+                <a:solidFill>
+                  <a:srgbClr val="1B2330"/>
+                </a:solidFill>
+                <a:latin typeface="Montserrat"/>
+              </a:rPr>
+              <a:t>Volver a dar gas: certificado de subsanación</a:t>
+            </a:r>
+          </a:p>
+        </p:txBody>
+      </p:sp>
+      <p:sp>
+        <p:nvSpPr>
+          <p:cNvPr id="9" name="imgph" descr="IMGQ:sealed and tagged gas valve shut off"/>
           <p:cNvSpPr/>
           <p:nvPr/>
         </p:nvSpPr>
@@ -6689,7 +6976,7 @@
       </p:sp>
       <p:sp>
         <p:nvSpPr>
-          <p:cNvPr id="9" name="TextBox 8"/>
+          <p:cNvPr id="10" name="TextBox 9"/>
           <p:cNvSpPr txBox="1"/>
           <p:nvPr/>
         </p:nvSpPr>
@@ -6729,7 +7016,7 @@
                 </a:solidFill>
                 <a:latin typeface="Montserrat"/>
               </a:rPr>
-              <a:t>LPG storage tank in garden of house</a:t>
+              <a:t>sealed and tagged gas valve shut off</a:t>
             </a:r>
           </a:p>
         </p:txBody>
@@ -6826,7 +7113,7 @@
                 </a:solidFill>
                 <a:latin typeface="Montserrat"/>
               </a:rPr>
-              <a:t>014 / 020</a:t>
+              <a:t>014 / 021</a:t>
             </a:r>
           </a:p>
         </p:txBody>
@@ -6874,7 +7161,7 @@
         <p:spPr>
           <a:xfrm>
             <a:off x="822960" y="457200"/>
-            <a:ext cx="8229600" cy="365760"/>
+            <a:ext cx="10058400" cy="365760"/>
           </a:xfrm>
           <a:prstGeom prst="rect">
             <a:avLst/>
@@ -6888,9 +7175,9 @@
           <a:lstStyle/>
           <a:p>
             <a:r>
-              <a:rPr sz="1200" b="1" i="0">
-                <a:solidFill>
-                  <a:srgbClr val="64748B"/>
+              <a:rPr sz="1300" b="1" i="0">
+                <a:solidFill>
+                  <a:srgbClr val="E8801A"/>
                 </a:solidFill>
                 <a:latin typeface="Montserrat"/>
               </a:rPr>
@@ -6922,26 +7209,70 @@
           <a:lstStyle/>
           <a:p>
             <a:r>
-              <a:rPr sz="2700" b="1" i="0">
+              <a:rPr sz="2800" b="1" i="0">
                 <a:solidFill>
                   <a:srgbClr val="1E2761"/>
                 </a:solidFill>
                 <a:latin typeface="Montserrat"/>
               </a:rPr>
-              <a:t>La protección catódica</a:t>
-            </a:r>
-          </a:p>
-        </p:txBody>
-      </p:sp>
-      <p:sp>
-        <p:nvSpPr>
-          <p:cNvPr id="7" name="TextBox 6"/>
+              <a:t>Revisión: fuera de la red</a:t>
+            </a:r>
+          </a:p>
+        </p:txBody>
+      </p:sp>
+      <p:sp>
+        <p:nvSpPr>
+          <p:cNvPr id="7" name="Rounded Rectangle 6"/>
+          <p:cNvSpPr/>
+          <p:nvPr/>
+        </p:nvSpPr>
+        <p:spPr>
+          <a:xfrm>
+            <a:off x="868680" y="1627632"/>
+            <a:ext cx="2011680" cy="73152"/>
+          </a:xfrm>
+          <a:prstGeom prst="roundRect">
+            <a:avLst/>
+          </a:prstGeom>
+          <a:solidFill>
+            <a:srgbClr val="E8801A"/>
+          </a:solidFill>
+          <a:ln>
+            <a:noFill/>
+          </a:ln>
+          <a:effectLst/>
+        </p:spPr>
+        <p:style>
+          <a:lnRef idx="1">
+            <a:schemeClr val="accent1"/>
+          </a:lnRef>
+          <a:fillRef idx="3">
+            <a:schemeClr val="accent1"/>
+          </a:fillRef>
+          <a:effectRef idx="2">
+            <a:schemeClr val="accent1"/>
+          </a:effectRef>
+          <a:fontRef idx="minor">
+            <a:schemeClr val="lt1"/>
+          </a:fontRef>
+        </p:style>
+        <p:txBody>
+          <a:bodyPr rtlCol="0" anchor="ctr"/>
+          <a:lstStyle/>
+          <a:p>
+            <a:pPr algn="ctr"/>
+          </a:p>
+        </p:txBody>
+      </p:sp>
+      <p:sp>
+        <p:nvSpPr>
+          <p:cNvPr id="8" name="TextBox 7"/>
           <p:cNvSpPr txBox="1"/>
           <p:nvPr/>
         </p:nvSpPr>
         <p:spPr>
           <a:xfrm>
-            <a:off x="822960" y="1920240"/>
+            <a:off x="822960" y="1965960"/>
             <a:ext cx="4983480" cy="4206240"/>
           </a:xfrm>
           <a:prstGeom prst="rect">
@@ -6957,17 +7288,17 @@
           <a:p>
             <a:pPr>
               <a:spcAft>
-                <a:spcPts val="1000"/>
+                <a:spcPts val="1100"/>
               </a:spcAft>
             </a:pPr>
             <a:r>
               <a:rPr sz="1600" b="1" i="0">
                 <a:solidFill>
-                  <a:srgbClr val="2E3A80"/>
-                </a:solidFill>
-                <a:latin typeface="Montserrat"/>
-              </a:rPr>
-              <a:t>•  </a:t>
+                  <a:srgbClr val="E8801A"/>
+                </a:solidFill>
+                <a:latin typeface="Montserrat"/>
+              </a:rPr>
+              <a:t>▸  </a:t>
             </a:r>
             <a:r>
               <a:rPr sz="1600" b="0" i="0">
@@ -6976,23 +7307,23 @@
                 </a:solidFill>
                 <a:latin typeface="Montserrat"/>
               </a:rPr>
-              <a:t>Solo aparece en la revisión</a:t>
+              <a:t>Instalaciones sin red (depósito o bombonas)</a:t>
             </a:r>
           </a:p>
           <a:p>
             <a:pPr>
               <a:spcAft>
-                <a:spcPts val="1000"/>
+                <a:spcPts val="1100"/>
               </a:spcAft>
             </a:pPr>
             <a:r>
               <a:rPr sz="1600" b="1" i="0">
                 <a:solidFill>
-                  <a:srgbClr val="2E3A80"/>
-                </a:solidFill>
-                <a:latin typeface="Montserrat"/>
-              </a:rPr>
-              <a:t>•  </a:t>
+                  <a:srgbClr val="E8801A"/>
+                </a:solidFill>
+                <a:latin typeface="Montserrat"/>
+              </a:rPr>
+              <a:t>▸  </a:t>
             </a:r>
             <a:r>
               <a:rPr sz="1600" b="0" i="0">
@@ -7001,23 +7332,23 @@
                 </a:solidFill>
                 <a:latin typeface="Montserrat"/>
               </a:rPr>
-              <a:t>Evita que el acero enterrado se corroa</a:t>
+              <a:t>El titular la encarga a una instaladora</a:t>
             </a:r>
           </a:p>
           <a:p>
             <a:pPr>
               <a:spcAft>
-                <a:spcPts val="1000"/>
+                <a:spcPts val="1100"/>
               </a:spcAft>
             </a:pPr>
             <a:r>
               <a:rPr sz="1600" b="1" i="0">
                 <a:solidFill>
-                  <a:srgbClr val="2E3A80"/>
-                </a:solidFill>
-                <a:latin typeface="Montserrat"/>
-              </a:rPr>
-              <a:t>•  </a:t>
+                  <a:srgbClr val="E8801A"/>
+                </a:solidFill>
+                <a:latin typeface="Montserrat"/>
+              </a:rPr>
+              <a:t>▸  </a:t>
             </a:r>
             <a:r>
               <a:rPr sz="1600" b="0" i="0">
@@ -7026,14 +7357,14 @@
                 </a:solidFill>
                 <a:latin typeface="Montserrat"/>
               </a:rPr>
-              <a:t>Señal: piensa depósito y acero enterrado</a:t>
-            </a:r>
-          </a:p>
-        </p:txBody>
-      </p:sp>
-      <p:sp>
-        <p:nvSpPr>
-          <p:cNvPr id="8" name="imgph" descr="IMGQ:buried steel gas pipe with cathodic protection anode"/>
+              <a:t>Cada 5 años; coincide con el depósito</a:t>
+            </a:r>
+          </a:p>
+        </p:txBody>
+      </p:sp>
+      <p:sp>
+        <p:nvSpPr>
+          <p:cNvPr id="9" name="imgph" descr="IMGQ:LPG storage tank in garden of house"/>
           <p:cNvSpPr/>
           <p:nvPr/>
         </p:nvSpPr>
@@ -7079,7 +7410,7 @@
       </p:sp>
       <p:sp>
         <p:nvSpPr>
-          <p:cNvPr id="9" name="TextBox 8"/>
+          <p:cNvPr id="10" name="TextBox 9"/>
           <p:cNvSpPr txBox="1"/>
           <p:nvPr/>
         </p:nvSpPr>
@@ -7119,7 +7450,7 @@
                 </a:solidFill>
                 <a:latin typeface="Montserrat"/>
               </a:rPr>
-              <a:t>buried steel gas pipe with cathodic protection anode</a:t>
+              <a:t>LPG storage tank in garden of house</a:t>
             </a:r>
           </a:p>
         </p:txBody>
@@ -7216,7 +7547,7 @@
                 </a:solidFill>
                 <a:latin typeface="Montserrat"/>
               </a:rPr>
-              <a:t>015 / 020</a:t>
+              <a:t>015 / 021</a:t>
             </a:r>
           </a:p>
         </p:txBody>
@@ -7264,7 +7595,7 @@
         <p:spPr>
           <a:xfrm>
             <a:off x="822960" y="457200"/>
-            <a:ext cx="8229600" cy="365760"/>
+            <a:ext cx="10058400" cy="365760"/>
           </a:xfrm>
           <a:prstGeom prst="rect">
             <a:avLst/>
@@ -7278,13 +7609,13 @@
           <a:lstStyle/>
           <a:p>
             <a:r>
-              <a:rPr sz="1200" b="1" i="0">
-                <a:solidFill>
-                  <a:srgbClr val="64748B"/>
-                </a:solidFill>
-                <a:latin typeface="Montserrat"/>
-              </a:rPr>
-              <a:t>APARTADO 4.2 · CERTIFICADOS</a:t>
+              <a:rPr sz="1300" b="1" i="0">
+                <a:solidFill>
+                  <a:srgbClr val="E8801A"/>
+                </a:solidFill>
+                <a:latin typeface="Montserrat"/>
+              </a:rPr>
+              <a:t>APARTADO 4.2 · REVISIÓN</a:t>
             </a:r>
           </a:p>
         </p:txBody>
@@ -7312,26 +7643,70 @@
           <a:lstStyle/>
           <a:p>
             <a:r>
-              <a:rPr sz="2700" b="1" i="0">
+              <a:rPr sz="2800" b="1" i="0">
                 <a:solidFill>
                   <a:srgbClr val="1E2761"/>
                 </a:solidFill>
                 <a:latin typeface="Montserrat"/>
               </a:rPr>
-              <a:t>IRG-4 e IRG-5: revisión</a:t>
-            </a:r>
-          </a:p>
-        </p:txBody>
-      </p:sp>
-      <p:sp>
-        <p:nvSpPr>
-          <p:cNvPr id="7" name="TextBox 6"/>
+              <a:t>La protección catódica</a:t>
+            </a:r>
+          </a:p>
+        </p:txBody>
+      </p:sp>
+      <p:sp>
+        <p:nvSpPr>
+          <p:cNvPr id="7" name="Rounded Rectangle 6"/>
+          <p:cNvSpPr/>
+          <p:nvPr/>
+        </p:nvSpPr>
+        <p:spPr>
+          <a:xfrm>
+            <a:off x="868680" y="1627632"/>
+            <a:ext cx="2011680" cy="73152"/>
+          </a:xfrm>
+          <a:prstGeom prst="roundRect">
+            <a:avLst/>
+          </a:prstGeom>
+          <a:solidFill>
+            <a:srgbClr val="E8801A"/>
+          </a:solidFill>
+          <a:ln>
+            <a:noFill/>
+          </a:ln>
+          <a:effectLst/>
+        </p:spPr>
+        <p:style>
+          <a:lnRef idx="1">
+            <a:schemeClr val="accent1"/>
+          </a:lnRef>
+          <a:fillRef idx="3">
+            <a:schemeClr val="accent1"/>
+          </a:fillRef>
+          <a:effectRef idx="2">
+            <a:schemeClr val="accent1"/>
+          </a:effectRef>
+          <a:fontRef idx="minor">
+            <a:schemeClr val="lt1"/>
+          </a:fontRef>
+        </p:style>
+        <p:txBody>
+          <a:bodyPr rtlCol="0" anchor="ctr"/>
+          <a:lstStyle/>
+          <a:p>
+            <a:pPr algn="ctr"/>
+          </a:p>
+        </p:txBody>
+      </p:sp>
+      <p:sp>
+        <p:nvSpPr>
+          <p:cNvPr id="8" name="TextBox 7"/>
           <p:cNvSpPr txBox="1"/>
           <p:nvPr/>
         </p:nvSpPr>
         <p:spPr>
           <a:xfrm>
-            <a:off x="822960" y="1920240"/>
+            <a:off x="822960" y="1965960"/>
             <a:ext cx="4983480" cy="4206240"/>
           </a:xfrm>
           <a:prstGeom prst="rect">
@@ -7347,17 +7722,17 @@
           <a:p>
             <a:pPr>
               <a:spcAft>
-                <a:spcPts val="1000"/>
+                <a:spcPts val="1100"/>
               </a:spcAft>
             </a:pPr>
             <a:r>
               <a:rPr sz="1600" b="1" i="0">
                 <a:solidFill>
-                  <a:srgbClr val="2E3A80"/>
-                </a:solidFill>
-                <a:latin typeface="Montserrat"/>
-              </a:rPr>
-              <a:t>•  </a:t>
+                  <a:srgbClr val="E8801A"/>
+                </a:solidFill>
+                <a:latin typeface="Montserrat"/>
+              </a:rPr>
+              <a:t>▸  </a:t>
             </a:r>
             <a:r>
               <a:rPr sz="1600" b="0" i="0">
@@ -7366,23 +7741,23 @@
                 </a:solidFill>
                 <a:latin typeface="Montserrat"/>
               </a:rPr>
-              <a:t>IRG-4: revisión individual, sin red</a:t>
+              <a:t>Solo aparece en la revisión</a:t>
             </a:r>
           </a:p>
           <a:p>
             <a:pPr>
               <a:spcAft>
-                <a:spcPts val="1000"/>
+                <a:spcPts val="1100"/>
               </a:spcAft>
             </a:pPr>
             <a:r>
               <a:rPr sz="1600" b="1" i="0">
                 <a:solidFill>
-                  <a:srgbClr val="2E3A80"/>
-                </a:solidFill>
-                <a:latin typeface="Montserrat"/>
-              </a:rPr>
-              <a:t>•  </a:t>
+                  <a:srgbClr val="E8801A"/>
+                </a:solidFill>
+                <a:latin typeface="Montserrat"/>
+              </a:rPr>
+              <a:t>▸  </a:t>
             </a:r>
             <a:r>
               <a:rPr sz="1600" b="0" i="0">
@@ -7391,23 +7766,23 @@
                 </a:solidFill>
                 <a:latin typeface="Montserrat"/>
               </a:rPr>
-              <a:t>IRG-5: revisión común, sin red</a:t>
+              <a:t>Evita que el acero enterrado se corroa</a:t>
             </a:r>
           </a:p>
           <a:p>
             <a:pPr>
               <a:spcAft>
-                <a:spcPts val="1000"/>
+                <a:spcPts val="1100"/>
               </a:spcAft>
             </a:pPr>
             <a:r>
               <a:rPr sz="1600" b="1" i="0">
                 <a:solidFill>
-                  <a:srgbClr val="2E3A80"/>
-                </a:solidFill>
-                <a:latin typeface="Montserrat"/>
-              </a:rPr>
-              <a:t>•  </a:t>
+                  <a:srgbClr val="E8801A"/>
+                </a:solidFill>
+                <a:latin typeface="Montserrat"/>
+              </a:rPr>
+              <a:t>▸  </a:t>
             </a:r>
             <a:r>
               <a:rPr sz="1600" b="0" i="0">
@@ -7416,14 +7791,14 @@
                 </a:solidFill>
                 <a:latin typeface="Montserrat"/>
               </a:rPr>
-              <a:t>Validez: cinco años</a:t>
-            </a:r>
-          </a:p>
-        </p:txBody>
-      </p:sp>
-      <p:sp>
-        <p:nvSpPr>
-          <p:cNvPr id="8" name="imgph" descr="IMGQ:gas technician filling revision certificate form"/>
+              <a:t>Señal: piensa depósito y acero enterrado</a:t>
+            </a:r>
+          </a:p>
+        </p:txBody>
+      </p:sp>
+      <p:sp>
+        <p:nvSpPr>
+          <p:cNvPr id="9" name="imgph" descr="IMGQ:buried steel gas pipe with cathodic protection anode"/>
           <p:cNvSpPr/>
           <p:nvPr/>
         </p:nvSpPr>
@@ -7469,7 +7844,7 @@
       </p:sp>
       <p:sp>
         <p:nvSpPr>
-          <p:cNvPr id="9" name="TextBox 8"/>
+          <p:cNvPr id="10" name="TextBox 9"/>
           <p:cNvSpPr txBox="1"/>
           <p:nvPr/>
         </p:nvSpPr>
@@ -7509,7 +7884,7 @@
                 </a:solidFill>
                 <a:latin typeface="Montserrat"/>
               </a:rPr>
-              <a:t>gas technician filling revision certificate form</a:t>
+              <a:t>buried steel gas pipe with cathodic protection anode</a:t>
             </a:r>
           </a:p>
         </p:txBody>
@@ -7606,7 +7981,7 @@
                 </a:solidFill>
                 <a:latin typeface="Montserrat"/>
               </a:rPr>
-              <a:t>016 / 020</a:t>
+              <a:t>016 / 021</a:t>
             </a:r>
           </a:p>
         </p:txBody>
@@ -7654,7 +8029,7 @@
         <p:spPr>
           <a:xfrm>
             <a:off x="822960" y="457200"/>
-            <a:ext cx="8229600" cy="365760"/>
+            <a:ext cx="10058400" cy="365760"/>
           </a:xfrm>
           <a:prstGeom prst="rect">
             <a:avLst/>
@@ -7668,13 +8043,13 @@
           <a:lstStyle/>
           <a:p>
             <a:r>
-              <a:rPr sz="1200" b="1" i="0">
-                <a:solidFill>
-                  <a:srgbClr val="64748B"/>
-                </a:solidFill>
-                <a:latin typeface="Montserrat"/>
-              </a:rPr>
-              <a:t>APARTADO 5 · MODIFICACIÓN</a:t>
+              <a:rPr sz="1300" b="1" i="0">
+                <a:solidFill>
+                  <a:srgbClr val="E8801A"/>
+                </a:solidFill>
+                <a:latin typeface="Montserrat"/>
+              </a:rPr>
+              <a:t>APARTADO 4.2 · CERTIFICADOS</a:t>
             </a:r>
           </a:p>
         </p:txBody>
@@ -7702,26 +8077,70 @@
           <a:lstStyle/>
           <a:p>
             <a:r>
-              <a:rPr sz="2700" b="1" i="0">
+              <a:rPr sz="2800" b="1" i="0">
                 <a:solidFill>
                   <a:srgbClr val="1E2761"/>
                 </a:solidFill>
                 <a:latin typeface="Montserrat"/>
               </a:rPr>
-              <a:t>La regla del metro</a:t>
-            </a:r>
-          </a:p>
-        </p:txBody>
-      </p:sp>
-      <p:sp>
-        <p:nvSpPr>
-          <p:cNvPr id="7" name="TextBox 6"/>
+              <a:t>IRG-4 e IRG-5: revisión</a:t>
+            </a:r>
+          </a:p>
+        </p:txBody>
+      </p:sp>
+      <p:sp>
+        <p:nvSpPr>
+          <p:cNvPr id="7" name="Rounded Rectangle 6"/>
+          <p:cNvSpPr/>
+          <p:nvPr/>
+        </p:nvSpPr>
+        <p:spPr>
+          <a:xfrm>
+            <a:off x="868680" y="1627632"/>
+            <a:ext cx="2011680" cy="73152"/>
+          </a:xfrm>
+          <a:prstGeom prst="roundRect">
+            <a:avLst/>
+          </a:prstGeom>
+          <a:solidFill>
+            <a:srgbClr val="E8801A"/>
+          </a:solidFill>
+          <a:ln>
+            <a:noFill/>
+          </a:ln>
+          <a:effectLst/>
+        </p:spPr>
+        <p:style>
+          <a:lnRef idx="1">
+            <a:schemeClr val="accent1"/>
+          </a:lnRef>
+          <a:fillRef idx="3">
+            <a:schemeClr val="accent1"/>
+          </a:fillRef>
+          <a:effectRef idx="2">
+            <a:schemeClr val="accent1"/>
+          </a:effectRef>
+          <a:fontRef idx="minor">
+            <a:schemeClr val="lt1"/>
+          </a:fontRef>
+        </p:style>
+        <p:txBody>
+          <a:bodyPr rtlCol="0" anchor="ctr"/>
+          <a:lstStyle/>
+          <a:p>
+            <a:pPr algn="ctr"/>
+          </a:p>
+        </p:txBody>
+      </p:sp>
+      <p:sp>
+        <p:nvSpPr>
+          <p:cNvPr id="8" name="TextBox 7"/>
           <p:cNvSpPr txBox="1"/>
           <p:nvPr/>
         </p:nvSpPr>
         <p:spPr>
           <a:xfrm>
-            <a:off x="822960" y="1920240"/>
+            <a:off x="822960" y="1965960"/>
             <a:ext cx="4983480" cy="4206240"/>
           </a:xfrm>
           <a:prstGeom prst="rect">
@@ -7737,17 +8156,17 @@
           <a:p>
             <a:pPr>
               <a:spcAft>
-                <a:spcPts val="1000"/>
+                <a:spcPts val="1100"/>
               </a:spcAft>
             </a:pPr>
             <a:r>
               <a:rPr sz="1600" b="1" i="0">
                 <a:solidFill>
-                  <a:srgbClr val="2E3A80"/>
-                </a:solidFill>
-                <a:latin typeface="Montserrat"/>
-              </a:rPr>
-              <a:t>•  </a:t>
+                  <a:srgbClr val="E8801A"/>
+                </a:solidFill>
+                <a:latin typeface="Montserrat"/>
+              </a:rPr>
+              <a:t>▸  </a:t>
             </a:r>
             <a:r>
               <a:rPr sz="1600" b="0" i="0">
@@ -7756,23 +8175,23 @@
                 </a:solidFill>
                 <a:latin typeface="Montserrat"/>
               </a:rPr>
-              <a:t>Cambio de material o trazado &gt; 1 m</a:t>
+              <a:t>IRG-4: revisión individual, sin red</a:t>
             </a:r>
           </a:p>
           <a:p>
             <a:pPr>
               <a:spcAft>
-                <a:spcPts val="1000"/>
+                <a:spcPts val="1100"/>
               </a:spcAft>
             </a:pPr>
             <a:r>
               <a:rPr sz="1600" b="1" i="0">
                 <a:solidFill>
-                  <a:srgbClr val="2E3A80"/>
-                </a:solidFill>
-                <a:latin typeface="Montserrat"/>
-              </a:rPr>
-              <a:t>•  </a:t>
+                  <a:srgbClr val="E8801A"/>
+                </a:solidFill>
+                <a:latin typeface="Montserrat"/>
+              </a:rPr>
+              <a:t>▸  </a:t>
             </a:r>
             <a:r>
               <a:rPr sz="1600" b="0" i="0">
@@ -7781,23 +8200,23 @@
                 </a:solidFill>
                 <a:latin typeface="Montserrat"/>
               </a:rPr>
-              <a:t>Ampliación de consumo</a:t>
+              <a:t>IRG-5: revisión común, sin red</a:t>
             </a:r>
           </a:p>
           <a:p>
             <a:pPr>
               <a:spcAft>
-                <a:spcPts val="1000"/>
+                <a:spcPts val="1100"/>
               </a:spcAft>
             </a:pPr>
             <a:r>
               <a:rPr sz="1600" b="1" i="0">
                 <a:solidFill>
-                  <a:srgbClr val="2E3A80"/>
-                </a:solidFill>
-                <a:latin typeface="Montserrat"/>
-              </a:rPr>
-              <a:t>•  </a:t>
+                  <a:srgbClr val="E8801A"/>
+                </a:solidFill>
+                <a:latin typeface="Montserrat"/>
+              </a:rPr>
+              <a:t>▸  </a:t>
             </a:r>
             <a:r>
               <a:rPr sz="1600" b="0" i="0">
@@ -7806,14 +8225,14 @@
                 </a:solidFill>
                 <a:latin typeface="Montserrat"/>
               </a:rPr>
-              <a:t>Cambio de aparato por otro distinto</a:t>
-            </a:r>
-          </a:p>
-        </p:txBody>
-      </p:sp>
-      <p:sp>
-        <p:nvSpPr>
-          <p:cNvPr id="8" name="imgph" descr="IMGQ:installer replacing section of copper gas pipe"/>
+              <a:t>Validez: cinco años</a:t>
+            </a:r>
+          </a:p>
+        </p:txBody>
+      </p:sp>
+      <p:sp>
+        <p:nvSpPr>
+          <p:cNvPr id="9" name="imgph" descr="IMGQ:gas technician filling revision certificate form"/>
           <p:cNvSpPr/>
           <p:nvPr/>
         </p:nvSpPr>
@@ -7859,7 +8278,7 @@
       </p:sp>
       <p:sp>
         <p:nvSpPr>
-          <p:cNvPr id="9" name="TextBox 8"/>
+          <p:cNvPr id="10" name="TextBox 9"/>
           <p:cNvSpPr txBox="1"/>
           <p:nvPr/>
         </p:nvSpPr>
@@ -7899,7 +8318,7 @@
                 </a:solidFill>
                 <a:latin typeface="Montserrat"/>
               </a:rPr>
-              <a:t>installer replacing section of copper gas pipe</a:t>
+              <a:t>gas technician filling revision certificate form</a:t>
             </a:r>
           </a:p>
         </p:txBody>
@@ -7996,7 +8415,7 @@
                 </a:solidFill>
                 <a:latin typeface="Montserrat"/>
               </a:rPr>
-              <a:t>017 / 020</a:t>
+              <a:t>017 / 021</a:t>
             </a:r>
           </a:p>
         </p:txBody>
@@ -8044,7 +8463,7 @@
         <p:spPr>
           <a:xfrm>
             <a:off x="822960" y="457200"/>
-            <a:ext cx="8229600" cy="365760"/>
+            <a:ext cx="10058400" cy="365760"/>
           </a:xfrm>
           <a:prstGeom prst="rect">
             <a:avLst/>
@@ -8058,9 +8477,9 @@
           <a:lstStyle/>
           <a:p>
             <a:r>
-              <a:rPr sz="1200" b="1" i="0">
-                <a:solidFill>
-                  <a:srgbClr val="64748B"/>
+              <a:rPr sz="1300" b="1" i="0">
+                <a:solidFill>
+                  <a:srgbClr val="E8801A"/>
                 </a:solidFill>
                 <a:latin typeface="Montserrat"/>
               </a:rPr>
@@ -8092,26 +8511,70 @@
           <a:lstStyle/>
           <a:p>
             <a:r>
-              <a:rPr sz="2700" b="1" i="0">
+              <a:rPr sz="2800" b="1" i="0">
                 <a:solidFill>
                   <a:srgbClr val="1E2761"/>
                 </a:solidFill>
                 <a:latin typeface="Montserrat"/>
               </a:rPr>
-              <a:t>La cadena de la modificación</a:t>
-            </a:r>
-          </a:p>
-        </p:txBody>
-      </p:sp>
-      <p:sp>
-        <p:nvSpPr>
-          <p:cNvPr id="7" name="TextBox 6"/>
+              <a:t>La regla del metro</a:t>
+            </a:r>
+          </a:p>
+        </p:txBody>
+      </p:sp>
+      <p:sp>
+        <p:nvSpPr>
+          <p:cNvPr id="7" name="Rounded Rectangle 6"/>
+          <p:cNvSpPr/>
+          <p:nvPr/>
+        </p:nvSpPr>
+        <p:spPr>
+          <a:xfrm>
+            <a:off x="868680" y="1627632"/>
+            <a:ext cx="2011680" cy="73152"/>
+          </a:xfrm>
+          <a:prstGeom prst="roundRect">
+            <a:avLst/>
+          </a:prstGeom>
+          <a:solidFill>
+            <a:srgbClr val="E8801A"/>
+          </a:solidFill>
+          <a:ln>
+            <a:noFill/>
+          </a:ln>
+          <a:effectLst/>
+        </p:spPr>
+        <p:style>
+          <a:lnRef idx="1">
+            <a:schemeClr val="accent1"/>
+          </a:lnRef>
+          <a:fillRef idx="3">
+            <a:schemeClr val="accent1"/>
+          </a:fillRef>
+          <a:effectRef idx="2">
+            <a:schemeClr val="accent1"/>
+          </a:effectRef>
+          <a:fontRef idx="minor">
+            <a:schemeClr val="lt1"/>
+          </a:fontRef>
+        </p:style>
+        <p:txBody>
+          <a:bodyPr rtlCol="0" anchor="ctr"/>
+          <a:lstStyle/>
+          <a:p>
+            <a:pPr algn="ctr"/>
+          </a:p>
+        </p:txBody>
+      </p:sp>
+      <p:sp>
+        <p:nvSpPr>
+          <p:cNvPr id="8" name="TextBox 7"/>
           <p:cNvSpPr txBox="1"/>
           <p:nvPr/>
         </p:nvSpPr>
         <p:spPr>
           <a:xfrm>
-            <a:off x="822960" y="1920240"/>
+            <a:off x="822960" y="1965960"/>
             <a:ext cx="4983480" cy="4206240"/>
           </a:xfrm>
           <a:prstGeom prst="rect">
@@ -8127,17 +8590,17 @@
           <a:p>
             <a:pPr>
               <a:spcAft>
-                <a:spcPts val="1000"/>
+                <a:spcPts val="1100"/>
               </a:spcAft>
             </a:pPr>
             <a:r>
               <a:rPr sz="1600" b="1" i="0">
                 <a:solidFill>
-                  <a:srgbClr val="2E3A80"/>
-                </a:solidFill>
-                <a:latin typeface="Montserrat"/>
-              </a:rPr>
-              <a:t>•  </a:t>
+                  <a:srgbClr val="E8801A"/>
+                </a:solidFill>
+                <a:latin typeface="Montserrat"/>
+              </a:rPr>
+              <a:t>▸  </a:t>
             </a:r>
             <a:r>
               <a:rPr sz="1600" b="0" i="0">
@@ -8146,23 +8609,23 @@
                 </a:solidFill>
                 <a:latin typeface="Montserrat"/>
               </a:rPr>
-              <a:t>Instaladora comunica al suministrador</a:t>
+              <a:t>Cambio de material o trazado &gt; 1 m</a:t>
             </a:r>
           </a:p>
           <a:p>
             <a:pPr>
               <a:spcAft>
-                <a:spcPts val="1000"/>
+                <a:spcPts val="1100"/>
               </a:spcAft>
             </a:pPr>
             <a:r>
               <a:rPr sz="1600" b="1" i="0">
                 <a:solidFill>
-                  <a:srgbClr val="2E3A80"/>
-                </a:solidFill>
-                <a:latin typeface="Montserrat"/>
-              </a:rPr>
-              <a:t>•  </a:t>
+                  <a:srgbClr val="E8801A"/>
+                </a:solidFill>
+                <a:latin typeface="Montserrat"/>
+              </a:rPr>
+              <a:t>▸  </a:t>
             </a:r>
             <a:r>
               <a:rPr sz="1600" b="0" i="0">
@@ -8171,23 +8634,23 @@
                 </a:solidFill>
                 <a:latin typeface="Montserrat"/>
               </a:rPr>
-              <a:t>Suministrador pide enganche al distribuidor</a:t>
+              <a:t>Ampliación de consumo</a:t>
             </a:r>
           </a:p>
           <a:p>
             <a:pPr>
               <a:spcAft>
-                <a:spcPts val="1000"/>
+                <a:spcPts val="1100"/>
               </a:spcAft>
             </a:pPr>
             <a:r>
               <a:rPr sz="1600" b="1" i="0">
                 <a:solidFill>
-                  <a:srgbClr val="2E3A80"/>
-                </a:solidFill>
-                <a:latin typeface="Montserrat"/>
-              </a:rPr>
-              <a:t>•  </a:t>
+                  <a:srgbClr val="E8801A"/>
+                </a:solidFill>
+                <a:latin typeface="Montserrat"/>
+              </a:rPr>
+              <a:t>▸  </a:t>
             </a:r>
             <a:r>
               <a:rPr sz="1600" b="0" i="0">
@@ -8196,39 +8659,14 @@
                 </a:solidFill>
                 <a:latin typeface="Montserrat"/>
               </a:rPr>
-              <a:t>Distribuidor hace pruebas previas</a:t>
-            </a:r>
-          </a:p>
-          <a:p>
-            <a:pPr>
-              <a:spcAft>
-                <a:spcPts val="1000"/>
-              </a:spcAft>
-            </a:pPr>
-            <a:r>
-              <a:rPr sz="1600" b="1" i="0">
-                <a:solidFill>
-                  <a:srgbClr val="2E3A80"/>
-                </a:solidFill>
-                <a:latin typeface="Montserrat"/>
-              </a:rPr>
-              <a:t>•  </a:t>
-            </a:r>
-            <a:r>
-              <a:rPr sz="1600" b="0" i="0">
-                <a:solidFill>
-                  <a:srgbClr val="1B2330"/>
-                </a:solidFill>
-                <a:latin typeface="Montserrat"/>
-              </a:rPr>
-              <a:t>El usuario final paga el enganche</a:t>
-            </a:r>
-          </a:p>
-        </p:txBody>
-      </p:sp>
-      <p:sp>
-        <p:nvSpPr>
-          <p:cNvPr id="8" name="imgph" descr="IMGQ:gas technician connecting meter with tools"/>
+              <a:t>Cambio de aparato por otro distinto</a:t>
+            </a:r>
+          </a:p>
+        </p:txBody>
+      </p:sp>
+      <p:sp>
+        <p:nvSpPr>
+          <p:cNvPr id="9" name="imgph" descr="IMGQ:installer replacing section of copper gas pipe"/>
           <p:cNvSpPr/>
           <p:nvPr/>
         </p:nvSpPr>
@@ -8274,7 +8712,7 @@
       </p:sp>
       <p:sp>
         <p:nvSpPr>
-          <p:cNvPr id="9" name="TextBox 8"/>
+          <p:cNvPr id="10" name="TextBox 9"/>
           <p:cNvSpPr txBox="1"/>
           <p:nvPr/>
         </p:nvSpPr>
@@ -8314,7 +8752,7 @@
                 </a:solidFill>
                 <a:latin typeface="Montserrat"/>
               </a:rPr>
-              <a:t>gas technician connecting meter with tools</a:t>
+              <a:t>installer replacing section of copper gas pipe</a:t>
             </a:r>
           </a:p>
         </p:txBody>
@@ -8411,7 +8849,7 @@
                 </a:solidFill>
                 <a:latin typeface="Montserrat"/>
               </a:rPr>
-              <a:t>018 / 020</a:t>
+              <a:t>018 / 021</a:t>
             </a:r>
           </a:p>
         </p:txBody>
@@ -8459,7 +8897,7 @@
         <p:spPr>
           <a:xfrm>
             <a:off x="822960" y="457200"/>
-            <a:ext cx="8229600" cy="365760"/>
+            <a:ext cx="10058400" cy="365760"/>
           </a:xfrm>
           <a:prstGeom prst="rect">
             <a:avLst/>
@@ -8473,13 +8911,13 @@
           <a:lstStyle/>
           <a:p>
             <a:r>
-              <a:rPr sz="1200" b="1" i="0">
-                <a:solidFill>
-                  <a:srgbClr val="64748B"/>
-                </a:solidFill>
-                <a:latin typeface="Montserrat"/>
-              </a:rPr>
-              <a:t>ANEXO · IMPRESOS</a:t>
+              <a:rPr sz="1300" b="1" i="0">
+                <a:solidFill>
+                  <a:srgbClr val="E8801A"/>
+                </a:solidFill>
+                <a:latin typeface="Montserrat"/>
+              </a:rPr>
+              <a:t>APARTADO 5 · MODIFICACIÓN</a:t>
             </a:r>
           </a:p>
         </p:txBody>
@@ -8507,26 +8945,70 @@
           <a:lstStyle/>
           <a:p>
             <a:r>
-              <a:rPr sz="2700" b="1" i="0">
+              <a:rPr sz="2800" b="1" i="0">
                 <a:solidFill>
                   <a:srgbClr val="1E2761"/>
                 </a:solidFill>
                 <a:latin typeface="Montserrat"/>
               </a:rPr>
-              <a:t>Los cinco modelos IRG</a:t>
-            </a:r>
-          </a:p>
-        </p:txBody>
-      </p:sp>
-      <p:sp>
-        <p:nvSpPr>
-          <p:cNvPr id="7" name="TextBox 6"/>
+              <a:t>La cadena de la modificación</a:t>
+            </a:r>
+          </a:p>
+        </p:txBody>
+      </p:sp>
+      <p:sp>
+        <p:nvSpPr>
+          <p:cNvPr id="7" name="Rounded Rectangle 6"/>
+          <p:cNvSpPr/>
+          <p:nvPr/>
+        </p:nvSpPr>
+        <p:spPr>
+          <a:xfrm>
+            <a:off x="868680" y="1627632"/>
+            <a:ext cx="2011680" cy="73152"/>
+          </a:xfrm>
+          <a:prstGeom prst="roundRect">
+            <a:avLst/>
+          </a:prstGeom>
+          <a:solidFill>
+            <a:srgbClr val="E8801A"/>
+          </a:solidFill>
+          <a:ln>
+            <a:noFill/>
+          </a:ln>
+          <a:effectLst/>
+        </p:spPr>
+        <p:style>
+          <a:lnRef idx="1">
+            <a:schemeClr val="accent1"/>
+          </a:lnRef>
+          <a:fillRef idx="3">
+            <a:schemeClr val="accent1"/>
+          </a:fillRef>
+          <a:effectRef idx="2">
+            <a:schemeClr val="accent1"/>
+          </a:effectRef>
+          <a:fontRef idx="minor">
+            <a:schemeClr val="lt1"/>
+          </a:fontRef>
+        </p:style>
+        <p:txBody>
+          <a:bodyPr rtlCol="0" anchor="ctr"/>
+          <a:lstStyle/>
+          <a:p>
+            <a:pPr algn="ctr"/>
+          </a:p>
+        </p:txBody>
+      </p:sp>
+      <p:sp>
+        <p:nvSpPr>
+          <p:cNvPr id="8" name="TextBox 7"/>
           <p:cNvSpPr txBox="1"/>
           <p:nvPr/>
         </p:nvSpPr>
         <p:spPr>
           <a:xfrm>
-            <a:off x="822960" y="1920240"/>
+            <a:off x="822960" y="1965960"/>
             <a:ext cx="4983480" cy="4206240"/>
           </a:xfrm>
           <a:prstGeom prst="rect">
@@ -8542,17 +9024,17 @@
           <a:p>
             <a:pPr>
               <a:spcAft>
-                <a:spcPts val="1000"/>
+                <a:spcPts val="1100"/>
               </a:spcAft>
             </a:pPr>
             <a:r>
               <a:rPr sz="1600" b="1" i="0">
                 <a:solidFill>
-                  <a:srgbClr val="2E3A80"/>
-                </a:solidFill>
-                <a:latin typeface="Montserrat"/>
-              </a:rPr>
-              <a:t>•  </a:t>
+                  <a:srgbClr val="E8801A"/>
+                </a:solidFill>
+                <a:latin typeface="Montserrat"/>
+              </a:rPr>
+              <a:t>▸  </a:t>
             </a:r>
             <a:r>
               <a:rPr sz="1600" b="0" i="0">
@@ -8561,23 +9043,23 @@
                 </a:solidFill>
                 <a:latin typeface="Montserrat"/>
               </a:rPr>
-              <a:t>IRG-1, 2, 3: instalación (montaje)</a:t>
+              <a:t>Instaladora comunica al suministrador</a:t>
             </a:r>
           </a:p>
           <a:p>
             <a:pPr>
               <a:spcAft>
-                <a:spcPts val="1000"/>
+                <a:spcPts val="1100"/>
               </a:spcAft>
             </a:pPr>
             <a:r>
               <a:rPr sz="1600" b="1" i="0">
                 <a:solidFill>
-                  <a:srgbClr val="2E3A80"/>
-                </a:solidFill>
-                <a:latin typeface="Montserrat"/>
-              </a:rPr>
-              <a:t>•  </a:t>
+                  <a:srgbClr val="E8801A"/>
+                </a:solidFill>
+                <a:latin typeface="Montserrat"/>
+              </a:rPr>
+              <a:t>▸  </a:t>
             </a:r>
             <a:r>
               <a:rPr sz="1600" b="0" i="0">
@@ -8586,23 +9068,23 @@
                 </a:solidFill>
                 <a:latin typeface="Montserrat"/>
               </a:rPr>
-              <a:t>IRG-4, 5: revisión (sin red)</a:t>
+              <a:t>Suministrador pide enganche al distribuidor</a:t>
             </a:r>
           </a:p>
           <a:p>
             <a:pPr>
               <a:spcAft>
-                <a:spcPts val="1000"/>
+                <a:spcPts val="1100"/>
               </a:spcAft>
             </a:pPr>
             <a:r>
               <a:rPr sz="1600" b="1" i="0">
                 <a:solidFill>
-                  <a:srgbClr val="2E3A80"/>
-                </a:solidFill>
-                <a:latin typeface="Montserrat"/>
-              </a:rPr>
-              <a:t>•  </a:t>
+                  <a:srgbClr val="E8801A"/>
+                </a:solidFill>
+                <a:latin typeface="Montserrat"/>
+              </a:rPr>
+              <a:t>▸  </a:t>
             </a:r>
             <a:r>
               <a:rPr sz="1600" b="0" i="0">
@@ -8611,14 +9093,39 @@
                 </a:solidFill>
                 <a:latin typeface="Montserrat"/>
               </a:rPr>
-              <a:t>Inspección de red: sin número IRG</a:t>
-            </a:r>
-          </a:p>
-        </p:txBody>
-      </p:sp>
-      <p:sp>
-        <p:nvSpPr>
-          <p:cNvPr id="8" name="imgph" descr="IMGQ:set of official technical forms on table"/>
+              <a:t>Distribuidor hace pruebas previas</a:t>
+            </a:r>
+          </a:p>
+          <a:p>
+            <a:pPr>
+              <a:spcAft>
+                <a:spcPts val="1100"/>
+              </a:spcAft>
+            </a:pPr>
+            <a:r>
+              <a:rPr sz="1600" b="1" i="0">
+                <a:solidFill>
+                  <a:srgbClr val="E8801A"/>
+                </a:solidFill>
+                <a:latin typeface="Montserrat"/>
+              </a:rPr>
+              <a:t>▸  </a:t>
+            </a:r>
+            <a:r>
+              <a:rPr sz="1600" b="0" i="0">
+                <a:solidFill>
+                  <a:srgbClr val="1B2330"/>
+                </a:solidFill>
+                <a:latin typeface="Montserrat"/>
+              </a:rPr>
+              <a:t>El usuario final paga el enganche</a:t>
+            </a:r>
+          </a:p>
+        </p:txBody>
+      </p:sp>
+      <p:sp>
+        <p:nvSpPr>
+          <p:cNvPr id="9" name="imgph" descr="IMGQ:gas technician connecting meter with tools"/>
           <p:cNvSpPr/>
           <p:nvPr/>
         </p:nvSpPr>
@@ -8664,7 +9171,7 @@
       </p:sp>
       <p:sp>
         <p:nvSpPr>
-          <p:cNvPr id="9" name="TextBox 8"/>
+          <p:cNvPr id="10" name="TextBox 9"/>
           <p:cNvSpPr txBox="1"/>
           <p:nvPr/>
         </p:nvSpPr>
@@ -8704,7 +9211,7 @@
                 </a:solidFill>
                 <a:latin typeface="Montserrat"/>
               </a:rPr>
-              <a:t>set of official technical forms on table</a:t>
+              <a:t>gas technician connecting meter with tools</a:t>
             </a:r>
           </a:p>
         </p:txBody>
@@ -8801,7 +9308,7 @@
                 </a:solidFill>
                 <a:latin typeface="Montserrat"/>
               </a:rPr>
-              <a:t>019 / 020</a:t>
+              <a:t>019 / 021</a:t>
             </a:r>
           </a:p>
         </p:txBody>
@@ -8849,7 +9356,7 @@
         <p:spPr>
           <a:xfrm>
             <a:off x="822960" y="457200"/>
-            <a:ext cx="8229600" cy="365760"/>
+            <a:ext cx="10058400" cy="365760"/>
           </a:xfrm>
           <a:prstGeom prst="rect">
             <a:avLst/>
@@ -8863,13 +9370,13 @@
           <a:lstStyle/>
           <a:p>
             <a:r>
-              <a:rPr sz="1200" b="1" i="0">
-                <a:solidFill>
-                  <a:srgbClr val="64748B"/>
-                </a:solidFill>
-                <a:latin typeface="Montserrat"/>
-              </a:rPr>
-              <a:t>ANEXO · INFORMACIÓN MÍNIMA</a:t>
+              <a:rPr sz="1300" b="1" i="0">
+                <a:solidFill>
+                  <a:srgbClr val="E8801A"/>
+                </a:solidFill>
+                <a:latin typeface="Montserrat"/>
+              </a:rPr>
+              <a:t>ANEXO · IMPRESOS</a:t>
             </a:r>
           </a:p>
         </p:txBody>
@@ -8897,26 +9404,70 @@
           <a:lstStyle/>
           <a:p>
             <a:r>
-              <a:rPr sz="2700" b="1" i="0">
+              <a:rPr sz="2800" b="1" i="0">
                 <a:solidFill>
                   <a:srgbClr val="1E2761"/>
                 </a:solidFill>
                 <a:latin typeface="Montserrat"/>
               </a:rPr>
-              <a:t>Gas natural o GLP: se identifican distinto</a:t>
-            </a:r>
-          </a:p>
-        </p:txBody>
-      </p:sp>
-      <p:sp>
-        <p:nvSpPr>
-          <p:cNvPr id="7" name="TextBox 6"/>
+              <a:t>Los cinco modelos IRG</a:t>
+            </a:r>
+          </a:p>
+        </p:txBody>
+      </p:sp>
+      <p:sp>
+        <p:nvSpPr>
+          <p:cNvPr id="7" name="Rounded Rectangle 6"/>
+          <p:cNvSpPr/>
+          <p:nvPr/>
+        </p:nvSpPr>
+        <p:spPr>
+          <a:xfrm>
+            <a:off x="868680" y="1627632"/>
+            <a:ext cx="2011680" cy="73152"/>
+          </a:xfrm>
+          <a:prstGeom prst="roundRect">
+            <a:avLst/>
+          </a:prstGeom>
+          <a:solidFill>
+            <a:srgbClr val="E8801A"/>
+          </a:solidFill>
+          <a:ln>
+            <a:noFill/>
+          </a:ln>
+          <a:effectLst/>
+        </p:spPr>
+        <p:style>
+          <a:lnRef idx="1">
+            <a:schemeClr val="accent1"/>
+          </a:lnRef>
+          <a:fillRef idx="3">
+            <a:schemeClr val="accent1"/>
+          </a:fillRef>
+          <a:effectRef idx="2">
+            <a:schemeClr val="accent1"/>
+          </a:effectRef>
+          <a:fontRef idx="minor">
+            <a:schemeClr val="lt1"/>
+          </a:fontRef>
+        </p:style>
+        <p:txBody>
+          <a:bodyPr rtlCol="0" anchor="ctr"/>
+          <a:lstStyle/>
+          <a:p>
+            <a:pPr algn="ctr"/>
+          </a:p>
+        </p:txBody>
+      </p:sp>
+      <p:sp>
+        <p:nvSpPr>
+          <p:cNvPr id="8" name="TextBox 7"/>
           <p:cNvSpPr txBox="1"/>
           <p:nvPr/>
         </p:nvSpPr>
         <p:spPr>
           <a:xfrm>
-            <a:off x="822960" y="1920240"/>
+            <a:off x="822960" y="1965960"/>
             <a:ext cx="4983480" cy="4206240"/>
           </a:xfrm>
           <a:prstGeom prst="rect">
@@ -8932,17 +9483,17 @@
           <a:p>
             <a:pPr>
               <a:spcAft>
-                <a:spcPts val="1000"/>
+                <a:spcPts val="1100"/>
               </a:spcAft>
             </a:pPr>
             <a:r>
               <a:rPr sz="1600" b="1" i="0">
                 <a:solidFill>
-                  <a:srgbClr val="2E3A80"/>
-                </a:solidFill>
-                <a:latin typeface="Montserrat"/>
-              </a:rPr>
-              <a:t>•  </a:t>
+                  <a:srgbClr val="E8801A"/>
+                </a:solidFill>
+                <a:latin typeface="Montserrat"/>
+              </a:rPr>
+              <a:t>▸  </a:t>
             </a:r>
             <a:r>
               <a:rPr sz="1600" b="0" i="0">
@@ -8951,23 +9502,23 @@
                 </a:solidFill>
                 <a:latin typeface="Montserrat"/>
               </a:rPr>
-              <a:t>Gas natural → punto de suministro</a:t>
+              <a:t>IRG-1, 2, 3: instalación (montaje)</a:t>
             </a:r>
           </a:p>
           <a:p>
             <a:pPr>
               <a:spcAft>
-                <a:spcPts val="1000"/>
+                <a:spcPts val="1100"/>
               </a:spcAft>
             </a:pPr>
             <a:r>
               <a:rPr sz="1600" b="1" i="0">
                 <a:solidFill>
-                  <a:srgbClr val="2E3A80"/>
-                </a:solidFill>
-                <a:latin typeface="Montserrat"/>
-              </a:rPr>
-              <a:t>•  </a:t>
+                  <a:srgbClr val="E8801A"/>
+                </a:solidFill>
+                <a:latin typeface="Montserrat"/>
+              </a:rPr>
+              <a:t>▸  </a:t>
             </a:r>
             <a:r>
               <a:rPr sz="1600" b="0" i="0">
@@ -8976,23 +9527,23 @@
                 </a:solidFill>
                 <a:latin typeface="Montserrat"/>
               </a:rPr>
-              <a:t>GLP → número de póliza</a:t>
+              <a:t>IRG-4, 5: revisión (sin red)</a:t>
             </a:r>
           </a:p>
           <a:p>
             <a:pPr>
               <a:spcAft>
-                <a:spcPts val="1000"/>
+                <a:spcPts val="1100"/>
               </a:spcAft>
             </a:pPr>
             <a:r>
               <a:rPr sz="1600" b="1" i="0">
                 <a:solidFill>
-                  <a:srgbClr val="2E3A80"/>
-                </a:solidFill>
-                <a:latin typeface="Montserrat"/>
-              </a:rPr>
-              <a:t>•  </a:t>
+                  <a:srgbClr val="E8801A"/>
+                </a:solidFill>
+                <a:latin typeface="Montserrat"/>
+              </a:rPr>
+              <a:t>▸  </a:t>
             </a:r>
             <a:r>
               <a:rPr sz="1600" b="0" i="0">
@@ -9001,14 +9552,14 @@
                 </a:solidFill>
                 <a:latin typeface="Montserrat"/>
               </a:rPr>
-              <a:t>Aparece en todos los impresos</a:t>
-            </a:r>
-          </a:p>
-        </p:txBody>
-      </p:sp>
-      <p:sp>
-        <p:nvSpPr>
-          <p:cNvPr id="8" name="imgph" descr="IMGQ:gas bill document with supply point code"/>
+              <a:t>Inspección de red: sin número IRG</a:t>
+            </a:r>
+          </a:p>
+        </p:txBody>
+      </p:sp>
+      <p:sp>
+        <p:nvSpPr>
+          <p:cNvPr id="9" name="imgph" descr="IMGQ:set of official technical forms on table"/>
           <p:cNvSpPr/>
           <p:nvPr/>
         </p:nvSpPr>
@@ -9054,7 +9605,7 @@
       </p:sp>
       <p:sp>
         <p:nvSpPr>
-          <p:cNvPr id="9" name="TextBox 8"/>
+          <p:cNvPr id="10" name="TextBox 9"/>
           <p:cNvSpPr txBox="1"/>
           <p:nvPr/>
         </p:nvSpPr>
@@ -9094,7 +9645,7 @@
                 </a:solidFill>
                 <a:latin typeface="Montserrat"/>
               </a:rPr>
-              <a:t>gas bill document with supply point code</a:t>
+              <a:t>set of official technical forms on table</a:t>
             </a:r>
           </a:p>
         </p:txBody>
@@ -9191,7 +9742,7 @@
                 </a:solidFill>
                 <a:latin typeface="Montserrat"/>
               </a:rPr>
-              <a:t>002 / 020</a:t>
+              <a:t>002 / 021</a:t>
             </a:r>
           </a:p>
         </p:txBody>
@@ -9255,7 +9806,7 @@
             <a:r>
               <a:rPr sz="2700" b="1" i="0">
                 <a:solidFill>
-                  <a:srgbClr val="1E2761"/>
+                  <a:srgbClr val="E8801A"/>
                 </a:solidFill>
                 <a:latin typeface="Montserrat"/>
               </a:rPr>
@@ -9267,6 +9818,50 @@
       <p:sp>
         <p:nvSpPr>
           <p:cNvPr id="6" name="Rounded Rectangle 5"/>
+          <p:cNvSpPr/>
+          <p:nvPr/>
+        </p:nvSpPr>
+        <p:spPr>
+          <a:xfrm>
+            <a:off x="868680" y="1234440"/>
+            <a:ext cx="1463040" cy="73152"/>
+          </a:xfrm>
+          <a:prstGeom prst="roundRect">
+            <a:avLst/>
+          </a:prstGeom>
+          <a:solidFill>
+            <a:srgbClr val="1E2761"/>
+          </a:solidFill>
+          <a:ln>
+            <a:noFill/>
+          </a:ln>
+          <a:effectLst/>
+        </p:spPr>
+        <p:style>
+          <a:lnRef idx="1">
+            <a:schemeClr val="accent1"/>
+          </a:lnRef>
+          <a:fillRef idx="3">
+            <a:schemeClr val="accent1"/>
+          </a:fillRef>
+          <a:effectRef idx="2">
+            <a:schemeClr val="accent1"/>
+          </a:effectRef>
+          <a:fontRef idx="minor">
+            <a:schemeClr val="lt1"/>
+          </a:fontRef>
+        </p:style>
+        <p:txBody>
+          <a:bodyPr rtlCol="0" anchor="ctr"/>
+          <a:lstStyle/>
+          <a:p>
+            <a:pPr algn="ctr"/>
+          </a:p>
+        </p:txBody>
+      </p:sp>
+      <p:sp>
+        <p:nvSpPr>
+          <p:cNvPr id="7" name="Rounded Rectangle 6"/>
           <p:cNvSpPr/>
           <p:nvPr/>
         </p:nvSpPr>
@@ -9312,7 +9907,7 @@
       </p:sp>
       <p:sp>
         <p:nvSpPr>
-          <p:cNvPr id="7" name="TextBox 6"/>
+          <p:cNvPr id="8" name="TextBox 7"/>
           <p:cNvSpPr txBox="1"/>
           <p:nvPr/>
         </p:nvSpPr>
@@ -9347,7 +9942,7 @@
       </p:sp>
       <p:sp>
         <p:nvSpPr>
-          <p:cNvPr id="8" name="TextBox 7"/>
+          <p:cNvPr id="9" name="TextBox 8"/>
           <p:cNvSpPr txBox="1"/>
           <p:nvPr/>
         </p:nvSpPr>
@@ -9382,7 +9977,7 @@
       </p:sp>
       <p:sp>
         <p:nvSpPr>
-          <p:cNvPr id="9" name="Rounded Rectangle 8"/>
+          <p:cNvPr id="10" name="Rounded Rectangle 9"/>
           <p:cNvSpPr/>
           <p:nvPr/>
         </p:nvSpPr>
@@ -9428,7 +10023,7 @@
       </p:sp>
       <p:sp>
         <p:nvSpPr>
-          <p:cNvPr id="10" name="TextBox 9"/>
+          <p:cNvPr id="11" name="TextBox 10"/>
           <p:cNvSpPr txBox="1"/>
           <p:nvPr/>
         </p:nvSpPr>
@@ -9463,7 +10058,7 @@
       </p:sp>
       <p:sp>
         <p:nvSpPr>
-          <p:cNvPr id="11" name="TextBox 10"/>
+          <p:cNvPr id="12" name="TextBox 11"/>
           <p:cNvSpPr txBox="1"/>
           <p:nvPr/>
         </p:nvSpPr>
@@ -9498,7 +10093,7 @@
       </p:sp>
       <p:sp>
         <p:nvSpPr>
-          <p:cNvPr id="12" name="Rounded Rectangle 11"/>
+          <p:cNvPr id="13" name="Rounded Rectangle 12"/>
           <p:cNvSpPr/>
           <p:nvPr/>
         </p:nvSpPr>
@@ -9544,7 +10139,7 @@
       </p:sp>
       <p:sp>
         <p:nvSpPr>
-          <p:cNvPr id="13" name="TextBox 12"/>
+          <p:cNvPr id="14" name="TextBox 13"/>
           <p:cNvSpPr txBox="1"/>
           <p:nvPr/>
         </p:nvSpPr>
@@ -9579,7 +10174,7 @@
       </p:sp>
       <p:sp>
         <p:nvSpPr>
-          <p:cNvPr id="14" name="TextBox 13"/>
+          <p:cNvPr id="15" name="TextBox 14"/>
           <p:cNvSpPr txBox="1"/>
           <p:nvPr/>
         </p:nvSpPr>
@@ -9645,6 +10240,440 @@
             <a:avLst/>
           </a:prstGeom>
           <a:solidFill>
+            <a:srgbClr val="FFFFFF"/>
+          </a:solidFill>
+          <a:ln>
+            <a:noFill/>
+          </a:ln>
+          <a:effectLst/>
+        </p:spPr>
+        <p:style>
+          <a:lnRef idx="1">
+            <a:schemeClr val="accent1"/>
+          </a:lnRef>
+          <a:fillRef idx="3">
+            <a:schemeClr val="accent1"/>
+          </a:fillRef>
+          <a:effectRef idx="2">
+            <a:schemeClr val="accent1"/>
+          </a:effectRef>
+          <a:fontRef idx="minor">
+            <a:schemeClr val="lt1"/>
+          </a:fontRef>
+        </p:style>
+        <p:txBody>
+          <a:bodyPr rtlCol="0" anchor="ctr"/>
+          <a:lstStyle/>
+          <a:p>
+            <a:pPr algn="ctr"/>
+          </a:p>
+        </p:txBody>
+      </p:sp>
+      <p:sp>
+        <p:nvSpPr>
+          <p:cNvPr id="3" name="TextBox 2"/>
+          <p:cNvSpPr txBox="1"/>
+          <p:nvPr/>
+        </p:nvSpPr>
+        <p:spPr>
+          <a:xfrm>
+            <a:off x="10607040" y="320040"/>
+            <a:ext cx="1371600" cy="365760"/>
+          </a:xfrm>
+          <a:prstGeom prst="rect">
+            <a:avLst/>
+          </a:prstGeom>
+          <a:noFill/>
+        </p:spPr>
+        <p:txBody>
+          <a:bodyPr wrap="square">
+            <a:spAutoFit/>
+          </a:bodyPr>
+          <a:lstStyle/>
+          <a:p>
+            <a:pPr algn="r"/>
+            <a:r>
+              <a:rPr sz="1000" b="1" i="0">
+                <a:solidFill>
+                  <a:srgbClr val="64748B"/>
+                </a:solidFill>
+                <a:latin typeface="Montserrat"/>
+              </a:rPr>
+              <a:t>020 / 021</a:t>
+            </a:r>
+          </a:p>
+        </p:txBody>
+      </p:sp>
+      <p:sp>
+        <p:nvSpPr>
+          <p:cNvPr id="4" name="TextBox 3"/>
+          <p:cNvSpPr txBox="1"/>
+          <p:nvPr/>
+        </p:nvSpPr>
+        <p:spPr>
+          <a:xfrm>
+            <a:off x="457200" y="6419088"/>
+            <a:ext cx="8229600" cy="365760"/>
+          </a:xfrm>
+          <a:prstGeom prst="rect">
+            <a:avLst/>
+          </a:prstGeom>
+          <a:noFill/>
+        </p:spPr>
+        <p:txBody>
+          <a:bodyPr wrap="square">
+            <a:spAutoFit/>
+          </a:bodyPr>
+          <a:lstStyle/>
+          <a:p>
+            <a:r>
+              <a:rPr sz="900" b="0" i="0">
+                <a:solidFill>
+                  <a:srgbClr val="64748B"/>
+                </a:solidFill>
+                <a:latin typeface="Montserrat"/>
+              </a:rPr>
+              <a:t>Curso Gas B · Tema 04 · ITC-ICG 07 · Mantenimiento, inspecciones y revisiones</a:t>
+            </a:r>
+          </a:p>
+        </p:txBody>
+      </p:sp>
+      <p:sp>
+        <p:nvSpPr>
+          <p:cNvPr id="5" name="TextBox 4"/>
+          <p:cNvSpPr txBox="1"/>
+          <p:nvPr/>
+        </p:nvSpPr>
+        <p:spPr>
+          <a:xfrm>
+            <a:off x="822960" y="457200"/>
+            <a:ext cx="10058400" cy="365760"/>
+          </a:xfrm>
+          <a:prstGeom prst="rect">
+            <a:avLst/>
+          </a:prstGeom>
+          <a:noFill/>
+        </p:spPr>
+        <p:txBody>
+          <a:bodyPr wrap="square">
+            <a:spAutoFit/>
+          </a:bodyPr>
+          <a:lstStyle/>
+          <a:p>
+            <a:r>
+              <a:rPr sz="1300" b="1" i="0">
+                <a:solidFill>
+                  <a:srgbClr val="E8801A"/>
+                </a:solidFill>
+                <a:latin typeface="Montserrat"/>
+              </a:rPr>
+              <a:t>ANEXO · INFORMACIÓN MÍNIMA</a:t>
+            </a:r>
+          </a:p>
+        </p:txBody>
+      </p:sp>
+      <p:sp>
+        <p:nvSpPr>
+          <p:cNvPr id="6" name="TextBox 5"/>
+          <p:cNvSpPr txBox="1"/>
+          <p:nvPr/>
+        </p:nvSpPr>
+        <p:spPr>
+          <a:xfrm>
+            <a:off x="822960" y="868680"/>
+            <a:ext cx="10515600" cy="914400"/>
+          </a:xfrm>
+          <a:prstGeom prst="rect">
+            <a:avLst/>
+          </a:prstGeom>
+          <a:noFill/>
+        </p:spPr>
+        <p:txBody>
+          <a:bodyPr wrap="square">
+            <a:spAutoFit/>
+          </a:bodyPr>
+          <a:lstStyle/>
+          <a:p>
+            <a:r>
+              <a:rPr sz="2800" b="1" i="0">
+                <a:solidFill>
+                  <a:srgbClr val="1E2761"/>
+                </a:solidFill>
+                <a:latin typeface="Montserrat"/>
+              </a:rPr>
+              <a:t>Gas natural o GLP: se identifican distinto</a:t>
+            </a:r>
+          </a:p>
+        </p:txBody>
+      </p:sp>
+      <p:sp>
+        <p:nvSpPr>
+          <p:cNvPr id="7" name="Rounded Rectangle 6"/>
+          <p:cNvSpPr/>
+          <p:nvPr/>
+        </p:nvSpPr>
+        <p:spPr>
+          <a:xfrm>
+            <a:off x="868680" y="1627632"/>
+            <a:ext cx="2011680" cy="73152"/>
+          </a:xfrm>
+          <a:prstGeom prst="roundRect">
+            <a:avLst/>
+          </a:prstGeom>
+          <a:solidFill>
+            <a:srgbClr val="E8801A"/>
+          </a:solidFill>
+          <a:ln>
+            <a:noFill/>
+          </a:ln>
+          <a:effectLst/>
+        </p:spPr>
+        <p:style>
+          <a:lnRef idx="1">
+            <a:schemeClr val="accent1"/>
+          </a:lnRef>
+          <a:fillRef idx="3">
+            <a:schemeClr val="accent1"/>
+          </a:fillRef>
+          <a:effectRef idx="2">
+            <a:schemeClr val="accent1"/>
+          </a:effectRef>
+          <a:fontRef idx="minor">
+            <a:schemeClr val="lt1"/>
+          </a:fontRef>
+        </p:style>
+        <p:txBody>
+          <a:bodyPr rtlCol="0" anchor="ctr"/>
+          <a:lstStyle/>
+          <a:p>
+            <a:pPr algn="ctr"/>
+          </a:p>
+        </p:txBody>
+      </p:sp>
+      <p:sp>
+        <p:nvSpPr>
+          <p:cNvPr id="8" name="TextBox 7"/>
+          <p:cNvSpPr txBox="1"/>
+          <p:nvPr/>
+        </p:nvSpPr>
+        <p:spPr>
+          <a:xfrm>
+            <a:off x="822960" y="1965960"/>
+            <a:ext cx="4983480" cy="4206240"/>
+          </a:xfrm>
+          <a:prstGeom prst="rect">
+            <a:avLst/>
+          </a:prstGeom>
+          <a:noFill/>
+        </p:spPr>
+        <p:txBody>
+          <a:bodyPr wrap="square">
+            <a:spAutoFit/>
+          </a:bodyPr>
+          <a:lstStyle/>
+          <a:p>
+            <a:pPr>
+              <a:spcAft>
+                <a:spcPts val="1100"/>
+              </a:spcAft>
+            </a:pPr>
+            <a:r>
+              <a:rPr sz="1600" b="1" i="0">
+                <a:solidFill>
+                  <a:srgbClr val="E8801A"/>
+                </a:solidFill>
+                <a:latin typeface="Montserrat"/>
+              </a:rPr>
+              <a:t>▸  </a:t>
+            </a:r>
+            <a:r>
+              <a:rPr sz="1600" b="0" i="0">
+                <a:solidFill>
+                  <a:srgbClr val="1B2330"/>
+                </a:solidFill>
+                <a:latin typeface="Montserrat"/>
+              </a:rPr>
+              <a:t>Gas natural → punto de suministro</a:t>
+            </a:r>
+          </a:p>
+          <a:p>
+            <a:pPr>
+              <a:spcAft>
+                <a:spcPts val="1100"/>
+              </a:spcAft>
+            </a:pPr>
+            <a:r>
+              <a:rPr sz="1600" b="1" i="0">
+                <a:solidFill>
+                  <a:srgbClr val="E8801A"/>
+                </a:solidFill>
+                <a:latin typeface="Montserrat"/>
+              </a:rPr>
+              <a:t>▸  </a:t>
+            </a:r>
+            <a:r>
+              <a:rPr sz="1600" b="0" i="0">
+                <a:solidFill>
+                  <a:srgbClr val="1B2330"/>
+                </a:solidFill>
+                <a:latin typeface="Montserrat"/>
+              </a:rPr>
+              <a:t>GLP → número de póliza</a:t>
+            </a:r>
+          </a:p>
+          <a:p>
+            <a:pPr>
+              <a:spcAft>
+                <a:spcPts val="1100"/>
+              </a:spcAft>
+            </a:pPr>
+            <a:r>
+              <a:rPr sz="1600" b="1" i="0">
+                <a:solidFill>
+                  <a:srgbClr val="E8801A"/>
+                </a:solidFill>
+                <a:latin typeface="Montserrat"/>
+              </a:rPr>
+              <a:t>▸  </a:t>
+            </a:r>
+            <a:r>
+              <a:rPr sz="1600" b="0" i="0">
+                <a:solidFill>
+                  <a:srgbClr val="1B2330"/>
+                </a:solidFill>
+                <a:latin typeface="Montserrat"/>
+              </a:rPr>
+              <a:t>Aparece en todos los impresos</a:t>
+            </a:r>
+          </a:p>
+        </p:txBody>
+      </p:sp>
+      <p:sp>
+        <p:nvSpPr>
+          <p:cNvPr id="9" name="imgph" descr="IMGQ:gas bill document with supply point code"/>
+          <p:cNvSpPr/>
+          <p:nvPr/>
+        </p:nvSpPr>
+        <p:spPr>
+          <a:xfrm>
+            <a:off x="5806440" y="1051560"/>
+            <a:ext cx="5298947" cy="4629150"/>
+          </a:xfrm>
+          <a:prstGeom prst="roundRect">
+            <a:avLst/>
+          </a:prstGeom>
+          <a:solidFill>
+            <a:srgbClr val="F3F6FB"/>
+          </a:solidFill>
+          <a:ln w="12700">
+            <a:solidFill>
+              <a:srgbClr val="C7D2E6"/>
+            </a:solidFill>
+          </a:ln>
+          <a:effectLst/>
+        </p:spPr>
+        <p:style>
+          <a:lnRef idx="1">
+            <a:schemeClr val="accent1"/>
+          </a:lnRef>
+          <a:fillRef idx="3">
+            <a:schemeClr val="accent1"/>
+          </a:fillRef>
+          <a:effectRef idx="2">
+            <a:schemeClr val="accent1"/>
+          </a:effectRef>
+          <a:fontRef idx="minor">
+            <a:schemeClr val="lt1"/>
+          </a:fontRef>
+        </p:style>
+        <p:txBody>
+          <a:bodyPr rtlCol="0" anchor="ctr"/>
+          <a:lstStyle/>
+          <a:p>
+            <a:pPr algn="ctr"/>
+          </a:p>
+        </p:txBody>
+      </p:sp>
+      <p:sp>
+        <p:nvSpPr>
+          <p:cNvPr id="10" name="TextBox 9"/>
+          <p:cNvSpPr txBox="1"/>
+          <p:nvPr/>
+        </p:nvSpPr>
+        <p:spPr>
+          <a:xfrm>
+            <a:off x="6080760" y="2726055"/>
+            <a:ext cx="4750307" cy="1280160"/>
+          </a:xfrm>
+          <a:prstGeom prst="rect">
+            <a:avLst/>
+          </a:prstGeom>
+          <a:noFill/>
+        </p:spPr>
+        <p:txBody>
+          <a:bodyPr wrap="square">
+            <a:spAutoFit/>
+          </a:bodyPr>
+          <a:lstStyle/>
+          <a:p>
+            <a:pPr algn="ctr"/>
+            <a:r>
+              <a:rPr sz="1400" b="1" i="0">
+                <a:solidFill>
+                  <a:srgbClr val="64748B"/>
+                </a:solidFill>
+                <a:latin typeface="Montserrat"/>
+              </a:rPr>
+              <a:t>IMAGEN REALISTA</a:t>
+            </a:r>
+          </a:p>
+          <a:p>
+            <a:pPr algn="ctr"/>
+            <a:r>
+              <a:rPr sz="1100" b="0" i="1">
+                <a:solidFill>
+                  <a:srgbClr val="64748B"/>
+                </a:solidFill>
+                <a:latin typeface="Montserrat"/>
+              </a:rPr>
+              <a:t>gas bill document with supply point code</a:t>
+            </a:r>
+          </a:p>
+        </p:txBody>
+      </p:sp>
+    </p:spTree>
+  </p:cSld>
+  <p:clrMapOvr>
+    <a:masterClrMapping/>
+  </p:clrMapOvr>
+</p:sld>
+</file>
+
+<file path=ppt/slides/slide21.xml><?xml version="1.0" encoding="utf-8"?>
+<p:sld xmlns:a="http://schemas.openxmlformats.org/drawingml/2006/main" xmlns:p="http://schemas.openxmlformats.org/presentationml/2006/main" xmlns:r="http://schemas.openxmlformats.org/officeDocument/2006/relationships">
+  <p:cSld>
+    <p:spTree>
+      <p:nvGrpSpPr>
+        <p:cNvPr id="1" name=""/>
+        <p:cNvGrpSpPr/>
+        <p:nvPr/>
+      </p:nvGrpSpPr>
+      <p:grpSpPr/>
+      <p:sp>
+        <p:nvSpPr>
+          <p:cNvPr id="2" name="Rectangle 1"/>
+          <p:cNvSpPr/>
+          <p:nvPr/>
+        </p:nvSpPr>
+        <p:spPr>
+          <a:xfrm>
+            <a:off x="0" y="0"/>
+            <a:ext cx="12191695" cy="6858000"/>
+          </a:xfrm>
+          <a:prstGeom prst="rect">
+            <a:avLst/>
+          </a:prstGeom>
+          <a:solidFill>
             <a:srgbClr val="1E2761"/>
           </a:solidFill>
           <a:ln>
@@ -9699,7 +10728,7 @@
             <a:r>
               <a:rPr sz="1400" b="1" i="0">
                 <a:solidFill>
-                  <a:srgbClr val="CADCFC"/>
+                  <a:srgbClr val="F4A24C"/>
                 </a:solidFill>
                 <a:latin typeface="Montserrat"/>
               </a:rPr>
@@ -9710,13 +10739,57 @@
       </p:sp>
       <p:sp>
         <p:nvSpPr>
-          <p:cNvPr id="4" name="TextBox 3"/>
+          <p:cNvPr id="4" name="Rounded Rectangle 3"/>
+          <p:cNvSpPr/>
+          <p:nvPr/>
+        </p:nvSpPr>
+        <p:spPr>
+          <a:xfrm>
+            <a:off x="868680" y="1051560"/>
+            <a:ext cx="1463040" cy="82296"/>
+          </a:xfrm>
+          <a:prstGeom prst="roundRect">
+            <a:avLst/>
+          </a:prstGeom>
+          <a:solidFill>
+            <a:srgbClr val="E8801A"/>
+          </a:solidFill>
+          <a:ln>
+            <a:noFill/>
+          </a:ln>
+          <a:effectLst/>
+        </p:spPr>
+        <p:style>
+          <a:lnRef idx="1">
+            <a:schemeClr val="accent1"/>
+          </a:lnRef>
+          <a:fillRef idx="3">
+            <a:schemeClr val="accent1"/>
+          </a:fillRef>
+          <a:effectRef idx="2">
+            <a:schemeClr val="accent1"/>
+          </a:effectRef>
+          <a:fontRef idx="minor">
+            <a:schemeClr val="lt1"/>
+          </a:fontRef>
+        </p:style>
+        <p:txBody>
+          <a:bodyPr rtlCol="0" anchor="ctr"/>
+          <a:lstStyle/>
+          <a:p>
+            <a:pPr algn="ctr"/>
+          </a:p>
+        </p:txBody>
+      </p:sp>
+      <p:sp>
+        <p:nvSpPr>
+          <p:cNvPr id="5" name="TextBox 4"/>
           <p:cNvSpPr txBox="1"/>
           <p:nvPr/>
         </p:nvSpPr>
         <p:spPr>
           <a:xfrm>
-            <a:off x="822960" y="1143000"/>
+            <a:off x="822960" y="1234440"/>
             <a:ext cx="10515600" cy="1097280"/>
           </a:xfrm>
           <a:prstGeom prst="rect">
@@ -9744,14 +10817,14 @@
       </p:sp>
       <p:sp>
         <p:nvSpPr>
-          <p:cNvPr id="5" name="TextBox 4"/>
+          <p:cNvPr id="6" name="TextBox 5"/>
           <p:cNvSpPr txBox="1"/>
           <p:nvPr/>
         </p:nvSpPr>
         <p:spPr>
           <a:xfrm>
-            <a:off x="822960" y="2514600"/>
-            <a:ext cx="10515600" cy="2834640"/>
+            <a:off x="822960" y="2606040"/>
+            <a:ext cx="10515600" cy="2743200"/>
           </a:xfrm>
           <a:prstGeom prst="rect">
             <a:avLst/>
@@ -9772,7 +10845,7 @@
             <a:r>
               <a:rPr sz="2000" b="1" i="0">
                 <a:solidFill>
-                  <a:srgbClr val="CADCFC"/>
+                  <a:srgbClr val="F4A24C"/>
                 </a:solidFill>
                 <a:latin typeface="Montserrat"/>
               </a:rPr>
@@ -9797,7 +10870,7 @@
             <a:r>
               <a:rPr sz="2000" b="1" i="0">
                 <a:solidFill>
-                  <a:srgbClr val="CADCFC"/>
+                  <a:srgbClr val="F4A24C"/>
                 </a:solidFill>
                 <a:latin typeface="Montserrat"/>
               </a:rPr>
@@ -9822,7 +10895,7 @@
             <a:r>
               <a:rPr sz="2000" b="1" i="0">
                 <a:solidFill>
-                  <a:srgbClr val="CADCFC"/>
+                  <a:srgbClr val="F4A24C"/>
                 </a:solidFill>
                 <a:latin typeface="Montserrat"/>
               </a:rPr>
@@ -9847,7 +10920,7 @@
             <a:r>
               <a:rPr sz="2000" b="1" i="0">
                 <a:solidFill>
-                  <a:srgbClr val="CADCFC"/>
+                  <a:srgbClr val="F4A24C"/>
                 </a:solidFill>
                 <a:latin typeface="Montserrat"/>
               </a:rPr>
@@ -9867,20 +10940,20 @@
       </p:sp>
       <p:sp>
         <p:nvSpPr>
-          <p:cNvPr id="6" name="Rounded Rectangle 5"/>
+          <p:cNvPr id="7" name="Rounded Rectangle 6"/>
           <p:cNvSpPr/>
           <p:nvPr/>
         </p:nvSpPr>
         <p:spPr>
           <a:xfrm>
             <a:off x="822960" y="5532120"/>
-            <a:ext cx="10515600" cy="777240"/>
+            <a:ext cx="10515600" cy="822960"/>
           </a:xfrm>
           <a:prstGeom prst="roundRect">
             <a:avLst/>
           </a:prstGeom>
           <a:solidFill>
-            <a:srgbClr val="2E3A80"/>
+            <a:srgbClr val="E8801A"/>
           </a:solidFill>
           <a:ln>
             <a:noFill/>
@@ -9911,13 +10984,13 @@
       </p:sp>
       <p:sp>
         <p:nvSpPr>
-          <p:cNvPr id="7" name="TextBox 6"/>
+          <p:cNvPr id="8" name="TextBox 7"/>
           <p:cNvSpPr txBox="1"/>
           <p:nvPr/>
         </p:nvSpPr>
         <p:spPr>
           <a:xfrm>
-            <a:off x="1051560" y="5605272"/>
+            <a:off x="1051560" y="5623560"/>
             <a:ext cx="10058400" cy="640080"/>
           </a:xfrm>
           <a:prstGeom prst="rect">
@@ -9934,7 +11007,7 @@
             <a:r>
               <a:rPr sz="1500" b="1" i="1">
                 <a:solidFill>
-                  <a:srgbClr val="CADCFC"/>
+                  <a:srgbClr val="1E2761"/>
                 </a:solidFill>
                 <a:latin typeface="Montserrat"/>
               </a:rPr>
@@ -10035,7 +11108,7 @@
                 </a:solidFill>
                 <a:latin typeface="Montserrat"/>
               </a:rPr>
-              <a:t>003 / 020</a:t>
+              <a:t>003 / 021</a:t>
             </a:r>
           </a:p>
         </p:txBody>
@@ -10082,7 +11155,7 @@
         </p:nvSpPr>
         <p:spPr>
           <a:xfrm>
-            <a:off x="822960" y="457200"/>
+            <a:off x="822960" y="502920"/>
             <a:ext cx="8229600" cy="365760"/>
           </a:xfrm>
           <a:prstGeom prst="rect">
@@ -10097,13 +11170,13 @@
           <a:lstStyle/>
           <a:p>
             <a:r>
-              <a:rPr sz="1200" b="1" i="0">
-                <a:solidFill>
-                  <a:srgbClr val="64748B"/>
-                </a:solidFill>
-                <a:latin typeface="Montserrat"/>
-              </a:rPr>
-              <a:t>APARTADO 4 · MANTENIMIENTO</a:t>
+              <a:rPr sz="1300" b="1" i="0">
+                <a:solidFill>
+                  <a:srgbClr val="E8801A"/>
+                </a:solidFill>
+                <a:latin typeface="Montserrat"/>
+              </a:rPr>
+              <a:t>PARTES DE ESTE VÍDEO</a:t>
             </a:r>
           </a:p>
         </p:txBody>
@@ -10116,7 +11189,7 @@
         </p:nvSpPr>
         <p:spPr>
           <a:xfrm>
-            <a:off x="822960" y="868680"/>
+            <a:off x="822960" y="914400"/>
             <a:ext cx="10515600" cy="914400"/>
           </a:xfrm>
           <a:prstGeom prst="rect">
@@ -10137,130 +11210,30 @@
                 </a:solidFill>
                 <a:latin typeface="Montserrat"/>
               </a:rPr>
-              <a:t>¿Quién mantiene la instalación?</a:t>
-            </a:r>
-          </a:p>
-        </p:txBody>
-      </p:sp>
-      <p:sp>
-        <p:nvSpPr>
-          <p:cNvPr id="7" name="TextBox 6"/>
-          <p:cNvSpPr txBox="1"/>
-          <p:nvPr/>
-        </p:nvSpPr>
-        <p:spPr>
-          <a:xfrm>
-            <a:off x="822960" y="1920240"/>
-            <a:ext cx="4983480" cy="4206240"/>
-          </a:xfrm>
-          <a:prstGeom prst="rect">
-            <a:avLst/>
-          </a:prstGeom>
-          <a:noFill/>
-        </p:spPr>
-        <p:txBody>
-          <a:bodyPr wrap="square">
-            <a:spAutoFit/>
-          </a:bodyPr>
-          <a:lstStyle/>
-          <a:p>
-            <a:pPr>
-              <a:spcAft>
-                <a:spcPts val="1000"/>
-              </a:spcAft>
-            </a:pPr>
-            <a:r>
-              <a:rPr sz="1600" b="1" i="0">
-                <a:solidFill>
-                  <a:srgbClr val="2E3A80"/>
-                </a:solidFill>
-                <a:latin typeface="Montserrat"/>
-              </a:rPr>
-              <a:t>•  </a:t>
-            </a:r>
-            <a:r>
-              <a:rPr sz="1600" b="0" i="0">
-                <a:solidFill>
-                  <a:srgbClr val="1B2330"/>
-                </a:solidFill>
-                <a:latin typeface="Montserrat"/>
-              </a:rPr>
-              <a:t>El titular es el responsable</a:t>
-            </a:r>
-          </a:p>
-          <a:p>
-            <a:pPr>
-              <a:spcAft>
-                <a:spcPts val="1000"/>
-              </a:spcAft>
-            </a:pPr>
-            <a:r>
-              <a:rPr sz="1600" b="1" i="0">
-                <a:solidFill>
-                  <a:srgbClr val="2E3A80"/>
-                </a:solidFill>
-                <a:latin typeface="Montserrat"/>
-              </a:rPr>
-              <a:t>•  </a:t>
-            </a:r>
-            <a:r>
-              <a:rPr sz="1600" b="0" i="0">
-                <a:solidFill>
-                  <a:srgbClr val="1B2330"/>
-                </a:solidFill>
-                <a:latin typeface="Montserrat"/>
-              </a:rPr>
-              <a:t>En su defecto, los usuarios</a:t>
-            </a:r>
-          </a:p>
-          <a:p>
-            <a:pPr>
-              <a:spcAft>
-                <a:spcPts val="1000"/>
-              </a:spcAft>
-            </a:pPr>
-            <a:r>
-              <a:rPr sz="1600" b="1" i="0">
-                <a:solidFill>
-                  <a:srgbClr val="2E3A80"/>
-                </a:solidFill>
-                <a:latin typeface="Montserrat"/>
-              </a:rPr>
-              <a:t>•  </a:t>
-            </a:r>
-            <a:r>
-              <a:rPr sz="1600" b="0" i="0">
-                <a:solidFill>
-                  <a:srgbClr val="1B2330"/>
-                </a:solidFill>
-                <a:latin typeface="Montserrat"/>
-              </a:rPr>
-              <a:t>Modificaciones: siempre un instalador</a:t>
-            </a:r>
-          </a:p>
-        </p:txBody>
-      </p:sp>
-      <p:sp>
-        <p:nvSpPr>
-          <p:cNvPr id="8" name="imgph" descr="IMGQ:homeowner checking gas boiler at home"/>
+              <a:t>En este vídeo</a:t>
+            </a:r>
+          </a:p>
+        </p:txBody>
+      </p:sp>
+      <p:sp>
+        <p:nvSpPr>
+          <p:cNvPr id="7" name="Rounded Rectangle 6"/>
           <p:cNvSpPr/>
           <p:nvPr/>
         </p:nvSpPr>
         <p:spPr>
           <a:xfrm>
-            <a:off x="5806440" y="1051560"/>
-            <a:ext cx="5298947" cy="4629150"/>
+            <a:off x="868680" y="1673352"/>
+            <a:ext cx="2011680" cy="73152"/>
           </a:xfrm>
           <a:prstGeom prst="roundRect">
             <a:avLst/>
           </a:prstGeom>
           <a:solidFill>
-            <a:srgbClr val="F3F6FB"/>
+            <a:srgbClr val="E8801A"/>
           </a:solidFill>
-          <a:ln w="12700">
-            <a:solidFill>
-              <a:srgbClr val="C7D2E6"/>
-            </a:solidFill>
+          <a:ln>
+            <a:noFill/>
           </a:ln>
           <a:effectLst/>
         </p:spPr>
@@ -10288,14 +11261,14 @@
       </p:sp>
       <p:sp>
         <p:nvSpPr>
-          <p:cNvPr id="9" name="TextBox 8"/>
+          <p:cNvPr id="8" name="TextBox 7"/>
           <p:cNvSpPr txBox="1"/>
           <p:nvPr/>
         </p:nvSpPr>
         <p:spPr>
           <a:xfrm>
-            <a:off x="6080760" y="2726055"/>
-            <a:ext cx="4750307" cy="1280160"/>
+            <a:off x="822960" y="2103120"/>
+            <a:ext cx="10515600" cy="4023360"/>
           </a:xfrm>
           <a:prstGeom prst="rect">
             <a:avLst/>
@@ -10308,27 +11281,153 @@
           </a:bodyPr>
           <a:lstStyle/>
           <a:p>
-            <a:pPr algn="ctr"/>
-            <a:r>
-              <a:rPr sz="1400" b="1" i="0">
-                <a:solidFill>
-                  <a:srgbClr val="64748B"/>
-                </a:solidFill>
-                <a:latin typeface="Montserrat"/>
-              </a:rPr>
-              <a:t>IMAGEN REALISTA</a:t>
-            </a:r>
-          </a:p>
-          <a:p>
-            <a:pPr algn="ctr"/>
-            <a:r>
-              <a:rPr sz="1100" b="0" i="1">
-                <a:solidFill>
-                  <a:srgbClr val="64748B"/>
-                </a:solidFill>
-                <a:latin typeface="Montserrat"/>
-              </a:rPr>
-              <a:t>homeowner checking gas boiler at home</a:t>
+            <a:pPr>
+              <a:spcAft>
+                <a:spcPts val="900"/>
+              </a:spcAft>
+            </a:pPr>
+            <a:r>
+              <a:rPr sz="1800" b="1" i="0">
+                <a:solidFill>
+                  <a:srgbClr val="E8801A"/>
+                </a:solidFill>
+                <a:latin typeface="Montserrat"/>
+              </a:rPr>
+              <a:t>01   </a:t>
+            </a:r>
+            <a:r>
+              <a:rPr sz="1700" b="0" i="0">
+                <a:solidFill>
+                  <a:srgbClr val="1B2330"/>
+                </a:solidFill>
+                <a:latin typeface="Montserrat"/>
+              </a:rPr>
+              <a:t>Apartado 4</a:t>
+            </a:r>
+          </a:p>
+          <a:p>
+            <a:pPr>
+              <a:spcAft>
+                <a:spcPts val="900"/>
+              </a:spcAft>
+            </a:pPr>
+            <a:r>
+              <a:rPr sz="1800" b="1" i="0">
+                <a:solidFill>
+                  <a:srgbClr val="E8801A"/>
+                </a:solidFill>
+                <a:latin typeface="Montserrat"/>
+              </a:rPr>
+              <a:t>02   </a:t>
+            </a:r>
+            <a:r>
+              <a:rPr sz="1700" b="0" i="0">
+                <a:solidFill>
+                  <a:srgbClr val="1B2330"/>
+                </a:solidFill>
+                <a:latin typeface="Montserrat"/>
+              </a:rPr>
+              <a:t>Apartado 4.1</a:t>
+            </a:r>
+          </a:p>
+          <a:p>
+            <a:pPr>
+              <a:spcAft>
+                <a:spcPts val="900"/>
+              </a:spcAft>
+            </a:pPr>
+            <a:r>
+              <a:rPr sz="1800" b="1" i="0">
+                <a:solidFill>
+                  <a:srgbClr val="E8801A"/>
+                </a:solidFill>
+                <a:latin typeface="Montserrat"/>
+              </a:rPr>
+              <a:t>03   </a:t>
+            </a:r>
+            <a:r>
+              <a:rPr sz="1700" b="0" i="0">
+                <a:solidFill>
+                  <a:srgbClr val="1B2330"/>
+                </a:solidFill>
+                <a:latin typeface="Montserrat"/>
+              </a:rPr>
+              <a:t>Apartado 4.1.1</a:t>
+            </a:r>
+          </a:p>
+          <a:p>
+            <a:pPr>
+              <a:spcAft>
+                <a:spcPts val="900"/>
+              </a:spcAft>
+            </a:pPr>
+            <a:r>
+              <a:rPr sz="1800" b="1" i="0">
+                <a:solidFill>
+                  <a:srgbClr val="E8801A"/>
+                </a:solidFill>
+                <a:latin typeface="Montserrat"/>
+              </a:rPr>
+              <a:t>04   </a:t>
+            </a:r>
+            <a:r>
+              <a:rPr sz="1700" b="0" i="0">
+                <a:solidFill>
+                  <a:srgbClr val="1B2330"/>
+                </a:solidFill>
+                <a:latin typeface="Montserrat"/>
+              </a:rPr>
+              <a:t>Apartado 4.2</a:t>
+            </a:r>
+          </a:p>
+          <a:p>
+            <a:pPr>
+              <a:spcAft>
+                <a:spcPts val="900"/>
+              </a:spcAft>
+            </a:pPr>
+            <a:r>
+              <a:rPr sz="1800" b="1" i="0">
+                <a:solidFill>
+                  <a:srgbClr val="E8801A"/>
+                </a:solidFill>
+                <a:latin typeface="Montserrat"/>
+              </a:rPr>
+              <a:t>05   </a:t>
+            </a:r>
+            <a:r>
+              <a:rPr sz="1700" b="0" i="0">
+                <a:solidFill>
+                  <a:srgbClr val="1B2330"/>
+                </a:solidFill>
+                <a:latin typeface="Montserrat"/>
+              </a:rPr>
+              <a:t>Apartado 5</a:t>
+            </a:r>
+          </a:p>
+          <a:p>
+            <a:pPr>
+              <a:spcAft>
+                <a:spcPts val="900"/>
+              </a:spcAft>
+            </a:pPr>
+            <a:r>
+              <a:rPr sz="1800" b="1" i="0">
+                <a:solidFill>
+                  <a:srgbClr val="E8801A"/>
+                </a:solidFill>
+                <a:latin typeface="Montserrat"/>
+              </a:rPr>
+              <a:t>06   </a:t>
+            </a:r>
+            <a:r>
+              <a:rPr sz="1700" b="0" i="0">
+                <a:solidFill>
+                  <a:srgbClr val="1B2330"/>
+                </a:solidFill>
+                <a:latin typeface="Montserrat"/>
+              </a:rPr>
+              <a:t>Anexo</a:t>
             </a:r>
           </a:p>
         </p:txBody>
@@ -10425,7 +11524,7 @@
                 </a:solidFill>
                 <a:latin typeface="Montserrat"/>
               </a:rPr>
-              <a:t>004 / 020</a:t>
+              <a:t>004 / 021</a:t>
             </a:r>
           </a:p>
         </p:txBody>
@@ -10473,7 +11572,7 @@
         <p:spPr>
           <a:xfrm>
             <a:off x="822960" y="457200"/>
-            <a:ext cx="8229600" cy="365760"/>
+            <a:ext cx="10058400" cy="365760"/>
           </a:xfrm>
           <a:prstGeom prst="rect">
             <a:avLst/>
@@ -10487,13 +11586,13 @@
           <a:lstStyle/>
           <a:p>
             <a:r>
-              <a:rPr sz="1200" b="1" i="0">
-                <a:solidFill>
-                  <a:srgbClr val="64748B"/>
-                </a:solidFill>
-                <a:latin typeface="Montserrat"/>
-              </a:rPr>
-              <a:t>APARTADO 4 · LA GRAN DISTINCIÓN</a:t>
+              <a:rPr sz="1300" b="1" i="0">
+                <a:solidFill>
+                  <a:srgbClr val="E8801A"/>
+                </a:solidFill>
+                <a:latin typeface="Montserrat"/>
+              </a:rPr>
+              <a:t>APARTADO 4 · MANTENIMIENTO</a:t>
             </a:r>
           </a:p>
         </p:txBody>
@@ -10521,26 +11620,70 @@
           <a:lstStyle/>
           <a:p>
             <a:r>
-              <a:rPr sz="2700" b="1" i="0">
+              <a:rPr sz="2800" b="1" i="0">
                 <a:solidFill>
                   <a:srgbClr val="1E2761"/>
                 </a:solidFill>
                 <a:latin typeface="Montserrat"/>
               </a:rPr>
-              <a:t>Inspección o revisión: una pregunta</a:t>
-            </a:r>
-          </a:p>
-        </p:txBody>
-      </p:sp>
-      <p:sp>
-        <p:nvSpPr>
-          <p:cNvPr id="7" name="TextBox 6"/>
+              <a:t>¿Quién mantiene la instalación?</a:t>
+            </a:r>
+          </a:p>
+        </p:txBody>
+      </p:sp>
+      <p:sp>
+        <p:nvSpPr>
+          <p:cNvPr id="7" name="Rounded Rectangle 6"/>
+          <p:cNvSpPr/>
+          <p:nvPr/>
+        </p:nvSpPr>
+        <p:spPr>
+          <a:xfrm>
+            <a:off x="868680" y="1627632"/>
+            <a:ext cx="2011680" cy="73152"/>
+          </a:xfrm>
+          <a:prstGeom prst="roundRect">
+            <a:avLst/>
+          </a:prstGeom>
+          <a:solidFill>
+            <a:srgbClr val="E8801A"/>
+          </a:solidFill>
+          <a:ln>
+            <a:noFill/>
+          </a:ln>
+          <a:effectLst/>
+        </p:spPr>
+        <p:style>
+          <a:lnRef idx="1">
+            <a:schemeClr val="accent1"/>
+          </a:lnRef>
+          <a:fillRef idx="3">
+            <a:schemeClr val="accent1"/>
+          </a:fillRef>
+          <a:effectRef idx="2">
+            <a:schemeClr val="accent1"/>
+          </a:effectRef>
+          <a:fontRef idx="minor">
+            <a:schemeClr val="lt1"/>
+          </a:fontRef>
+        </p:style>
+        <p:txBody>
+          <a:bodyPr rtlCol="0" anchor="ctr"/>
+          <a:lstStyle/>
+          <a:p>
+            <a:pPr algn="ctr"/>
+          </a:p>
+        </p:txBody>
+      </p:sp>
+      <p:sp>
+        <p:nvSpPr>
+          <p:cNvPr id="8" name="TextBox 7"/>
           <p:cNvSpPr txBox="1"/>
           <p:nvPr/>
         </p:nvSpPr>
         <p:spPr>
           <a:xfrm>
-            <a:off x="822960" y="1920240"/>
+            <a:off x="822960" y="1965960"/>
             <a:ext cx="4983480" cy="4206240"/>
           </a:xfrm>
           <a:prstGeom prst="rect">
@@ -10556,17 +11699,17 @@
           <a:p>
             <a:pPr>
               <a:spcAft>
-                <a:spcPts val="1000"/>
+                <a:spcPts val="1100"/>
               </a:spcAft>
             </a:pPr>
             <a:r>
               <a:rPr sz="1600" b="1" i="0">
                 <a:solidFill>
-                  <a:srgbClr val="2E3A80"/>
-                </a:solidFill>
-                <a:latin typeface="Montserrat"/>
-              </a:rPr>
-              <a:t>•  </a:t>
+                  <a:srgbClr val="E8801A"/>
+                </a:solidFill>
+                <a:latin typeface="Montserrat"/>
+              </a:rPr>
+              <a:t>▸  </a:t>
             </a:r>
             <a:r>
               <a:rPr sz="1600" b="0" i="0">
@@ -10575,23 +11718,23 @@
                 </a:solidFill>
                 <a:latin typeface="Montserrat"/>
               </a:rPr>
-              <a:t>¿Está conectada a la red?</a:t>
+              <a:t>El titular es el responsable</a:t>
             </a:r>
           </a:p>
           <a:p>
             <a:pPr>
               <a:spcAft>
-                <a:spcPts val="1000"/>
+                <a:spcPts val="1100"/>
               </a:spcAft>
             </a:pPr>
             <a:r>
               <a:rPr sz="1600" b="1" i="0">
                 <a:solidFill>
-                  <a:srgbClr val="2E3A80"/>
-                </a:solidFill>
-                <a:latin typeface="Montserrat"/>
-              </a:rPr>
-              <a:t>•  </a:t>
+                  <a:srgbClr val="E8801A"/>
+                </a:solidFill>
+                <a:latin typeface="Montserrat"/>
+              </a:rPr>
+              <a:t>▸  </a:t>
             </a:r>
             <a:r>
               <a:rPr sz="1600" b="0" i="0">
@@ -10600,23 +11743,23 @@
                 </a:solidFill>
                 <a:latin typeface="Montserrat"/>
               </a:rPr>
-              <a:t>Sí → inspección (4.1)</a:t>
+              <a:t>En su defecto, los usuarios</a:t>
             </a:r>
           </a:p>
           <a:p>
             <a:pPr>
               <a:spcAft>
-                <a:spcPts val="1000"/>
+                <a:spcPts val="1100"/>
               </a:spcAft>
             </a:pPr>
             <a:r>
               <a:rPr sz="1600" b="1" i="0">
                 <a:solidFill>
-                  <a:srgbClr val="2E3A80"/>
-                </a:solidFill>
-                <a:latin typeface="Montserrat"/>
-              </a:rPr>
-              <a:t>•  </a:t>
+                  <a:srgbClr val="E8801A"/>
+                </a:solidFill>
+                <a:latin typeface="Montserrat"/>
+              </a:rPr>
+              <a:t>▸  </a:t>
             </a:r>
             <a:r>
               <a:rPr sz="1600" b="0" i="0">
@@ -10625,39 +11768,14 @@
                 </a:solidFill>
                 <a:latin typeface="Montserrat"/>
               </a:rPr>
-              <a:t>No → revisión (4.2)</a:t>
-            </a:r>
-          </a:p>
-          <a:p>
-            <a:pPr>
-              <a:spcAft>
-                <a:spcPts val="1000"/>
-              </a:spcAft>
-            </a:pPr>
-            <a:r>
-              <a:rPr sz="1600" b="1" i="0">
-                <a:solidFill>
-                  <a:srgbClr val="2E3A80"/>
-                </a:solidFill>
-                <a:latin typeface="Montserrat"/>
-              </a:rPr>
-              <a:t>•  </a:t>
-            </a:r>
-            <a:r>
-              <a:rPr sz="1600" b="0" i="0">
-                <a:solidFill>
-                  <a:srgbClr val="1B2330"/>
-                </a:solidFill>
-                <a:latin typeface="Montserrat"/>
-              </a:rPr>
-              <a:t>Las dos: cada 5 años</a:t>
-            </a:r>
-          </a:p>
-        </p:txBody>
-      </p:sp>
-      <p:sp>
-        <p:nvSpPr>
-          <p:cNvPr id="8" name="imgph" descr="IMGQ:gas meter connected to street distribution network"/>
+              <a:t>Modificaciones: siempre un instalador</a:t>
+            </a:r>
+          </a:p>
+        </p:txBody>
+      </p:sp>
+      <p:sp>
+        <p:nvSpPr>
+          <p:cNvPr id="9" name="imgph" descr="IMGQ:homeowner checking gas boiler at home"/>
           <p:cNvSpPr/>
           <p:nvPr/>
         </p:nvSpPr>
@@ -10703,7 +11821,7 @@
       </p:sp>
       <p:sp>
         <p:nvSpPr>
-          <p:cNvPr id="9" name="TextBox 8"/>
+          <p:cNvPr id="10" name="TextBox 9"/>
           <p:cNvSpPr txBox="1"/>
           <p:nvPr/>
         </p:nvSpPr>
@@ -10743,7 +11861,7 @@
                 </a:solidFill>
                 <a:latin typeface="Montserrat"/>
               </a:rPr>
-              <a:t>gas meter connected to street distribution network</a:t>
+              <a:t>homeowner checking gas boiler at home</a:t>
             </a:r>
           </a:p>
         </p:txBody>
@@ -10840,7 +11958,7 @@
                 </a:solidFill>
                 <a:latin typeface="Montserrat"/>
               </a:rPr>
-              <a:t>005 / 020</a:t>
+              <a:t>005 / 021</a:t>
             </a:r>
           </a:p>
         </p:txBody>
@@ -10888,7 +12006,7 @@
         <p:spPr>
           <a:xfrm>
             <a:off x="822960" y="457200"/>
-            <a:ext cx="8229600" cy="365760"/>
+            <a:ext cx="10058400" cy="365760"/>
           </a:xfrm>
           <a:prstGeom prst="rect">
             <a:avLst/>
@@ -10902,13 +12020,13 @@
           <a:lstStyle/>
           <a:p>
             <a:r>
-              <a:rPr sz="1200" b="1" i="0">
-                <a:solidFill>
-                  <a:srgbClr val="64748B"/>
-                </a:solidFill>
-                <a:latin typeface="Montserrat"/>
-              </a:rPr>
-              <a:t>APARTADO 4.1 · INSPECCIÓN</a:t>
+              <a:rPr sz="1300" b="1" i="0">
+                <a:solidFill>
+                  <a:srgbClr val="E8801A"/>
+                </a:solidFill>
+                <a:latin typeface="Montserrat"/>
+              </a:rPr>
+              <a:t>APARTADO 4 · LA GRAN DISTINCIÓN</a:t>
             </a:r>
           </a:p>
         </p:txBody>
@@ -10936,26 +12054,70 @@
           <a:lstStyle/>
           <a:p>
             <a:r>
-              <a:rPr sz="2700" b="1" i="0">
+              <a:rPr sz="2800" b="1" i="0">
                 <a:solidFill>
                   <a:srgbClr val="1E2761"/>
                 </a:solidFill>
                 <a:latin typeface="Montserrat"/>
               </a:rPr>
-              <a:t>Inspección: cada cinco años</a:t>
-            </a:r>
-          </a:p>
-        </p:txBody>
-      </p:sp>
-      <p:sp>
-        <p:nvSpPr>
-          <p:cNvPr id="7" name="TextBox 6"/>
+              <a:t>Inspección o revisión: una pregunta</a:t>
+            </a:r>
+          </a:p>
+        </p:txBody>
+      </p:sp>
+      <p:sp>
+        <p:nvSpPr>
+          <p:cNvPr id="7" name="Rounded Rectangle 6"/>
+          <p:cNvSpPr/>
+          <p:nvPr/>
+        </p:nvSpPr>
+        <p:spPr>
+          <a:xfrm>
+            <a:off x="868680" y="1627632"/>
+            <a:ext cx="2011680" cy="73152"/>
+          </a:xfrm>
+          <a:prstGeom prst="roundRect">
+            <a:avLst/>
+          </a:prstGeom>
+          <a:solidFill>
+            <a:srgbClr val="E8801A"/>
+          </a:solidFill>
+          <a:ln>
+            <a:noFill/>
+          </a:ln>
+          <a:effectLst/>
+        </p:spPr>
+        <p:style>
+          <a:lnRef idx="1">
+            <a:schemeClr val="accent1"/>
+          </a:lnRef>
+          <a:fillRef idx="3">
+            <a:schemeClr val="accent1"/>
+          </a:fillRef>
+          <a:effectRef idx="2">
+            <a:schemeClr val="accent1"/>
+          </a:effectRef>
+          <a:fontRef idx="minor">
+            <a:schemeClr val="lt1"/>
+          </a:fontRef>
+        </p:style>
+        <p:txBody>
+          <a:bodyPr rtlCol="0" anchor="ctr"/>
+          <a:lstStyle/>
+          <a:p>
+            <a:pPr algn="ctr"/>
+          </a:p>
+        </p:txBody>
+      </p:sp>
+      <p:sp>
+        <p:nvSpPr>
+          <p:cNvPr id="8" name="TextBox 7"/>
           <p:cNvSpPr txBox="1"/>
           <p:nvPr/>
         </p:nvSpPr>
         <p:spPr>
           <a:xfrm>
-            <a:off x="822960" y="1920240"/>
+            <a:off x="822960" y="1965960"/>
             <a:ext cx="4983480" cy="4206240"/>
           </a:xfrm>
           <a:prstGeom prst="rect">
@@ -10971,17 +12133,17 @@
           <a:p>
             <a:pPr>
               <a:spcAft>
-                <a:spcPts val="1000"/>
+                <a:spcPts val="1100"/>
               </a:spcAft>
             </a:pPr>
             <a:r>
               <a:rPr sz="1600" b="1" i="0">
                 <a:solidFill>
-                  <a:srgbClr val="2E3A80"/>
-                </a:solidFill>
-                <a:latin typeface="Montserrat"/>
-              </a:rPr>
-              <a:t>•  </a:t>
+                  <a:srgbClr val="E8801A"/>
+                </a:solidFill>
+                <a:latin typeface="Montserrat"/>
+              </a:rPr>
+              <a:t>▸  </a:t>
             </a:r>
             <a:r>
               <a:rPr sz="1600" b="0" i="0">
@@ -10990,23 +12152,23 @@
                 </a:solidFill>
                 <a:latin typeface="Montserrat"/>
               </a:rPr>
-              <a:t>Instalaciones alimentadas desde red</a:t>
+              <a:t>¿Está conectada a la red?</a:t>
             </a:r>
           </a:p>
           <a:p>
             <a:pPr>
               <a:spcAft>
-                <a:spcPts val="1000"/>
+                <a:spcPts val="1100"/>
               </a:spcAft>
             </a:pPr>
             <a:r>
               <a:rPr sz="1600" b="1" i="0">
                 <a:solidFill>
-                  <a:srgbClr val="2E3A80"/>
-                </a:solidFill>
-                <a:latin typeface="Montserrat"/>
-              </a:rPr>
-              <a:t>•  </a:t>
+                  <a:srgbClr val="E8801A"/>
+                </a:solidFill>
+                <a:latin typeface="Montserrat"/>
+              </a:rPr>
+              <a:t>▸  </a:t>
             </a:r>
             <a:r>
               <a:rPr sz="1600" b="0" i="0">
@@ -11015,23 +12177,23 @@
                 </a:solidFill>
                 <a:latin typeface="Montserrat"/>
               </a:rPr>
-              <a:t>Dentro del año natural de vencimiento</a:t>
+              <a:t>Sí → inspección (4.1)</a:t>
             </a:r>
           </a:p>
           <a:p>
             <a:pPr>
               <a:spcAft>
-                <a:spcPts val="1000"/>
+                <a:spcPts val="1100"/>
               </a:spcAft>
             </a:pPr>
             <a:r>
               <a:rPr sz="1600" b="1" i="0">
                 <a:solidFill>
-                  <a:srgbClr val="2E3A80"/>
-                </a:solidFill>
-                <a:latin typeface="Montserrat"/>
-              </a:rPr>
-              <a:t>•  </a:t>
+                  <a:srgbClr val="E8801A"/>
+                </a:solidFill>
+                <a:latin typeface="Montserrat"/>
+              </a:rPr>
+              <a:t>▸  </a:t>
             </a:r>
             <a:r>
               <a:rPr sz="1600" b="0" i="0">
@@ -11040,14 +12202,39 @@
                 </a:solidFill>
                 <a:latin typeface="Montserrat"/>
               </a:rPr>
-              <a:t>La parte común, también cada 5 años</a:t>
-            </a:r>
-          </a:p>
-        </p:txBody>
-      </p:sp>
-      <p:sp>
-        <p:nvSpPr>
-          <p:cNvPr id="8" name="imgph" descr="IMGQ:technician inspecting gas installation with checklist"/>
+              <a:t>No → revisión (4.2)</a:t>
+            </a:r>
+          </a:p>
+          <a:p>
+            <a:pPr>
+              <a:spcAft>
+                <a:spcPts val="1100"/>
+              </a:spcAft>
+            </a:pPr>
+            <a:r>
+              <a:rPr sz="1600" b="1" i="0">
+                <a:solidFill>
+                  <a:srgbClr val="E8801A"/>
+                </a:solidFill>
+                <a:latin typeface="Montserrat"/>
+              </a:rPr>
+              <a:t>▸  </a:t>
+            </a:r>
+            <a:r>
+              <a:rPr sz="1600" b="0" i="0">
+                <a:solidFill>
+                  <a:srgbClr val="1B2330"/>
+                </a:solidFill>
+                <a:latin typeface="Montserrat"/>
+              </a:rPr>
+              <a:t>Las dos: cada 5 años</a:t>
+            </a:r>
+          </a:p>
+        </p:txBody>
+      </p:sp>
+      <p:sp>
+        <p:nvSpPr>
+          <p:cNvPr id="9" name="imgph" descr="IMGQ:gas meter connected to street distribution network"/>
           <p:cNvSpPr/>
           <p:nvPr/>
         </p:nvSpPr>
@@ -11093,7 +12280,7 @@
       </p:sp>
       <p:sp>
         <p:nvSpPr>
-          <p:cNvPr id="9" name="TextBox 8"/>
+          <p:cNvPr id="10" name="TextBox 9"/>
           <p:cNvSpPr txBox="1"/>
           <p:nvPr/>
         </p:nvSpPr>
@@ -11133,7 +12320,7 @@
                 </a:solidFill>
                 <a:latin typeface="Montserrat"/>
               </a:rPr>
-              <a:t>technician inspecting gas installation with checklist</a:t>
+              <a:t>gas meter connected to street distribution network</a:t>
             </a:r>
           </a:p>
         </p:txBody>
@@ -11230,7 +12417,7 @@
                 </a:solidFill>
                 <a:latin typeface="Montserrat"/>
               </a:rPr>
-              <a:t>006 / 020</a:t>
+              <a:t>006 / 021</a:t>
             </a:r>
           </a:p>
         </p:txBody>
@@ -11278,7 +12465,7 @@
         <p:spPr>
           <a:xfrm>
             <a:off x="822960" y="457200"/>
-            <a:ext cx="8229600" cy="365760"/>
+            <a:ext cx="10058400" cy="365760"/>
           </a:xfrm>
           <a:prstGeom prst="rect">
             <a:avLst/>
@@ -11292,13 +12479,13 @@
           <a:lstStyle/>
           <a:p>
             <a:r>
-              <a:rPr sz="1200" b="1" i="0">
-                <a:solidFill>
-                  <a:srgbClr val="64748B"/>
-                </a:solidFill>
-                <a:latin typeface="Montserrat"/>
-              </a:rPr>
-              <a:t>APARTADO 4.1 · ALCANCE</a:t>
+              <a:rPr sz="1300" b="1" i="0">
+                <a:solidFill>
+                  <a:srgbClr val="E8801A"/>
+                </a:solidFill>
+                <a:latin typeface="Montserrat"/>
+              </a:rPr>
+              <a:t>APARTADO 4.1 · INSPECCIÓN</a:t>
             </a:r>
           </a:p>
         </p:txBody>
@@ -11326,26 +12513,70 @@
           <a:lstStyle/>
           <a:p>
             <a:r>
-              <a:rPr sz="2700" b="1" i="0">
+              <a:rPr sz="2800" b="1" i="0">
                 <a:solidFill>
                   <a:srgbClr val="1E2761"/>
                 </a:solidFill>
                 <a:latin typeface="Montserrat"/>
               </a:rPr>
-              <a:t>El aparato, ¿entra o no?</a:t>
-            </a:r>
-          </a:p>
-        </p:txBody>
-      </p:sp>
-      <p:sp>
-        <p:nvSpPr>
-          <p:cNvPr id="7" name="TextBox 6"/>
+              <a:t>Inspección: cada cinco años</a:t>
+            </a:r>
+          </a:p>
+        </p:txBody>
+      </p:sp>
+      <p:sp>
+        <p:nvSpPr>
+          <p:cNvPr id="7" name="Rounded Rectangle 6"/>
+          <p:cNvSpPr/>
+          <p:nvPr/>
+        </p:nvSpPr>
+        <p:spPr>
+          <a:xfrm>
+            <a:off x="868680" y="1627632"/>
+            <a:ext cx="2011680" cy="73152"/>
+          </a:xfrm>
+          <a:prstGeom prst="roundRect">
+            <a:avLst/>
+          </a:prstGeom>
+          <a:solidFill>
+            <a:srgbClr val="E8801A"/>
+          </a:solidFill>
+          <a:ln>
+            <a:noFill/>
+          </a:ln>
+          <a:effectLst/>
+        </p:spPr>
+        <p:style>
+          <a:lnRef idx="1">
+            <a:schemeClr val="accent1"/>
+          </a:lnRef>
+          <a:fillRef idx="3">
+            <a:schemeClr val="accent1"/>
+          </a:fillRef>
+          <a:effectRef idx="2">
+            <a:schemeClr val="accent1"/>
+          </a:effectRef>
+          <a:fontRef idx="minor">
+            <a:schemeClr val="lt1"/>
+          </a:fontRef>
+        </p:style>
+        <p:txBody>
+          <a:bodyPr rtlCol="0" anchor="ctr"/>
+          <a:lstStyle/>
+          <a:p>
+            <a:pPr algn="ctr"/>
+          </a:p>
+        </p:txBody>
+      </p:sp>
+      <p:sp>
+        <p:nvSpPr>
+          <p:cNvPr id="8" name="TextBox 7"/>
           <p:cNvSpPr txBox="1"/>
           <p:nvPr/>
         </p:nvSpPr>
         <p:spPr>
           <a:xfrm>
-            <a:off x="822960" y="1920240"/>
+            <a:off x="822960" y="1965960"/>
             <a:ext cx="4983480" cy="4206240"/>
           </a:xfrm>
           <a:prstGeom prst="rect">
@@ -11361,17 +12592,17 @@
           <a:p>
             <a:pPr>
               <a:spcAft>
-                <a:spcPts val="1000"/>
+                <a:spcPts val="1100"/>
               </a:spcAft>
             </a:pPr>
             <a:r>
               <a:rPr sz="1600" b="1" i="0">
                 <a:solidFill>
-                  <a:srgbClr val="2E3A80"/>
-                </a:solidFill>
-                <a:latin typeface="Montserrat"/>
-              </a:rPr>
-              <a:t>•  </a:t>
+                  <a:srgbClr val="E8801A"/>
+                </a:solidFill>
+                <a:latin typeface="Montserrat"/>
+              </a:rPr>
+              <a:t>▸  </a:t>
             </a:r>
             <a:r>
               <a:rPr sz="1600" b="0" i="0">
@@ -11380,23 +12611,23 @@
                 </a:solidFill>
                 <a:latin typeface="Montserrat"/>
               </a:rPr>
-              <a:t>≤ 70 kW: llave de usuario, aparatos incluidos</a:t>
+              <a:t>Instalaciones alimentadas desde red</a:t>
             </a:r>
           </a:p>
           <a:p>
             <a:pPr>
               <a:spcAft>
-                <a:spcPts val="1000"/>
+                <a:spcPts val="1100"/>
               </a:spcAft>
             </a:pPr>
             <a:r>
               <a:rPr sz="1600" b="1" i="0">
                 <a:solidFill>
-                  <a:srgbClr val="2E3A80"/>
-                </a:solidFill>
-                <a:latin typeface="Montserrat"/>
-              </a:rPr>
-              <a:t>•  </a:t>
+                  <a:srgbClr val="E8801A"/>
+                </a:solidFill>
+                <a:latin typeface="Montserrat"/>
+              </a:rPr>
+              <a:t>▸  </a:t>
             </a:r>
             <a:r>
               <a:rPr sz="1600" b="0" i="0">
@@ -11405,23 +12636,23 @@
                 </a:solidFill>
                 <a:latin typeface="Montserrat"/>
               </a:rPr>
-              <a:t>&gt; 70 kW: llave de edificio, excluidos</a:t>
+              <a:t>Dentro del año natural de vencimiento</a:t>
             </a:r>
           </a:p>
           <a:p>
             <a:pPr>
               <a:spcAft>
-                <a:spcPts val="1000"/>
+                <a:spcPts val="1100"/>
               </a:spcAft>
             </a:pPr>
             <a:r>
               <a:rPr sz="1600" b="1" i="0">
                 <a:solidFill>
-                  <a:srgbClr val="2E3A80"/>
-                </a:solidFill>
-                <a:latin typeface="Montserrat"/>
-              </a:rPr>
-              <a:t>•  </a:t>
+                  <a:srgbClr val="E8801A"/>
+                </a:solidFill>
+                <a:latin typeface="Montserrat"/>
+              </a:rPr>
+              <a:t>▸  </a:t>
             </a:r>
             <a:r>
               <a:rPr sz="1600" b="0" i="0">
@@ -11430,14 +12661,14 @@
                 </a:solidFill>
                 <a:latin typeface="Montserrat"/>
               </a:rPr>
-              <a:t>&gt; 5 bar: llave de acometida, excluidos</a:t>
-            </a:r>
-          </a:p>
-        </p:txBody>
-      </p:sp>
-      <p:sp>
-        <p:nvSpPr>
-          <p:cNvPr id="8" name="imgph" descr="IMGQ:gas shut off valve on wall"/>
+              <a:t>La parte común, también cada 5 años</a:t>
+            </a:r>
+          </a:p>
+        </p:txBody>
+      </p:sp>
+      <p:sp>
+        <p:nvSpPr>
+          <p:cNvPr id="9" name="imgph" descr="IMGQ:technician inspecting gas installation with checklist"/>
           <p:cNvSpPr/>
           <p:nvPr/>
         </p:nvSpPr>
@@ -11483,7 +12714,7 @@
       </p:sp>
       <p:sp>
         <p:nvSpPr>
-          <p:cNvPr id="9" name="TextBox 8"/>
+          <p:cNvPr id="10" name="TextBox 9"/>
           <p:cNvSpPr txBox="1"/>
           <p:nvPr/>
         </p:nvSpPr>
@@ -11523,7 +12754,7 @@
                 </a:solidFill>
                 <a:latin typeface="Montserrat"/>
               </a:rPr>
-              <a:t>gas shut off valve on wall</a:t>
+              <a:t>technician inspecting gas installation with checklist</a:t>
             </a:r>
           </a:p>
         </p:txBody>
@@ -11620,7 +12851,7 @@
                 </a:solidFill>
                 <a:latin typeface="Montserrat"/>
               </a:rPr>
-              <a:t>007 / 020</a:t>
+              <a:t>007 / 021</a:t>
             </a:r>
           </a:p>
         </p:txBody>
@@ -11668,7 +12899,7 @@
         <p:spPr>
           <a:xfrm>
             <a:off x="822960" y="457200"/>
-            <a:ext cx="8229600" cy="365760"/>
+            <a:ext cx="10058400" cy="365760"/>
           </a:xfrm>
           <a:prstGeom prst="rect">
             <a:avLst/>
@@ -11682,13 +12913,13 @@
           <a:lstStyle/>
           <a:p>
             <a:r>
-              <a:rPr sz="1200" b="1" i="0">
-                <a:solidFill>
-                  <a:srgbClr val="64748B"/>
-                </a:solidFill>
-                <a:latin typeface="Montserrat"/>
-              </a:rPr>
-              <a:t>APARTADO 4.1 · CONTENIDO</a:t>
+              <a:rPr sz="1300" b="1" i="0">
+                <a:solidFill>
+                  <a:srgbClr val="E8801A"/>
+                </a:solidFill>
+                <a:latin typeface="Montserrat"/>
+              </a:rPr>
+              <a:t>APARTADO 4.1 · ALCANCE</a:t>
             </a:r>
           </a:p>
         </p:txBody>
@@ -11716,26 +12947,70 @@
           <a:lstStyle/>
           <a:p>
             <a:r>
-              <a:rPr sz="2700" b="1" i="0">
+              <a:rPr sz="2800" b="1" i="0">
                 <a:solidFill>
                   <a:srgbClr val="1E2761"/>
                 </a:solidFill>
                 <a:latin typeface="Montserrat"/>
               </a:rPr>
-              <a:t>Qué se mira en la inspección</a:t>
-            </a:r>
-          </a:p>
-        </p:txBody>
-      </p:sp>
-      <p:sp>
-        <p:nvSpPr>
-          <p:cNvPr id="7" name="TextBox 6"/>
+              <a:t>El aparato, ¿entra o no?</a:t>
+            </a:r>
+          </a:p>
+        </p:txBody>
+      </p:sp>
+      <p:sp>
+        <p:nvSpPr>
+          <p:cNvPr id="7" name="Rounded Rectangle 6"/>
+          <p:cNvSpPr/>
+          <p:nvPr/>
+        </p:nvSpPr>
+        <p:spPr>
+          <a:xfrm>
+            <a:off x="868680" y="1627632"/>
+            <a:ext cx="2011680" cy="73152"/>
+          </a:xfrm>
+          <a:prstGeom prst="roundRect">
+            <a:avLst/>
+          </a:prstGeom>
+          <a:solidFill>
+            <a:srgbClr val="E8801A"/>
+          </a:solidFill>
+          <a:ln>
+            <a:noFill/>
+          </a:ln>
+          <a:effectLst/>
+        </p:spPr>
+        <p:style>
+          <a:lnRef idx="1">
+            <a:schemeClr val="accent1"/>
+          </a:lnRef>
+          <a:fillRef idx="3">
+            <a:schemeClr val="accent1"/>
+          </a:fillRef>
+          <a:effectRef idx="2">
+            <a:schemeClr val="accent1"/>
+          </a:effectRef>
+          <a:fontRef idx="minor">
+            <a:schemeClr val="lt1"/>
+          </a:fontRef>
+        </p:style>
+        <p:txBody>
+          <a:bodyPr rtlCol="0" anchor="ctr"/>
+          <a:lstStyle/>
+          <a:p>
+            <a:pPr algn="ctr"/>
+          </a:p>
+        </p:txBody>
+      </p:sp>
+      <p:sp>
+        <p:nvSpPr>
+          <p:cNvPr id="8" name="TextBox 7"/>
           <p:cNvSpPr txBox="1"/>
           <p:nvPr/>
         </p:nvSpPr>
         <p:spPr>
           <a:xfrm>
-            <a:off x="822960" y="1920240"/>
+            <a:off x="822960" y="1965960"/>
             <a:ext cx="4983480" cy="4206240"/>
           </a:xfrm>
           <a:prstGeom prst="rect">
@@ -11751,17 +13026,17 @@
           <a:p>
             <a:pPr>
               <a:spcAft>
-                <a:spcPts val="1000"/>
+                <a:spcPts val="1100"/>
               </a:spcAft>
             </a:pPr>
             <a:r>
               <a:rPr sz="1600" b="1" i="0">
                 <a:solidFill>
-                  <a:srgbClr val="2E3A80"/>
-                </a:solidFill>
-                <a:latin typeface="Montserrat"/>
-              </a:rPr>
-              <a:t>•  </a:t>
+                  <a:srgbClr val="E8801A"/>
+                </a:solidFill>
+                <a:latin typeface="Montserrat"/>
+              </a:rPr>
+              <a:t>▸  </a:t>
             </a:r>
             <a:r>
               <a:rPr sz="1600" b="0" i="0">
@@ -11770,23 +13045,23 @@
                 </a:solidFill>
                 <a:latin typeface="Montserrat"/>
               </a:rPr>
-              <a:t>Estanquidad y conservación</a:t>
+              <a:t>≤ 70 kW: llave de usuario, aparatos incluidos</a:t>
             </a:r>
           </a:p>
           <a:p>
             <a:pPr>
               <a:spcAft>
-                <a:spcPts val="1000"/>
+                <a:spcPts val="1100"/>
               </a:spcAft>
             </a:pPr>
             <a:r>
               <a:rPr sz="1600" b="1" i="0">
                 <a:solidFill>
-                  <a:srgbClr val="2E3A80"/>
-                </a:solidFill>
-                <a:latin typeface="Montserrat"/>
-              </a:rPr>
-              <a:t>•  </a:t>
+                  <a:srgbClr val="E8801A"/>
+                </a:solidFill>
+                <a:latin typeface="Montserrat"/>
+              </a:rPr>
+              <a:t>▸  </a:t>
             </a:r>
             <a:r>
               <a:rPr sz="1600" b="0" i="0">
@@ -11795,23 +13070,23 @@
                 </a:solidFill>
                 <a:latin typeface="Montserrat"/>
               </a:rPr>
-              <a:t>Combustión higiénica</a:t>
+              <a:t>&gt; 70 kW: llave de edificio, excluidos</a:t>
             </a:r>
           </a:p>
           <a:p>
             <a:pPr>
               <a:spcAft>
-                <a:spcPts val="1000"/>
+                <a:spcPts val="1100"/>
               </a:spcAft>
             </a:pPr>
             <a:r>
               <a:rPr sz="1600" b="1" i="0">
                 <a:solidFill>
-                  <a:srgbClr val="2E3A80"/>
-                </a:solidFill>
-                <a:latin typeface="Montserrat"/>
-              </a:rPr>
-              <a:t>•  </a:t>
+                  <a:srgbClr val="E8801A"/>
+                </a:solidFill>
+                <a:latin typeface="Montserrat"/>
+              </a:rPr>
+              <a:t>▸  </a:t>
             </a:r>
             <a:r>
               <a:rPr sz="1600" b="0" i="0">
@@ -11820,39 +13095,14 @@
                 </a:solidFill>
                 <a:latin typeface="Montserrat"/>
               </a:rPr>
-              <a:t>Ventilación y volumen del local</a:t>
-            </a:r>
-          </a:p>
-          <a:p>
-            <a:pPr>
-              <a:spcAft>
-                <a:spcPts val="1000"/>
-              </a:spcAft>
-            </a:pPr>
-            <a:r>
-              <a:rPr sz="1600" b="1" i="0">
-                <a:solidFill>
-                  <a:srgbClr val="2E3A80"/>
-                </a:solidFill>
-                <a:latin typeface="Montserrat"/>
-              </a:rPr>
-              <a:t>•  </a:t>
-            </a:r>
-            <a:r>
-              <a:rPr sz="1600" b="0" i="0">
-                <a:solidFill>
-                  <a:srgbClr val="1B2330"/>
-                </a:solidFill>
-                <a:latin typeface="Montserrat"/>
-              </a:rPr>
-              <a:t>Detección de gas y evacuación de humos</a:t>
-            </a:r>
-          </a:p>
-        </p:txBody>
-      </p:sp>
-      <p:sp>
-        <p:nvSpPr>
-          <p:cNvPr id="8" name="imgph" descr="IMGQ:blue gas flame on burner"/>
+              <a:t>&gt; 5 bar: llave de acometida, excluidos</a:t>
+            </a:r>
+          </a:p>
+        </p:txBody>
+      </p:sp>
+      <p:sp>
+        <p:nvSpPr>
+          <p:cNvPr id="9" name="imgph" descr="IMGQ:gas shut off valve on wall"/>
           <p:cNvSpPr/>
           <p:nvPr/>
         </p:nvSpPr>
@@ -11898,7 +13148,7 @@
       </p:sp>
       <p:sp>
         <p:nvSpPr>
-          <p:cNvPr id="9" name="TextBox 8"/>
+          <p:cNvPr id="10" name="TextBox 9"/>
           <p:cNvSpPr txBox="1"/>
           <p:nvPr/>
         </p:nvSpPr>
@@ -11938,7 +13188,7 @@
                 </a:solidFill>
                 <a:latin typeface="Montserrat"/>
               </a:rPr>
-              <a:t>blue gas flame on burner</a:t>
+              <a:t>gas shut off valve on wall</a:t>
             </a:r>
           </a:p>
         </p:txBody>
@@ -12035,7 +13285,7 @@
                 </a:solidFill>
                 <a:latin typeface="Montserrat"/>
               </a:rPr>
-              <a:t>008 / 020</a:t>
+              <a:t>008 / 021</a:t>
             </a:r>
           </a:p>
         </p:txBody>
@@ -12083,7 +13333,7 @@
         <p:spPr>
           <a:xfrm>
             <a:off x="822960" y="457200"/>
-            <a:ext cx="8229600" cy="365760"/>
+            <a:ext cx="10058400" cy="365760"/>
           </a:xfrm>
           <a:prstGeom prst="rect">
             <a:avLst/>
@@ -12097,13 +13347,13 @@
           <a:lstStyle/>
           <a:p>
             <a:r>
-              <a:rPr sz="1200" b="1" i="0">
-                <a:solidFill>
-                  <a:srgbClr val="64748B"/>
-                </a:solidFill>
-                <a:latin typeface="Montserrat"/>
-              </a:rPr>
-              <a:t>APARTADO 4.1 · CRITERIOS</a:t>
+              <a:rPr sz="1300" b="1" i="0">
+                <a:solidFill>
+                  <a:srgbClr val="E8801A"/>
+                </a:solidFill>
+                <a:latin typeface="Montserrat"/>
+              </a:rPr>
+              <a:t>APARTADO 4.1 · CONTENIDO</a:t>
             </a:r>
           </a:p>
         </p:txBody>
@@ -12131,26 +13381,70 @@
           <a:lstStyle/>
           <a:p>
             <a:r>
-              <a:rPr sz="2700" b="1" i="0">
+              <a:rPr sz="2800" b="1" i="0">
                 <a:solidFill>
                   <a:srgbClr val="1E2761"/>
                 </a:solidFill>
                 <a:latin typeface="Montserrat"/>
               </a:rPr>
-              <a:t>La excepción peligrosa</a:t>
-            </a:r>
-          </a:p>
-        </p:txBody>
-      </p:sp>
-      <p:sp>
-        <p:nvSpPr>
-          <p:cNvPr id="7" name="TextBox 6"/>
+              <a:t>Qué se mira en la inspección</a:t>
+            </a:r>
+          </a:p>
+        </p:txBody>
+      </p:sp>
+      <p:sp>
+        <p:nvSpPr>
+          <p:cNvPr id="7" name="Rounded Rectangle 6"/>
+          <p:cNvSpPr/>
+          <p:nvPr/>
+        </p:nvSpPr>
+        <p:spPr>
+          <a:xfrm>
+            <a:off x="868680" y="1627632"/>
+            <a:ext cx="2011680" cy="73152"/>
+          </a:xfrm>
+          <a:prstGeom prst="roundRect">
+            <a:avLst/>
+          </a:prstGeom>
+          <a:solidFill>
+            <a:srgbClr val="E8801A"/>
+          </a:solidFill>
+          <a:ln>
+            <a:noFill/>
+          </a:ln>
+          <a:effectLst/>
+        </p:spPr>
+        <p:style>
+          <a:lnRef idx="1">
+            <a:schemeClr val="accent1"/>
+          </a:lnRef>
+          <a:fillRef idx="3">
+            <a:schemeClr val="accent1"/>
+          </a:fillRef>
+          <a:effectRef idx="2">
+            <a:schemeClr val="accent1"/>
+          </a:effectRef>
+          <a:fontRef idx="minor">
+            <a:schemeClr val="lt1"/>
+          </a:fontRef>
+        </p:style>
+        <p:txBody>
+          <a:bodyPr rtlCol="0" anchor="ctr"/>
+          <a:lstStyle/>
+          <a:p>
+            <a:pPr algn="ctr"/>
+          </a:p>
+        </p:txBody>
+      </p:sp>
+      <p:sp>
+        <p:nvSpPr>
+          <p:cNvPr id="8" name="TextBox 7"/>
           <p:cNvSpPr txBox="1"/>
           <p:nvPr/>
         </p:nvSpPr>
         <p:spPr>
           <a:xfrm>
-            <a:off x="822960" y="1920240"/>
+            <a:off x="822960" y="1965960"/>
             <a:ext cx="4983480" cy="4206240"/>
           </a:xfrm>
           <a:prstGeom prst="rect">
@@ -12166,17 +13460,17 @@
           <a:p>
             <a:pPr>
               <a:spcAft>
-                <a:spcPts val="1000"/>
+                <a:spcPts val="1100"/>
               </a:spcAft>
             </a:pPr>
             <a:r>
               <a:rPr sz="1600" b="1" i="0">
                 <a:solidFill>
-                  <a:srgbClr val="2E3A80"/>
-                </a:solidFill>
-                <a:latin typeface="Montserrat"/>
-              </a:rPr>
-              <a:t>•  </a:t>
+                  <a:srgbClr val="E8801A"/>
+                </a:solidFill>
+                <a:latin typeface="Montserrat"/>
+              </a:rPr>
+              <a:t>▸  </a:t>
             </a:r>
             <a:r>
               <a:rPr sz="1600" b="0" i="0">
@@ -12185,23 +13479,23 @@
                 </a:solidFill>
                 <a:latin typeface="Montserrat"/>
               </a:rPr>
-              <a:t>Criterios: versión de cuando se montó</a:t>
+              <a:t>Estanquidad y conservación</a:t>
             </a:r>
           </a:p>
           <a:p>
             <a:pPr>
               <a:spcAft>
-                <a:spcPts val="1000"/>
+                <a:spcPts val="1100"/>
               </a:spcAft>
             </a:pPr>
             <a:r>
               <a:rPr sz="1600" b="1" i="0">
                 <a:solidFill>
-                  <a:srgbClr val="2E3A80"/>
-                </a:solidFill>
-                <a:latin typeface="Montserrat"/>
-              </a:rPr>
-              <a:t>•  </a:t>
+                  <a:srgbClr val="E8801A"/>
+                </a:solidFill>
+                <a:latin typeface="Montserrat"/>
+              </a:rPr>
+              <a:t>▸  </a:t>
             </a:r>
             <a:r>
               <a:rPr sz="1600" b="0" i="0">
@@ -12210,23 +13504,23 @@
                 </a:solidFill>
                 <a:latin typeface="Montserrat"/>
               </a:rPr>
-              <a:t>Salvo tipo A o B en dormitorio o baño</a:t>
+              <a:t>Combustión higiénica</a:t>
             </a:r>
           </a:p>
           <a:p>
             <a:pPr>
               <a:spcAft>
-                <a:spcPts val="1000"/>
+                <a:spcPts val="1100"/>
               </a:spcAft>
             </a:pPr>
             <a:r>
               <a:rPr sz="1600" b="1" i="0">
                 <a:solidFill>
-                  <a:srgbClr val="2E3A80"/>
-                </a:solidFill>
-                <a:latin typeface="Montserrat"/>
-              </a:rPr>
-              <a:t>•  </a:t>
+                  <a:srgbClr val="E8801A"/>
+                </a:solidFill>
+                <a:latin typeface="Montserrat"/>
+              </a:rPr>
+              <a:t>▸  </a:t>
             </a:r>
             <a:r>
               <a:rPr sz="1600" b="0" i="0">
@@ -12235,23 +13529,23 @@
                 </a:solidFill>
                 <a:latin typeface="Montserrat"/>
               </a:rPr>
-              <a:t>y falta de detección y corte de gas</a:t>
+              <a:t>Ventilación y volumen del local</a:t>
             </a:r>
           </a:p>
           <a:p>
             <a:pPr>
               <a:spcAft>
-                <a:spcPts val="1000"/>
+                <a:spcPts val="1100"/>
               </a:spcAft>
             </a:pPr>
             <a:r>
               <a:rPr sz="1600" b="1" i="0">
                 <a:solidFill>
-                  <a:srgbClr val="2E3A80"/>
-                </a:solidFill>
-                <a:latin typeface="Montserrat"/>
-              </a:rPr>
-              <a:t>•  </a:t>
+                  <a:srgbClr val="E8801A"/>
+                </a:solidFill>
+                <a:latin typeface="Montserrat"/>
+              </a:rPr>
+              <a:t>▸  </a:t>
             </a:r>
             <a:r>
               <a:rPr sz="1600" b="0" i="0">
@@ -12260,14 +13554,14 @@
                 </a:solidFill>
                 <a:latin typeface="Montserrat"/>
               </a:rPr>
-              <a:t>Esos casos: norma de hoy</a:t>
-            </a:r>
-          </a:p>
-        </p:txBody>
-      </p:sp>
-      <p:sp>
-        <p:nvSpPr>
-          <p:cNvPr id="8" name="imgph" descr="IMGQ:gas water heater installed in bathroom"/>
+              <a:t>Detección de gas y evacuación de humos</a:t>
+            </a:r>
+          </a:p>
+        </p:txBody>
+      </p:sp>
+      <p:sp>
+        <p:nvSpPr>
+          <p:cNvPr id="9" name="imgph" descr="IMGQ:blue gas flame on burner"/>
           <p:cNvSpPr/>
           <p:nvPr/>
         </p:nvSpPr>
@@ -12313,7 +13607,7 @@
       </p:sp>
       <p:sp>
         <p:nvSpPr>
-          <p:cNvPr id="9" name="TextBox 8"/>
+          <p:cNvPr id="10" name="TextBox 9"/>
           <p:cNvSpPr txBox="1"/>
           <p:nvPr/>
         </p:nvSpPr>
@@ -12353,7 +13647,7 @@
                 </a:solidFill>
                 <a:latin typeface="Montserrat"/>
               </a:rPr>
-              <a:t>gas water heater installed in bathroom</a:t>
+              <a:t>blue gas flame on burner</a:t>
             </a:r>
           </a:p>
         </p:txBody>
@@ -12450,7 +13744,7 @@
                 </a:solidFill>
                 <a:latin typeface="Montserrat"/>
               </a:rPr>
-              <a:t>009 / 020</a:t>
+              <a:t>009 / 021</a:t>
             </a:r>
           </a:p>
         </p:txBody>
@@ -12498,7 +13792,7 @@
         <p:spPr>
           <a:xfrm>
             <a:off x="822960" y="457200"/>
-            <a:ext cx="8229600" cy="365760"/>
+            <a:ext cx="10058400" cy="365760"/>
           </a:xfrm>
           <a:prstGeom prst="rect">
             <a:avLst/>
@@ -12512,13 +13806,13 @@
           <a:lstStyle/>
           <a:p>
             <a:r>
-              <a:rPr sz="1200" b="1" i="0">
-                <a:solidFill>
-                  <a:srgbClr val="64748B"/>
-                </a:solidFill>
-                <a:latin typeface="Montserrat"/>
-              </a:rPr>
-              <a:t>APARTADO 4.1.1 · PROCEDIMIENTO</a:t>
+              <a:rPr sz="1300" b="1" i="0">
+                <a:solidFill>
+                  <a:srgbClr val="E8801A"/>
+                </a:solidFill>
+                <a:latin typeface="Montserrat"/>
+              </a:rPr>
+              <a:t>APARTADO 4.1 · CRITERIOS</a:t>
             </a:r>
           </a:p>
         </p:txBody>
@@ -12546,26 +13840,70 @@
           <a:lstStyle/>
           <a:p>
             <a:r>
-              <a:rPr sz="2700" b="1" i="0">
+              <a:rPr sz="2800" b="1" i="0">
                 <a:solidFill>
                   <a:srgbClr val="1E2761"/>
                 </a:solidFill>
                 <a:latin typeface="Montserrat"/>
               </a:rPr>
-              <a:t>Aviso y quién inspecciona</a:t>
-            </a:r>
-          </a:p>
-        </p:txBody>
-      </p:sp>
-      <p:sp>
-        <p:nvSpPr>
-          <p:cNvPr id="7" name="TextBox 6"/>
+              <a:t>La excepción peligrosa</a:t>
+            </a:r>
+          </a:p>
+        </p:txBody>
+      </p:sp>
+      <p:sp>
+        <p:nvSpPr>
+          <p:cNvPr id="7" name="Rounded Rectangle 6"/>
+          <p:cNvSpPr/>
+          <p:nvPr/>
+        </p:nvSpPr>
+        <p:spPr>
+          <a:xfrm>
+            <a:off x="868680" y="1627632"/>
+            <a:ext cx="2011680" cy="73152"/>
+          </a:xfrm>
+          <a:prstGeom prst="roundRect">
+            <a:avLst/>
+          </a:prstGeom>
+          <a:solidFill>
+            <a:srgbClr val="E8801A"/>
+          </a:solidFill>
+          <a:ln>
+            <a:noFill/>
+          </a:ln>
+          <a:effectLst/>
+        </p:spPr>
+        <p:style>
+          <a:lnRef idx="1">
+            <a:schemeClr val="accent1"/>
+          </a:lnRef>
+          <a:fillRef idx="3">
+            <a:schemeClr val="accent1"/>
+          </a:fillRef>
+          <a:effectRef idx="2">
+            <a:schemeClr val="accent1"/>
+          </a:effectRef>
+          <a:fontRef idx="minor">
+            <a:schemeClr val="lt1"/>
+          </a:fontRef>
+        </p:style>
+        <p:txBody>
+          <a:bodyPr rtlCol="0" anchor="ctr"/>
+          <a:lstStyle/>
+          <a:p>
+            <a:pPr algn="ctr"/>
+          </a:p>
+        </p:txBody>
+      </p:sp>
+      <p:sp>
+        <p:nvSpPr>
+          <p:cNvPr id="8" name="TextBox 7"/>
           <p:cNvSpPr txBox="1"/>
           <p:nvPr/>
         </p:nvSpPr>
         <p:spPr>
           <a:xfrm>
-            <a:off x="822960" y="1920240"/>
+            <a:off x="822960" y="1965960"/>
             <a:ext cx="4983480" cy="4206240"/>
           </a:xfrm>
           <a:prstGeom prst="rect">
@@ -12581,17 +13919,17 @@
           <a:p>
             <a:pPr>
               <a:spcAft>
-                <a:spcPts val="1000"/>
+                <a:spcPts val="1100"/>
               </a:spcAft>
             </a:pPr>
             <a:r>
               <a:rPr sz="1600" b="1" i="0">
                 <a:solidFill>
-                  <a:srgbClr val="2E3A80"/>
-                </a:solidFill>
-                <a:latin typeface="Montserrat"/>
-              </a:rPr>
-              <a:t>•  </a:t>
+                  <a:srgbClr val="E8801A"/>
+                </a:solidFill>
+                <a:latin typeface="Montserrat"/>
+              </a:rPr>
+              <a:t>▸  </a:t>
             </a:r>
             <a:r>
               <a:rPr sz="1600" b="0" i="0">
@@ -12600,23 +13938,23 @@
                 </a:solidFill>
                 <a:latin typeface="Montserrat"/>
               </a:rPr>
-              <a:t>El distribuidor avisa con 3 meses</a:t>
+              <a:t>Criterios: versión de cuando se montó</a:t>
             </a:r>
           </a:p>
           <a:p>
             <a:pPr>
               <a:spcAft>
-                <a:spcPts val="1000"/>
+                <a:spcPts val="1100"/>
               </a:spcAft>
             </a:pPr>
             <a:r>
               <a:rPr sz="1600" b="1" i="0">
                 <a:solidFill>
-                  <a:srgbClr val="2E3A80"/>
-                </a:solidFill>
-                <a:latin typeface="Montserrat"/>
-              </a:rPr>
-              <a:t>•  </a:t>
+                  <a:srgbClr val="E8801A"/>
+                </a:solidFill>
+                <a:latin typeface="Montserrat"/>
+              </a:rPr>
+              <a:t>▸  </a:t>
             </a:r>
             <a:r>
               <a:rPr sz="1600" b="0" i="0">
@@ -12625,23 +13963,23 @@
                 </a:solidFill>
                 <a:latin typeface="Montserrat"/>
               </a:rPr>
-              <a:t>Individuales: instaladores A, B o C</a:t>
+              <a:t>Salvo tipo A o B en dormitorio o baño</a:t>
             </a:r>
           </a:p>
           <a:p>
             <a:pPr>
               <a:spcAft>
-                <a:spcPts val="1000"/>
+                <a:spcPts val="1100"/>
               </a:spcAft>
             </a:pPr>
             <a:r>
               <a:rPr sz="1600" b="1" i="0">
                 <a:solidFill>
-                  <a:srgbClr val="2E3A80"/>
-                </a:solidFill>
-                <a:latin typeface="Montserrat"/>
-              </a:rPr>
-              <a:t>•  </a:t>
+                  <a:srgbClr val="E8801A"/>
+                </a:solidFill>
+                <a:latin typeface="Montserrat"/>
+              </a:rPr>
+              <a:t>▸  </a:t>
             </a:r>
             <a:r>
               <a:rPr sz="1600" b="0" i="0">
@@ -12650,14 +13988,39 @@
                 </a:solidFill>
                 <a:latin typeface="Montserrat"/>
               </a:rPr>
-              <a:t>Comunes: solo A o B</a:t>
-            </a:r>
-          </a:p>
-        </p:txBody>
-      </p:sp>
-      <p:sp>
-        <p:nvSpPr>
-          <p:cNvPr id="8" name="imgph" descr="IMGQ:gas installer showing professional ID card"/>
+              <a:t>y falta de detección y corte de gas</a:t>
+            </a:r>
+          </a:p>
+          <a:p>
+            <a:pPr>
+              <a:spcAft>
+                <a:spcPts val="1100"/>
+              </a:spcAft>
+            </a:pPr>
+            <a:r>
+              <a:rPr sz="1600" b="1" i="0">
+                <a:solidFill>
+                  <a:srgbClr val="E8801A"/>
+                </a:solidFill>
+                <a:latin typeface="Montserrat"/>
+              </a:rPr>
+              <a:t>▸  </a:t>
+            </a:r>
+            <a:r>
+              <a:rPr sz="1600" b="0" i="0">
+                <a:solidFill>
+                  <a:srgbClr val="1B2330"/>
+                </a:solidFill>
+                <a:latin typeface="Montserrat"/>
+              </a:rPr>
+              <a:t>Esos casos: norma de hoy</a:t>
+            </a:r>
+          </a:p>
+        </p:txBody>
+      </p:sp>
+      <p:sp>
+        <p:nvSpPr>
+          <p:cNvPr id="9" name="imgph" descr="IMGQ:gas water heater installed in bathroom"/>
           <p:cNvSpPr/>
           <p:nvPr/>
         </p:nvSpPr>
@@ -12703,7 +14066,7 @@
       </p:sp>
       <p:sp>
         <p:nvSpPr>
-          <p:cNvPr id="9" name="TextBox 8"/>
+          <p:cNvPr id="10" name="TextBox 9"/>
           <p:cNvSpPr txBox="1"/>
           <p:nvPr/>
         </p:nvSpPr>
@@ -12743,7 +14106,7 @@
                 </a:solidFill>
                 <a:latin typeface="Montserrat"/>
               </a:rPr>
-              <a:t>gas installer showing professional ID card</a:t>
+              <a:t>gas water heater installed in bathroom</a:t>
             </a:r>
           </a:p>
         </p:txBody>

--- a/Curso Gas B/04 - ITC-ICG 07 - Instalaciones receptoras de combustibles gaseosos/04 - ITC-ICG 07 - Instalaciones receptoras de combustibles gaseosos - Vídeo 3.pptx
+++ b/Curso Gas B/04 - ITC-ICG 07 - Instalaciones receptoras de combustibles gaseosos/04 - ITC-ICG 07 - Instalaciones receptoras de combustibles gaseosos - Vídeo 3.pptx
@@ -606,12 +606,17 @@
           <a:lstStyle/>
           <a:p>
             <a:r>
-              <a:t>N1: ¿Por qué sí entra?</a:t>
-            </a:r>
-          </a:p>
-          <a:p>
-            <a:r>
-              <a:t>N2: Porque en las instalaciones de hasta setenta kilovatios la inspección llega desde la llave de usuario hasta los aparatos, incluidos; el aparato se mira. El aparato solo queda excluido cuando la instalación es grande, de más de setenta o centralizada, o de más de cinco bar. Truco: en lo pequeño y doméstico, el aparato dentro; en lo grande, fuera.</a:t>
+              <a:t>N1: ¿Ya lo tienes?</a:t>
+            </a:r>
+          </a:p>
+          <a:p>
+            <a:r>
+              <a:t>N2: La respuesta correcta es la opción B: sí, la inspección lo incluye. En las instalaciones de hasta setenta kilovatios la inspección llega desde la llave de usuario hasta los aparatos, incluidos; el aparato se mira. El aparato solo queda excluido cuando la instalación es grande, de más de setenta o centralizada, o de más de cinco bar; por eso las opciones A, C y D se quedan cortas o cambian el caso. Truco: en lo pequeño y doméstico, el aparato dentro; en lo grande, fuera.</a:t>
+            </a:r>
+          </a:p>
+          <a:p>
+            <a:r>
+              <a:t>N1: Hasta setenta, el aparato entra.</a:t>
             </a:r>
           </a:p>
         </p:txBody>
@@ -1131,7 +1136,7 @@
           <a:lstStyle/>
           <a:p>
             <a:r>
-              <a:t>N1: Aparece una fuga de gas en la inspección. ¿Es cosa leve con plazo o cosa grave de cortar en el acto?</a:t>
+              <a:t>N1: Caso de anomalías. La pregunta: durante una inspección se detecta una fuga de gas, ¿cómo se clasifica? Escucha las opciones. Opción A, anomalía secundaria, con plazo de quince días. Opción B, anomalía principal, con corte y precinto. Opción C, defecto leve, se anota y nada más. Opción D, depende de la potencia de la instalación. Tómate un segundo.</a:t>
             </a:r>
           </a:p>
           <a:p>
@@ -1206,12 +1211,17 @@
           <a:lstStyle/>
           <a:p>
             <a:r>
-              <a:t>N1: ¿Por qué principal?</a:t>
-            </a:r>
-          </a:p>
-          <a:p>
-            <a:r>
-              <a:t>N2: Porque todas las fugas detectadas se consideran siempre anomalía principal, sin excepción. Y una anomalía principal que no se puede corregir en el momento obliga a interrumpir el suministro y precintar la parte afectada. La opción de los quince días es la trampa: ese plazo es para las secundarias por falta de estanquidad, no para una fuga. Truco: fuga, siempre principal, siempre corte.</a:t>
+              <a:t>N1: ¿Lo has pensado?</a:t>
+            </a:r>
+          </a:p>
+          <a:p>
+            <a:r>
+              <a:t>N2: La respuesta correcta es la opción B: anomalía principal, con corte y precinto. Todas las fugas detectadas se consideran siempre anomalía principal, sin excepción; y una principal que no se puede corregir en el momento obliga a interrumpir el suministro y precintar la parte afectada. La opción A, la de los quince días, es la trampa: ese plazo es para las secundarias por falta de estanquidad, nunca para una fuga. Y ni es un defecto leve ni depende de la potencia. Truco: fuga, siempre principal, siempre corte.</a:t>
+            </a:r>
+          </a:p>
+          <a:p>
+            <a:r>
+              <a:t>N1: Fuga igual a principal. Sin discusión.</a:t>
             </a:r>
           </a:p>
         </p:txBody>
@@ -1956,12 +1966,12 @@
           <a:lstStyle/>
           <a:p>
             <a:r>
-              <a:t>N1: Un chalé con depósito propio, instalación individual, pasa su revisión periódica. ¿Qué modelo se firma?</a:t>
-            </a:r>
-          </a:p>
-          <a:p>
-            <a:r>
-              <a:t>N2: Recuerda las parejas de la tabla: del uno al tres son de montaje, el cuatro y el cinco de revisión sin red. Y entre esos dos, uno es para individuales y otro para comunes.</a:t>
+              <a:t>N1: Última de modelos de impreso. La pregunta: ¿qué modelo certifica la revisión periódica de una instalación individual de depósito propio? Escucha las opciones. Opción A, el uno erre ge guion uno. Opción B, el uno erre ge guion tres. Opción C, el uno erre ge guion cuatro. Opción D, el uno erre ge guion cinco. Piénsalo antes de la solución.</a:t>
+            </a:r>
+          </a:p>
+          <a:p>
+            <a:r>
+              <a:t>N2: Recuerda las parejas de la tabla: del uno al tres son de montaje, y el cuatro y el cinco de revisión sin red. Y entre esos dos, uno es para individuales y otro para comunes.</a:t>
             </a:r>
           </a:p>
         </p:txBody>
@@ -2031,12 +2041,17 @@
           <a:lstStyle/>
           <a:p>
             <a:r>
-              <a:t>N1: ¿Por qué el cuatro?</a:t>
-            </a:r>
-          </a:p>
-          <a:p>
-            <a:r>
-              <a:t>N2: Porque el uno erre ge guion cuatro es el certificado de revisión periódica de instalaciones individuales y aparatos no alimentados desde red, justo el caso del depósito propio en una vivienda. El cinco sería si fuese la instalación común del edificio. El uno y el tres son de instalación, de montaje, no de revisión. Truco: revisión sin red e individual, el cuatro; común, el cinco.</a:t>
+              <a:t>N1: ¿Ya lo tienes?</a:t>
+            </a:r>
+          </a:p>
+          <a:p>
+            <a:r>
+              <a:t>N2: La respuesta correcta es la opción C: el uno erre ge guion cuatro. Es el certificado de revisión periódica de instalaciones individuales y aparatos no alimentados desde red, justo el caso del depósito propio en una vivienda. La opción D, el guion cinco, sería si fuese la instalación común del edificio. Y las opciones del uno y el tres son de instalación, de montaje, no de revisión. Truco: revisión sin red e individual, el cuatro; común, el cinco.</a:t>
+            </a:r>
+          </a:p>
+          <a:p>
+            <a:r>
+              <a:t>N1: Depósito propio e individual, el cuatro.</a:t>
             </a:r>
           </a:p>
         </p:txBody>
@@ -2707,12 +2722,12 @@
           <a:lstStyle/>
           <a:p>
             <a:r>
-              <a:t>N1: Instalación pequeña, de hasta setenta kilovatios. ¿El inspector revisa también el aparato o solo las tuberías?</a:t>
-            </a:r>
-          </a:p>
-          <a:p>
-            <a:r>
-              <a:t>N2: Acuérdate de la regla de la tabla: cuanto más grande la instalación, más se aleja el aparato de la inspección. Aquí estamos en la pequeña, la doméstica.</a:t>
+              <a:t>N1: Pregunta de alcance de la inspección. Escucha: en una instalación de hasta setenta kilovatios, ¿el aparato de gas entra en la inspección? Y las cuatro opciones. Opción A, no, siempre queda excluido. Opción B, sí, la inspección lo incluye. Opción C, solo si trabaja a más de cinco bar. Opción D, solo en instalaciones centralizadas. Piénsalo un momento.</a:t>
+            </a:r>
+          </a:p>
+          <a:p>
+            <a:r>
+              <a:t>N2: Acuérdate de la regla de la tabla: cuanto más grande la instalación, más se aleja el aparato de la inspección. Y aquí estamos en la pequeña, la doméstica.</a:t>
             </a:r>
           </a:p>
         </p:txBody>
